--- a/SEVEN-G/pptx/es/SEVEN-G_Curso_Consultor.pptx
+++ b/SEVEN-G/pptx/es/SEVEN-G_Curso_Consultor.pptx
@@ -7222,6 +7222,40 @@
           </a:p>
         </p:txBody>
       </p:sp>
+      <p:sp>
+        <p:nvSpPr>
+          <p:cNvPr id="254" name="Texto 254"/>
+          <p:cNvSpPr txBox="1"/>
+          <p:nvPr/>
+        </p:nvSpPr>
+        <p:spPr>
+          <a:xfrm>
+            <a:off x="609600" y="5550000"/>
+            <a:ext cx="10972800" cy="1000000"/>
+          </a:xfrm>
+          <a:prstGeom prst="rect">
+            <a:avLst/>
+          </a:prstGeom>
+          <a:noFill/>
+        </p:spPr>
+        <p:txBody>
+          <a:bodyPr wrap="square" anchor="t" lIns="45720" rIns="45720">
+            <a:noAutofit/>
+          </a:bodyPr>
+          <a:lstStyle/>
+          <a:p>
+            <a:pPr algn="ctr"/>
+            <a:r>
+              <a:rPr lang="es-ES" sz="1000" dirty="0">
+                <a:solidFill>
+                  <a:srgbClr val="564D47"/>
+                </a:solidFill>
+              </a:rPr>
+              <a:t>Aviso legal: ayuda metodológica genérica y gratuita, «tal cual» y con fines informativos; no es asesoramiento jurídico ni está revisada jurídicamente para ningún caso. Cada organización la adapta y es responsable de su revisión legal y de su cumplimiento regulatorio; puede no recoger cambios normativos recientes. En la máxima medida permitida por la ley, el autor no asume responsabilidad alguna por los efectos de su aplicación. No otorga certificación de ningún tipo. Detalle en el documento 93.</a:t>
+            </a:r>
+          </a:p>
+        </p:txBody>
+      </p:sp>
     </p:spTree>
   </p:cSld>
   <p:clrMapOvr>

--- a/SEVEN-G/pptx/es/SEVEN-G_Curso_Consultor.pptx
+++ b/SEVEN-G/pptx/es/SEVEN-G_Curso_Consultor.pptx
@@ -31,6 +31,7 @@
     <p:sldId id="279" r:id="rIdS24"/>
     <p:sldId id="280" r:id="rIdS25"/>
     <p:sldId id="281" r:id="rIdS26"/>
+    <p:sldId id="282" r:id="rIdS27"/>
   </p:sldIdLst>
   <p:sldSz cx="12192000" cy="6858000" type="screen16x9"/>
   <p:notesSz cx="6858000" cy="9144000"/>
@@ -1125,7 +1126,7 @@
       </p:sp>
       <p:pic>
         <p:nvPicPr>
-          <p:cNvPr id="124" name="Imagen 124" descr="Panel del consejo con las tarjetas de cartera y valor"/>
+          <p:cNvPr id="124" name="Imagen 124" descr="Panel del consejo: tarjetas de cartera y valor y la lectura «Qué frena el escalado»"/>
           <p:cNvPicPr>
             <a:picLocks noChangeAspect="1"/>
           </p:cNvPicPr>
@@ -1190,7 +1191,7 @@
                   <a:srgbClr val="2F2B28"/>
                 </a:solidFill>
               </a:rPr>
-              <a:t>15 casos: cuántos hay en uso, en desarrollo, en prueba de concepto, propuestos y fuera.</a:t>
+              <a:t>Arriba, las cifras: 15 casos, costes 2,4 M€ al año, retorno total 7,3 M€ y neto anual 4,8 M€. Cada cifra se pulsa y abre sus casos.</a:t>
             </a:r>
           </a:p>
           <a:p>
@@ -1210,7 +1211,7 @@
                   <a:srgbClr val="2F2B28"/>
                 </a:solidFill>
               </a:rPr>
-              <a:t>Costes 2,4 M€ al año y retorno total 7,3 M€ (eficiencias más retorno): el neto anual es 4,8 M€.</a:t>
+              <a:t>La tarjeta amarilla es la importante: solo el 36 % del valor está validado por control de gestión. En rojo: solo 3 de 15 casos tienen todos los controles.</a:t>
             </a:r>
           </a:p>
           <a:p>
@@ -1230,7 +1231,7 @@
                   <a:srgbClr val="2F2B28"/>
                 </a:solidFill>
               </a:rPr>
-              <a:t>La tarjeta amarilla es la importante: solo el 36 % del valor está validado por control de gestión. El resto es declarado o estimado.</a:t>
+              <a:t>Debajo, «Qué frena el escalado»: los tres frenos por los que empezar, con qué bloquean, qué hacer, quién y el valor en juego (documento 60 §10.4).</a:t>
             </a:r>
           </a:p>
           <a:p>
@@ -1250,7 +1251,7 @@
                   <a:srgbClr val="2F2B28"/>
                 </a:solidFill>
               </a:rPr>
-              <a:t>La capacidad liberada que no se materializa aparece aparte y no suma.</a:t>
+              <a:t>En el ejemplo: primero riesgo y cumplimiento (bloquea G5), después el valor sin validar (bloquea G7 · Escalar) y los casos que no avanzan.</a:t>
             </a:r>
           </a:p>
           <a:p>
@@ -1270,9 +1271,254 @@
                   <a:srgbClr val="2F2B28"/>
                 </a:solidFill>
               </a:rPr>
-              <a:t>En rojo: solo 3 de 15 casos tienen todos los controles (evaluaciones de impacto, seguridad, manual de uso).</a:t>
-            </a:r>
-          </a:p>
+              <a:t>El valor en juego ordena, no promete: es declarado, no validado.</a:t>
+            </a:r>
+          </a:p>
+        </p:txBody>
+      </p:sp>
+      <p:sp>
+        <p:nvSpPr>
+          <p:cNvPr id="126" name="Texto 126"/>
+          <p:cNvSpPr txBox="1"/>
+          <p:nvPr/>
+        </p:nvSpPr>
+        <p:spPr>
+          <a:xfrm>
+            <a:off x="609600" y="6260000"/>
+            <a:ext cx="10972800" cy="450000"/>
+          </a:xfrm>
+          <a:prstGeom prst="rect">
+            <a:avLst/>
+          </a:prstGeom>
+          <a:noFill/>
+        </p:spPr>
+        <p:txBody>
+          <a:bodyPr wrap="square" anchor="t" lIns="45720" rIns="45720">
+            <a:noAutofit/>
+          </a:bodyPr>
+          <a:lstStyle/>
+          <a:p>
+            <a:pPr algn="l"/>
+            <a:r>
+              <a:rPr lang="es-ES" sz="1300" b="1" dirty="0">
+                <a:solidFill>
+                  <a:srgbClr val="0F5499"/>
+                </a:solidFill>
+              </a:rPr>
+              <a:t>Si una cifra del panel no gusta, no se retoca el panel: se corrige la evidencia en el registro y se vuelve a generar.</a:t>
+            </a:r>
+          </a:p>
+        </p:txBody>
+      </p:sp>
+    </p:spTree>
+  </p:cSld>
+  <p:clrMapOvr>
+    <a:overrideClrMapping bg1="lt1" tx1="dk1" bg2="lt2" tx2="dk2" accent1="accent1" accent2="accent2" accent3="accent3" accent4="accent4" accent5="accent5" accent6="accent6" hlink="hlink" folHlink="folHlink"/>
+  </p:clrMapOvr>
+</p:sld>
+</file>
+
+<file path=ppt/slides/slide13.xml><?xml version="1.0" encoding="utf-8"?>
+<p:sld xmlns:a="http://schemas.openxmlformats.org/drawingml/2006/main" xmlns:r="http://schemas.openxmlformats.org/officeDocument/2006/relationships" xmlns:p="http://schemas.openxmlformats.org/presentationml/2006/main">
+  <p:cSld>
+    <p:bg>
+      <p:bgPr>
+        <a:solidFill>
+          <a:srgbClr val="FBE2CD"/>
+        </a:solidFill>
+        <a:effectLst/>
+      </p:bgPr>
+    </p:bg>
+    <p:spTree>
+      <p:nvGrpSpPr>
+        <p:cNvPr id="1" name=""/>
+        <p:cNvGrpSpPr/>
+        <p:nvPr/>
+      </p:nvGrpSpPr>
+      <p:grpSpPr>
+        <a:xfrm>
+          <a:off x="0" y="0"/>
+          <a:ext cx="0" cy="0"/>
+          <a:chOff x="0" y="0"/>
+          <a:chExt cx="0" cy="0"/>
+        </a:xfrm>
+      </p:grpSpPr>
+      <p:sp>
+        <p:nvSpPr>
+          <p:cNvPr id="134" name="Marca"/>
+          <p:cNvSpPr/>
+          <p:nvPr/>
+        </p:nvSpPr>
+        <p:spPr>
+          <a:xfrm>
+            <a:off x="609600" y="365760"/>
+            <a:ext cx="182880" cy="182880"/>
+          </a:xfrm>
+          <a:prstGeom prst="rect">
+            <a:avLst/>
+          </a:prstGeom>
+          <a:solidFill>
+            <a:srgbClr val="990F3D"/>
+          </a:solidFill>
+        </p:spPr>
+        <p:txBody>
+          <a:bodyPr/>
+          <a:lstStyle/>
+          <a:p/>
+        </p:txBody>
+      </p:sp>
+      <p:sp>
+        <p:nvSpPr>
+          <p:cNvPr id="135" name="Texto 135"/>
+          <p:cNvSpPr txBox="1"/>
+          <p:nvPr/>
+        </p:nvSpPr>
+        <p:spPr>
+          <a:xfrm>
+            <a:off x="838200" y="300000"/>
+            <a:ext cx="10500000" cy="320000"/>
+          </a:xfrm>
+          <a:prstGeom prst="rect">
+            <a:avLst/>
+          </a:prstGeom>
+          <a:noFill/>
+        </p:spPr>
+        <p:txBody>
+          <a:bodyPr wrap="square" anchor="ctr" lIns="45720" rIns="45720">
+            <a:noAutofit/>
+          </a:bodyPr>
+          <a:lstStyle/>
+          <a:p>
+            <a:pPr algn="l"/>
+            <a:r>
+              <a:rPr lang="es-ES" sz="1400" b="1" dirty="0">
+                <a:solidFill>
+                  <a:srgbClr val="1A1817"/>
+                </a:solidFill>
+              </a:rPr>
+              <a:t>SEVEN-G · CURSO · CONSULTOR · ACOMPAÑAR A CLIENTES</a:t>
+            </a:r>
+          </a:p>
+        </p:txBody>
+      </p:sp>
+      <p:sp>
+        <p:nvSpPr>
+          <p:cNvPr id="136" name="Texto 136"/>
+          <p:cNvSpPr txBox="1"/>
+          <p:nvPr/>
+        </p:nvSpPr>
+        <p:spPr>
+          <a:xfrm>
+            <a:off x="609600" y="700000"/>
+            <a:ext cx="10972800" cy="650000"/>
+          </a:xfrm>
+          <a:prstGeom prst="rect">
+            <a:avLst/>
+          </a:prstGeom>
+          <a:noFill/>
+        </p:spPr>
+        <p:txBody>
+          <a:bodyPr wrap="square" anchor="t" lIns="45720" rIns="45720">
+            <a:noAutofit/>
+          </a:bodyPr>
+          <a:lstStyle/>
+          <a:p>
+            <a:pPr algn="l"/>
+            <a:r>
+              <a:rPr lang="es-ES" sz="2700" b="1" dirty="0">
+                <a:solidFill>
+                  <a:srgbClr val="990F3D"/>
+                </a:solidFill>
+              </a:rPr>
+              <a:t>Dónde está el impacto: esferas × ambición</a:t>
+            </a:r>
+          </a:p>
+        </p:txBody>
+      </p:sp>
+      <p:sp>
+        <p:nvSpPr>
+          <p:cNvPr id="137" name="Texto 137"/>
+          <p:cNvSpPr txBox="1"/>
+          <p:nvPr/>
+        </p:nvSpPr>
+        <p:spPr>
+          <a:xfrm>
+            <a:off x="609600" y="1330000"/>
+            <a:ext cx="10972800" cy="450000"/>
+          </a:xfrm>
+          <a:prstGeom prst="rect">
+            <a:avLst/>
+          </a:prstGeom>
+          <a:noFill/>
+        </p:spPr>
+        <p:txBody>
+          <a:bodyPr wrap="square" anchor="t" lIns="45720" rIns="45720">
+            <a:noAutofit/>
+          </a:bodyPr>
+          <a:lstStyle/>
+          <a:p>
+            <a:pPr algn="l"/>
+            <a:r>
+              <a:rPr lang="es-ES" sz="1500" dirty="0">
+                <a:solidFill>
+                  <a:srgbClr val="564D47"/>
+                </a:solidFill>
+              </a:rPr>
+              <a:t>El mapa de calor de la cartera (T16) en el mismo panel. Datos ficticios</a:t>
+            </a:r>
+          </a:p>
+        </p:txBody>
+      </p:sp>
+      <p:pic>
+        <p:nvPicPr>
+          <p:cNvPr id="131" name="Imagen 131" descr="Mapa de calor de esferas por nivel de ambición con casos, inversión, neto y brechas"/>
+          <p:cNvPicPr>
+            <a:picLocks noChangeAspect="1"/>
+          </p:cNvPicPr>
+          <p:nvPr/>
+        </p:nvPicPr>
+        <p:blipFill>
+          <a:blip r:embed="rIdImg_impacto"/>
+          <a:stretch>
+            <a:fillRect/>
+          </a:stretch>
+        </p:blipFill>
+        <p:spPr>
+          <a:xfrm>
+            <a:off x="609600" y="1900000"/>
+            <a:ext cx="6700000" cy="4243333"/>
+          </a:xfrm>
+          <a:prstGeom prst="rect">
+            <a:avLst/>
+          </a:prstGeom>
+          <a:ln w="12700">
+            <a:solidFill>
+              <a:srgbClr val="C9A78D"/>
+            </a:solidFill>
+          </a:ln>
+        </p:spPr>
+      </p:pic>
+      <p:sp>
+        <p:nvSpPr>
+          <p:cNvPr id="132" name="Texto 132"/>
+          <p:cNvSpPr txBox="1"/>
+          <p:nvPr/>
+        </p:nvSpPr>
+        <p:spPr>
+          <a:xfrm>
+            <a:off x="7509600" y="1850000"/>
+            <a:ext cx="4072800" cy="4400000"/>
+          </a:xfrm>
+          <a:prstGeom prst="rect">
+            <a:avLst/>
+          </a:prstGeom>
+          <a:noFill/>
+        </p:spPr>
+        <p:txBody>
+          <a:bodyPr wrap="square" anchor="t" lIns="45720" rIns="45720">
+            <a:noAutofit/>
+          </a:bodyPr>
+          <a:lstStyle/>
           <a:p>
             <a:pPr marL="285750" indent="-285750">
               <a:spcAft>
@@ -1290,14 +1536,94 @@
                   <a:srgbClr val="2F2B28"/>
                 </a:solidFill>
               </a:rPr>
-              <a:t>Otras páginas: embudo y ciclo de vida, histórico y adopción, riesgo y cumplimiento, inventario.</a:t>
-            </a:r>
-          </a:p>
-        </p:txBody>
-      </p:sp>
-      <p:sp>
-        <p:nvSpPr>
-          <p:cNvPr id="126" name="Texto 126"/>
+              <a:t>Filas: las áreas donde la IA crea valor (cliente, producto, personas, operaciones, datos, conocimiento, decisión). Columnas: optimizar, aumentar, transformar.</a:t>
+            </a:r>
+          </a:p>
+          <a:p>
+            <a:pPr marL="285750" indent="-285750">
+              <a:spcAft>
+                <a:spcPts val="400"/>
+              </a:spcAft>
+              <a:buClr>
+                <a:srgbClr val="990F3D"/>
+              </a:buClr>
+              <a:buFont typeface="Arial"/>
+              <a:buChar char="•"/>
+            </a:pPr>
+            <a:r>
+              <a:rPr lang="es-ES" sz="1300" dirty="0">
+                <a:solidFill>
+                  <a:srgbClr val="2F2B28"/>
+                </a:solidFill>
+              </a:rPr>
+              <a:t>Cada celda: casos, inversión y coste, neto anual y valor validado; el color dice dónde se concentra el gasto.</a:t>
+            </a:r>
+          </a:p>
+          <a:p>
+            <a:pPr marL="285750" indent="-285750">
+              <a:spcAft>
+                <a:spcPts val="400"/>
+              </a:spcAft>
+              <a:buClr>
+                <a:srgbClr val="990F3D"/>
+              </a:buClr>
+              <a:buFont typeface="Arial"/>
+              <a:buChar char="•"/>
+            </a:pPr>
+            <a:r>
+              <a:rPr lang="es-ES" sz="1300" dirty="0">
+                <a:solidFill>
+                  <a:srgbClr val="2F2B28"/>
+                </a:solidFill>
+              </a:rPr>
+              <a:t>«Brecha»: la ambición que aprobó la dirección en C2 para esa esfera no tiene ningún caso que haya superado G2.</a:t>
+            </a:r>
+          </a:p>
+          <a:p>
+            <a:pPr marL="285750" indent="-285750">
+              <a:spcAft>
+                <a:spcPts val="400"/>
+              </a:spcAft>
+              <a:buClr>
+                <a:srgbClr val="990F3D"/>
+              </a:buClr>
+              <a:buFont typeface="Arial"/>
+              <a:buChar char="•"/>
+            </a:pPr>
+            <a:r>
+              <a:rPr lang="es-ES" sz="1300" dirty="0">
+                <a:solidFill>
+                  <a:srgbClr val="2F2B28"/>
+                </a:solidFill>
+              </a:rPr>
+              <a:t>En el ejemplo: el 40 % del gasto está en Cliente, Datos no tiene actividad y cinco esferas tienen brecha.</a:t>
+            </a:r>
+          </a:p>
+          <a:p>
+            <a:pPr marL="285750" indent="-285750">
+              <a:spcAft>
+                <a:spcPts val="400"/>
+              </a:spcAft>
+              <a:buClr>
+                <a:srgbClr val="990F3D"/>
+              </a:buClr>
+              <a:buFont typeface="Arial"/>
+              <a:buChar char="•"/>
+            </a:pPr>
+            <a:r>
+              <a:rPr lang="es-ES" sz="1300" dirty="0">
+                <a:solidFill>
+                  <a:srgbClr val="2F2B28"/>
+                </a:solidFill>
+              </a:rPr>
+              <a:t>La ambición objetivo sale de la tesis aprobada en el registro, no se escribe en el panel.</a:t>
+            </a:r>
+          </a:p>
+        </p:txBody>
+      </p:sp>
+      <p:sp>
+        <p:nvSpPr>
+          <p:cNvPr id="133" name="Texto 133"/>
           <p:cNvSpPr txBox="1"/>
           <p:nvPr/>
         </p:nvSpPr>
@@ -1324,7 +1650,7 @@
                   <a:srgbClr val="0F5499"/>
                 </a:solidFill>
               </a:rPr>
-              <a:t>Si una cifra del panel no gusta, no se retoca el panel: se corrige la evidencia en el registro y se vuelve a generar.</a:t>
+              <a:t>La pregunta que responde: ¿dónde tiene la IA más impacto en la compañía y dónde no estamos jugando? (documento 10 §8)</a:t>
             </a:r>
           </a:p>
         </p:txBody>
@@ -1337,7 +1663,7 @@
 </p:sld>
 </file>
 
-<file path=ppt/slides/slide13.xml><?xml version="1.0" encoding="utf-8"?>
+<file path=ppt/slides/slide14.xml><?xml version="1.0" encoding="utf-8"?>
 <p:sld xmlns:a="http://schemas.openxmlformats.org/drawingml/2006/main" xmlns:r="http://schemas.openxmlformats.org/officeDocument/2006/relationships" xmlns:p="http://schemas.openxmlformats.org/presentationml/2006/main">
   <p:cSld>
     <p:bg>
@@ -1364,7 +1690,7 @@
       </p:grpSpPr>
       <p:sp>
         <p:nvSpPr>
-          <p:cNvPr id="131" name="Marca"/>
+          <p:cNvPr id="138" name="Marca"/>
           <p:cNvSpPr/>
           <p:nvPr/>
         </p:nvSpPr>
@@ -1388,7 +1714,7 @@
       </p:sp>
       <p:sp>
         <p:nvSpPr>
-          <p:cNvPr id="132" name="Texto 132"/>
+          <p:cNvPr id="139" name="Texto 139"/>
           <p:cNvSpPr txBox="1"/>
           <p:nvPr/>
         </p:nvSpPr>
@@ -1422,7 +1748,7 @@
       </p:sp>
       <p:sp>
         <p:nvSpPr>
-          <p:cNvPr id="133" name="Texto 133"/>
+          <p:cNvPr id="140" name="Texto 140"/>
           <p:cNvSpPr txBox="1"/>
           <p:nvPr/>
         </p:nvSpPr>
@@ -1456,7 +1782,7 @@
       </p:sp>
       <p:sp>
         <p:nvSpPr>
-          <p:cNvPr id="134" name="Texto 134"/>
+          <p:cNvPr id="141" name="Texto 141"/>
           <p:cNvSpPr txBox="1"/>
           <p:nvPr/>
         </p:nvSpPr>
@@ -1484,349 +1810,6 @@
                 </a:solidFill>
               </a:rPr>
               <a:t>Datos ficticios, ilustrativos: no describen ninguna compañía real.</a:t>
-            </a:r>
-          </a:p>
-        </p:txBody>
-      </p:sp>
-    </p:spTree>
-  </p:cSld>
-  <p:clrMapOvr>
-    <a:overrideClrMapping bg1="lt1" tx1="dk1" bg2="lt2" tx2="dk2" accent1="accent1" accent2="accent2" accent3="accent3" accent4="accent4" accent5="accent5" accent6="accent6" hlink="hlink" folHlink="folHlink"/>
-  </p:clrMapOvr>
-</p:sld>
-</file>
-
-<file path=ppt/slides/slide14.xml><?xml version="1.0" encoding="utf-8"?>
-<p:sld xmlns:a="http://schemas.openxmlformats.org/drawingml/2006/main" xmlns:r="http://schemas.openxmlformats.org/officeDocument/2006/relationships" xmlns:p="http://schemas.openxmlformats.org/presentationml/2006/main">
-  <p:cSld>
-    <p:bg>
-      <p:bgPr>
-        <a:solidFill>
-          <a:srgbClr val="FBE2CD"/>
-        </a:solidFill>
-        <a:effectLst/>
-      </p:bgPr>
-    </p:bg>
-    <p:spTree>
-      <p:nvGrpSpPr>
-        <p:cNvPr id="1" name=""/>
-        <p:cNvGrpSpPr/>
-        <p:nvPr/>
-      </p:nvGrpSpPr>
-      <p:grpSpPr>
-        <a:xfrm>
-          <a:off x="0" y="0"/>
-          <a:ext cx="0" cy="0"/>
-          <a:chOff x="0" y="0"/>
-          <a:chExt cx="0" cy="0"/>
-        </a:xfrm>
-      </p:grpSpPr>
-      <p:sp>
-        <p:nvSpPr>
-          <p:cNvPr id="138" name="Marca"/>
-          <p:cNvSpPr/>
-          <p:nvPr/>
-        </p:nvSpPr>
-        <p:spPr>
-          <a:xfrm>
-            <a:off x="609600" y="365760"/>
-            <a:ext cx="182880" cy="182880"/>
-          </a:xfrm>
-          <a:prstGeom prst="rect">
-            <a:avLst/>
-          </a:prstGeom>
-          <a:solidFill>
-            <a:srgbClr val="990F3D"/>
-          </a:solidFill>
-        </p:spPr>
-        <p:txBody>
-          <a:bodyPr/>
-          <a:lstStyle/>
-          <a:p/>
-        </p:txBody>
-      </p:sp>
-      <p:sp>
-        <p:nvSpPr>
-          <p:cNvPr id="139" name="Texto 139"/>
-          <p:cNvSpPr txBox="1"/>
-          <p:nvPr/>
-        </p:nvSpPr>
-        <p:spPr>
-          <a:xfrm>
-            <a:off x="838200" y="300000"/>
-            <a:ext cx="10500000" cy="320000"/>
-          </a:xfrm>
-          <a:prstGeom prst="rect">
-            <a:avLst/>
-          </a:prstGeom>
-          <a:noFill/>
-        </p:spPr>
-        <p:txBody>
-          <a:bodyPr wrap="square" anchor="ctr" lIns="45720" rIns="45720">
-            <a:noAutofit/>
-          </a:bodyPr>
-          <a:lstStyle/>
-          <a:p>
-            <a:pPr algn="l"/>
-            <a:r>
-              <a:rPr lang="es-ES" sz="1400" b="1" dirty="0">
-                <a:solidFill>
-                  <a:srgbClr val="1A1817"/>
-                </a:solidFill>
-              </a:rPr>
-              <a:t>SEVEN-G · CURSO · CONSULTOR · ACOMPAÑAR A CLIENTES</a:t>
-            </a:r>
-          </a:p>
-        </p:txBody>
-      </p:sp>
-      <p:sp>
-        <p:nvSpPr>
-          <p:cNvPr id="140" name="Texto 140"/>
-          <p:cNvSpPr txBox="1"/>
-          <p:nvPr/>
-        </p:nvSpPr>
-        <p:spPr>
-          <a:xfrm>
-            <a:off x="609600" y="700000"/>
-            <a:ext cx="10972800" cy="650000"/>
-          </a:xfrm>
-          <a:prstGeom prst="rect">
-            <a:avLst/>
-          </a:prstGeom>
-          <a:noFill/>
-        </p:spPr>
-        <p:txBody>
-          <a:bodyPr wrap="square" anchor="t" lIns="45720" rIns="45720">
-            <a:noAutofit/>
-          </a:bodyPr>
-          <a:lstStyle/>
-          <a:p>
-            <a:pPr algn="l"/>
-            <a:r>
-              <a:rPr lang="es-ES" sz="2700" b="1" dirty="0">
-                <a:solidFill>
-                  <a:srgbClr val="990F3D"/>
-                </a:solidFill>
-              </a:rPr>
-              <a:t>Ejemplo 1 · Cuando una iniciativa se para</a:t>
-            </a:r>
-          </a:p>
-        </p:txBody>
-      </p:sp>
-      <p:sp>
-        <p:nvSpPr>
-          <p:cNvPr id="135" name="Texto 135"/>
-          <p:cNvSpPr txBox="1"/>
-          <p:nvPr/>
-        </p:nvSpPr>
-        <p:spPr>
-          <a:xfrm>
-            <a:off x="609600" y="1330000"/>
-            <a:ext cx="10972800" cy="500000"/>
-          </a:xfrm>
-          <a:prstGeom prst="rect">
-            <a:avLst/>
-          </a:prstGeom>
-          <a:noFill/>
-        </p:spPr>
-        <p:txBody>
-          <a:bodyPr wrap="square" anchor="t" lIns="45720" rIns="45720">
-            <a:noAutofit/>
-          </a:bodyPr>
-          <a:lstStyle/>
-          <a:p>
-            <a:pPr algn="l"/>
-            <a:r>
-              <a:rPr lang="es-ES" sz="1700" b="1" dirty="0">
-                <a:solidFill>
-                  <a:srgbClr val="2F2B28"/>
-                </a:solidFill>
-              </a:rPr>
-              <a:t>Cribado de candidaturas en procesos de selección (RR. HH.)</a:t>
-            </a:r>
-          </a:p>
-        </p:txBody>
-      </p:sp>
-      <p:sp>
-        <p:nvSpPr>
-          <p:cNvPr id="136" name="Texto 136"/>
-          <p:cNvSpPr txBox="1"/>
-          <p:nvPr/>
-        </p:nvSpPr>
-        <p:spPr>
-          <a:xfrm>
-            <a:off x="609600" y="1900000"/>
-            <a:ext cx="10972800" cy="3550000"/>
-          </a:xfrm>
-          <a:prstGeom prst="rect">
-            <a:avLst/>
-          </a:prstGeom>
-          <a:noFill/>
-        </p:spPr>
-        <p:txBody>
-          <a:bodyPr wrap="square" anchor="t" lIns="45720" rIns="45720">
-            <a:noAutofit/>
-          </a:bodyPr>
-          <a:lstStyle/>
-          <a:p>
-            <a:pPr marL="285750" indent="-285750">
-              <a:spcAft>
-                <a:spcPts val="400"/>
-              </a:spcAft>
-              <a:buClr>
-                <a:srgbClr val="990F3D"/>
-              </a:buClr>
-              <a:buFont typeface="Arial"/>
-              <a:buChar char="•"/>
-            </a:pPr>
-            <a:r>
-              <a:rPr lang="es-ES" sz="1500" dirty="0">
-                <a:solidFill>
-                  <a:srgbClr val="2F2B28"/>
-                </a:solidFill>
-              </a:rPr>
-              <a:t>Fases 0 y 1: RR. HH. la patrocina (P01–P05). Al decidir sobre personas, la intensidad es Enterprise (P04). Entra en «Propuesto».</a:t>
-            </a:r>
-          </a:p>
-          <a:p>
-            <a:pPr marL="285750" indent="-285750">
-              <a:spcAft>
-                <a:spcPts val="400"/>
-              </a:spcAft>
-              <a:buClr>
-                <a:srgbClr val="990F3D"/>
-              </a:buClr>
-              <a:buFont typeface="Arial"/>
-              <a:buChar char="•"/>
-            </a:pPr>
-            <a:r>
-              <a:rPr lang="es-ES" sz="1500" dirty="0">
-                <a:solidFill>
-                  <a:srgbClr val="2F2B28"/>
-                </a:solidFill>
-              </a:rPr>
-              <a:t>Fase 2: la hipótesis (P08) promete un 40 % menos de tiempo de cribado frente a la línea base (P09). El piloto lo confirma: G2, Continuar.</a:t>
-            </a:r>
-          </a:p>
-          <a:p>
-            <a:pPr marL="285750" indent="-285750">
-              <a:spcAft>
-                <a:spcPts val="400"/>
-              </a:spcAft>
-              <a:buClr>
-                <a:srgbClr val="990F3D"/>
-              </a:buClr>
-              <a:buFont typeface="Arial"/>
-              <a:buChar char="•"/>
-            </a:pPr>
-            <a:r>
-              <a:rPr lang="es-ES" sz="1500" dirty="0">
-                <a:solidFill>
-                  <a:srgbClr val="2F2B28"/>
-                </a:solidFill>
-              </a:rPr>
-              <a:t>Fase 3: la clasificación regulatoria (P11) lo sitúa como sistema de alto riesgo. La prueba de sesgo detecta que penaliza a candidatos de más edad.</a:t>
-            </a:r>
-          </a:p>
-          <a:p>
-            <a:pPr marL="285750" indent="-285750">
-              <a:spcAft>
-                <a:spcPts val="400"/>
-              </a:spcAft>
-              <a:buClr>
-                <a:srgbClr val="990F3D"/>
-              </a:buClr>
-              <a:buFont typeface="Arial"/>
-              <a:buChar char="•"/>
-            </a:pPr>
-            <a:r>
-              <a:rPr lang="es-ES" sz="1500" dirty="0">
-                <a:solidFill>
-                  <a:srgbClr val="2F2B28"/>
-                </a:solidFill>
-              </a:rPr>
-              <a:t>Se itera dos veces ajustando variables: corregir el sesgo destruye la capacidad predictiva que justificaba el proyecto.</a:t>
-            </a:r>
-          </a:p>
-          <a:p>
-            <a:pPr marL="285750" indent="-285750">
-              <a:spcAft>
-                <a:spcPts val="400"/>
-              </a:spcAft>
-              <a:buClr>
-                <a:srgbClr val="990F3D"/>
-              </a:buClr>
-              <a:buFont typeface="Arial"/>
-              <a:buChar char="•"/>
-            </a:pPr>
-            <a:r>
-              <a:rPr lang="es-ES" sz="1500" dirty="0">
-                <a:solidFill>
-                  <a:srgbClr val="2F2B28"/>
-                </a:solidFill>
-              </a:rPr>
-              <a:t>G3: riesgo residual alto sin mitigación viable (P12, P13). El comité de IA decide Parar; queda en P29 con su motivo.</a:t>
-            </a:r>
-          </a:p>
-          <a:p>
-            <a:pPr marL="285750" indent="-285750">
-              <a:spcAft>
-                <a:spcPts val="400"/>
-              </a:spcAft>
-              <a:buClr>
-                <a:srgbClr val="990F3D"/>
-              </a:buClr>
-              <a:buFont typeface="Arial"/>
-              <a:buChar char="•"/>
-            </a:pPr>
-            <a:r>
-              <a:rPr lang="es-ES" sz="1500" dirty="0">
-                <a:solidFill>
-                  <a:srgbClr val="2F2B28"/>
-                </a:solidFill>
-              </a:rPr>
-              <a:t>En el embudo aparece a la derecha de «Prueba de concepto»: Descartado · riesgo inaceptable. Lección: probar el sesgo antes, en la fase 2.</a:t>
-            </a:r>
-          </a:p>
-        </p:txBody>
-      </p:sp>
-      <p:sp>
-        <p:nvSpPr>
-          <p:cNvPr id="137" name="Caja 137"/>
-          <p:cNvSpPr/>
-          <p:nvPr/>
-        </p:nvSpPr>
-        <p:spPr>
-          <a:xfrm>
-            <a:off x="609600" y="5600000"/>
-            <a:ext cx="10972800" cy="900000"/>
-          </a:xfrm>
-          <a:prstGeom prst="roundRect">
-            <a:avLst>
-              <a:gd name="adj" fmla="val 6000"/>
-            </a:avLst>
-          </a:prstGeom>
-          <a:solidFill>
-            <a:srgbClr val="990F3D"/>
-          </a:solidFill>
-          <a:ln>
-            <a:noFill/>
-          </a:ln>
-        </p:spPr>
-        <p:txBody>
-          <a:bodyPr wrap="square" anchor="ctr" lIns="45720" rIns="45720">
-            <a:noAutofit/>
-          </a:bodyPr>
-          <a:lstStyle/>
-          <a:p>
-            <a:pPr algn="ctr"/>
-            <a:r>
-              <a:rPr lang="es-ES" sz="2100" b="1" dirty="0">
-                <a:solidFill>
-                  <a:srgbClr val="FFFFFF"/>
-                </a:solidFill>
-              </a:rPr>
-              <a:t>PARADA EN G3 · SE EVITÓ CONSTRUIR Y OPERAR UN SISTEMA INVIABLE</a:t>
             </a:r>
           </a:p>
         </p:txBody>
@@ -1866,7 +1849,7 @@
       </p:grpSpPr>
       <p:sp>
         <p:nvSpPr>
-          <p:cNvPr id="158" name="Marca"/>
+          <p:cNvPr id="145" name="Marca"/>
           <p:cNvSpPr/>
           <p:nvPr/>
         </p:nvSpPr>
@@ -1890,7 +1873,7 @@
       </p:sp>
       <p:sp>
         <p:nvSpPr>
-          <p:cNvPr id="159" name="Texto 159"/>
+          <p:cNvPr id="146" name="Texto 146"/>
           <p:cNvSpPr txBox="1"/>
           <p:nvPr/>
         </p:nvSpPr>
@@ -1924,7 +1907,7 @@
       </p:sp>
       <p:sp>
         <p:nvSpPr>
-          <p:cNvPr id="160" name="Texto 160"/>
+          <p:cNvPr id="147" name="Texto 147"/>
           <p:cNvSpPr txBox="1"/>
           <p:nvPr/>
         </p:nvSpPr>
@@ -1951,21 +1934,21 @@
                   <a:srgbClr val="990F3D"/>
                 </a:solidFill>
               </a:rPr>
-              <a:t>La iniciativa 1, sobre el ciclo de vida</a:t>
-            </a:r>
-          </a:p>
-        </p:txBody>
-      </p:sp>
-      <p:sp>
-        <p:nvSpPr>
-          <p:cNvPr id="161" name="Texto 161"/>
+              <a:t>Ejemplo 1 · Cuando una iniciativa se para</a:t>
+            </a:r>
+          </a:p>
+        </p:txBody>
+      </p:sp>
+      <p:sp>
+        <p:nvSpPr>
+          <p:cNvPr id="142" name="Texto 142"/>
           <p:cNvSpPr txBox="1"/>
           <p:nvPr/>
         </p:nvSpPr>
         <p:spPr>
           <a:xfrm>
             <a:off x="609600" y="1330000"/>
-            <a:ext cx="10972800" cy="450000"/>
+            <a:ext cx="10972800" cy="500000"/>
           </a:xfrm>
           <a:prstGeom prst="rect">
             <a:avLst/>
@@ -1980,26 +1963,169 @@
           <a:p>
             <a:pPr algn="l"/>
             <a:r>
+              <a:rPr lang="es-ES" sz="1700" b="1" dirty="0">
+                <a:solidFill>
+                  <a:srgbClr val="2F2B28"/>
+                </a:solidFill>
+              </a:rPr>
+              <a:t>Cribado de candidaturas en procesos de selección (RR. HH.)</a:t>
+            </a:r>
+          </a:p>
+        </p:txBody>
+      </p:sp>
+      <p:sp>
+        <p:nvSpPr>
+          <p:cNvPr id="143" name="Texto 143"/>
+          <p:cNvSpPr txBox="1"/>
+          <p:nvPr/>
+        </p:nvSpPr>
+        <p:spPr>
+          <a:xfrm>
+            <a:off x="609600" y="1900000"/>
+            <a:ext cx="10972800" cy="3550000"/>
+          </a:xfrm>
+          <a:prstGeom prst="rect">
+            <a:avLst/>
+          </a:prstGeom>
+          <a:noFill/>
+        </p:spPr>
+        <p:txBody>
+          <a:bodyPr wrap="square" anchor="t" lIns="45720" rIns="45720">
+            <a:noAutofit/>
+          </a:bodyPr>
+          <a:lstStyle/>
+          <a:p>
+            <a:pPr marL="285750" indent="-285750">
+              <a:spcAft>
+                <a:spcPts val="400"/>
+              </a:spcAft>
+              <a:buClr>
+                <a:srgbClr val="990F3D"/>
+              </a:buClr>
+              <a:buFont typeface="Arial"/>
+              <a:buChar char="•"/>
+            </a:pPr>
+            <a:r>
               <a:rPr lang="es-ES" sz="1500" dirty="0">
                 <a:solidFill>
-                  <a:srgbClr val="564D47"/>
-                </a:solidFill>
-              </a:rPr>
-              <a:t>Llegó a la fase 3 y no superó la puerta G3</a:t>
-            </a:r>
-          </a:p>
-        </p:txBody>
-      </p:sp>
-      <p:sp>
-        <p:nvSpPr>
-          <p:cNvPr id="141" name="Caja 141"/>
+                  <a:srgbClr val="2F2B28"/>
+                </a:solidFill>
+              </a:rPr>
+              <a:t>Fases 0 y 1: RR. HH. la patrocina (P01–P05). Al decidir sobre personas, la intensidad es Enterprise (P04). Entra en «Propuesto».</a:t>
+            </a:r>
+          </a:p>
+          <a:p>
+            <a:pPr marL="285750" indent="-285750">
+              <a:spcAft>
+                <a:spcPts val="400"/>
+              </a:spcAft>
+              <a:buClr>
+                <a:srgbClr val="990F3D"/>
+              </a:buClr>
+              <a:buFont typeface="Arial"/>
+              <a:buChar char="•"/>
+            </a:pPr>
+            <a:r>
+              <a:rPr lang="es-ES" sz="1500" dirty="0">
+                <a:solidFill>
+                  <a:srgbClr val="2F2B28"/>
+                </a:solidFill>
+              </a:rPr>
+              <a:t>Fase 2: la hipótesis (P08) promete un 40 % menos de tiempo de cribado frente a la línea base (P09). El piloto lo confirma: G2, Continuar.</a:t>
+            </a:r>
+          </a:p>
+          <a:p>
+            <a:pPr marL="285750" indent="-285750">
+              <a:spcAft>
+                <a:spcPts val="400"/>
+              </a:spcAft>
+              <a:buClr>
+                <a:srgbClr val="990F3D"/>
+              </a:buClr>
+              <a:buFont typeface="Arial"/>
+              <a:buChar char="•"/>
+            </a:pPr>
+            <a:r>
+              <a:rPr lang="es-ES" sz="1500" dirty="0">
+                <a:solidFill>
+                  <a:srgbClr val="2F2B28"/>
+                </a:solidFill>
+              </a:rPr>
+              <a:t>Fase 3: la clasificación regulatoria (P11) lo sitúa como sistema de alto riesgo. La prueba de sesgo detecta que penaliza a candidatos de más edad.</a:t>
+            </a:r>
+          </a:p>
+          <a:p>
+            <a:pPr marL="285750" indent="-285750">
+              <a:spcAft>
+                <a:spcPts val="400"/>
+              </a:spcAft>
+              <a:buClr>
+                <a:srgbClr val="990F3D"/>
+              </a:buClr>
+              <a:buFont typeface="Arial"/>
+              <a:buChar char="•"/>
+            </a:pPr>
+            <a:r>
+              <a:rPr lang="es-ES" sz="1500" dirty="0">
+                <a:solidFill>
+                  <a:srgbClr val="2F2B28"/>
+                </a:solidFill>
+              </a:rPr>
+              <a:t>Se itera dos veces ajustando variables: corregir el sesgo destruye la capacidad predictiva que justificaba el proyecto.</a:t>
+            </a:r>
+          </a:p>
+          <a:p>
+            <a:pPr marL="285750" indent="-285750">
+              <a:spcAft>
+                <a:spcPts val="400"/>
+              </a:spcAft>
+              <a:buClr>
+                <a:srgbClr val="990F3D"/>
+              </a:buClr>
+              <a:buFont typeface="Arial"/>
+              <a:buChar char="•"/>
+            </a:pPr>
+            <a:r>
+              <a:rPr lang="es-ES" sz="1500" dirty="0">
+                <a:solidFill>
+                  <a:srgbClr val="2F2B28"/>
+                </a:solidFill>
+              </a:rPr>
+              <a:t>G3: riesgo residual alto sin mitigación viable (P12, P13). El comité de IA decide Parar; queda en P29 con su motivo.</a:t>
+            </a:r>
+          </a:p>
+          <a:p>
+            <a:pPr marL="285750" indent="-285750">
+              <a:spcAft>
+                <a:spcPts val="400"/>
+              </a:spcAft>
+              <a:buClr>
+                <a:srgbClr val="990F3D"/>
+              </a:buClr>
+              <a:buFont typeface="Arial"/>
+              <a:buChar char="•"/>
+            </a:pPr>
+            <a:r>
+              <a:rPr lang="es-ES" sz="1500" dirty="0">
+                <a:solidFill>
+                  <a:srgbClr val="2F2B28"/>
+                </a:solidFill>
+              </a:rPr>
+              <a:t>En el embudo aparece a la derecha de «Prueba de concepto»: Descartado · riesgo inaceptable. Lección: probar el sesgo antes, en la fase 2.</a:t>
+            </a:r>
+          </a:p>
+        </p:txBody>
+      </p:sp>
+      <p:sp>
+        <p:nvSpPr>
+          <p:cNvPr id="144" name="Caja 144"/>
           <p:cNvSpPr/>
           <p:nvPr/>
         </p:nvSpPr>
         <p:spPr>
           <a:xfrm>
-            <a:off x="681000" y="2350000"/>
-            <a:ext cx="1240000" cy="1500000"/>
+            <a:off x="609600" y="5600000"/>
+            <a:ext cx="10972800" cy="900000"/>
           </a:xfrm>
           <a:prstGeom prst="roundRect">
             <a:avLst>
@@ -2021,693 +2147,12 @@
           <a:p>
             <a:pPr algn="ctr"/>
             <a:r>
-              <a:rPr lang="es-ES" sz="2400" b="1" dirty="0">
+              <a:rPr lang="es-ES" sz="2100" b="1" dirty="0">
                 <a:solidFill>
                   <a:srgbClr val="FFFFFF"/>
                 </a:solidFill>
               </a:rPr>
-              <a:t>F0</a:t>
-            </a:r>
-          </a:p>
-          <a:p>
-            <a:pPr algn="ctr"/>
-            <a:r>
-              <a:rPr lang="es-ES" sz="1050" dirty="0">
-                <a:solidFill>
-                  <a:srgbClr val="FFFFFF"/>
-                </a:solidFill>
-              </a:rPr>
-              <a:t>Contexto y restricciones</a:t>
-            </a:r>
-          </a:p>
-        </p:txBody>
-      </p:sp>
-      <p:sp>
-        <p:nvSpPr>
-          <p:cNvPr id="142" name="Texto 142"/>
-          <p:cNvSpPr txBox="1"/>
-          <p:nvPr/>
-        </p:nvSpPr>
-        <p:spPr>
-          <a:xfrm>
-            <a:off x="1591000" y="3900000"/>
-            <a:ext cx="800000" cy="300000"/>
-          </a:xfrm>
-          <a:prstGeom prst="rect">
-            <a:avLst/>
-          </a:prstGeom>
-          <a:noFill/>
-        </p:spPr>
-        <p:txBody>
-          <a:bodyPr wrap="square" anchor="t" lIns="45720" rIns="45720">
-            <a:noAutofit/>
-          </a:bodyPr>
-          <a:lstStyle/>
-          <a:p>
-            <a:pPr algn="ctr"/>
-            <a:r>
-              <a:rPr lang="es-ES" sz="1200" b="1" dirty="0">
-                <a:solidFill>
-                  <a:srgbClr val="990F3D"/>
-                </a:solidFill>
-              </a:rPr>
-              <a:t>G0</a:t>
-            </a:r>
-          </a:p>
-        </p:txBody>
-      </p:sp>
-      <p:sp>
-        <p:nvSpPr>
-          <p:cNvPr id="143" name="Caja 143"/>
-          <p:cNvSpPr/>
-          <p:nvPr/>
-        </p:nvSpPr>
-        <p:spPr>
-          <a:xfrm>
-            <a:off x="2051000" y="2350000"/>
-            <a:ext cx="1240000" cy="1500000"/>
-          </a:xfrm>
-          <a:prstGeom prst="roundRect">
-            <a:avLst>
-              <a:gd name="adj" fmla="val 6000"/>
-            </a:avLst>
-          </a:prstGeom>
-          <a:solidFill>
-            <a:srgbClr val="990F3D"/>
-          </a:solidFill>
-          <a:ln>
-            <a:noFill/>
-          </a:ln>
-        </p:spPr>
-        <p:txBody>
-          <a:bodyPr wrap="square" anchor="ctr" lIns="45720" rIns="45720">
-            <a:noAutofit/>
-          </a:bodyPr>
-          <a:lstStyle/>
-          <a:p>
-            <a:pPr algn="ctr"/>
-            <a:r>
-              <a:rPr lang="es-ES" sz="2400" b="1" dirty="0">
-                <a:solidFill>
-                  <a:srgbClr val="FFFFFF"/>
-                </a:solidFill>
-              </a:rPr>
-              <a:t>F1</a:t>
-            </a:r>
-          </a:p>
-          <a:p>
-            <a:pPr algn="ctr"/>
-            <a:r>
-              <a:rPr lang="es-ES" sz="1050" dirty="0">
-                <a:solidFill>
-                  <a:srgbClr val="FFFFFF"/>
-                </a:solidFill>
-              </a:rPr>
-              <a:t>Descubrimiento de oportunidades</a:t>
-            </a:r>
-          </a:p>
-        </p:txBody>
-      </p:sp>
-      <p:sp>
-        <p:nvSpPr>
-          <p:cNvPr id="144" name="Texto 144"/>
-          <p:cNvSpPr txBox="1"/>
-          <p:nvPr/>
-        </p:nvSpPr>
-        <p:spPr>
-          <a:xfrm>
-            <a:off x="2961000" y="3900000"/>
-            <a:ext cx="800000" cy="300000"/>
-          </a:xfrm>
-          <a:prstGeom prst="rect">
-            <a:avLst/>
-          </a:prstGeom>
-          <a:noFill/>
-        </p:spPr>
-        <p:txBody>
-          <a:bodyPr wrap="square" anchor="t" lIns="45720" rIns="45720">
-            <a:noAutofit/>
-          </a:bodyPr>
-          <a:lstStyle/>
-          <a:p>
-            <a:pPr algn="ctr"/>
-            <a:r>
-              <a:rPr lang="es-ES" sz="1200" b="1" dirty="0">
-                <a:solidFill>
-                  <a:srgbClr val="990F3D"/>
-                </a:solidFill>
-              </a:rPr>
-              <a:t>G1</a:t>
-            </a:r>
-          </a:p>
-        </p:txBody>
-      </p:sp>
-      <p:sp>
-        <p:nvSpPr>
-          <p:cNvPr id="145" name="Caja 145"/>
-          <p:cNvSpPr/>
-          <p:nvPr/>
-        </p:nvSpPr>
-        <p:spPr>
-          <a:xfrm>
-            <a:off x="3421000" y="2350000"/>
-            <a:ext cx="1240000" cy="1500000"/>
-          </a:xfrm>
-          <a:prstGeom prst="roundRect">
-            <a:avLst>
-              <a:gd name="adj" fmla="val 6000"/>
-            </a:avLst>
-          </a:prstGeom>
-          <a:solidFill>
-            <a:srgbClr val="990F3D"/>
-          </a:solidFill>
-          <a:ln>
-            <a:noFill/>
-          </a:ln>
-        </p:spPr>
-        <p:txBody>
-          <a:bodyPr wrap="square" anchor="ctr" lIns="45720" rIns="45720">
-            <a:noAutofit/>
-          </a:bodyPr>
-          <a:lstStyle/>
-          <a:p>
-            <a:pPr algn="ctr"/>
-            <a:r>
-              <a:rPr lang="es-ES" sz="2400" b="1" dirty="0">
-                <a:solidFill>
-                  <a:srgbClr val="FFFFFF"/>
-                </a:solidFill>
-              </a:rPr>
-              <a:t>F2</a:t>
-            </a:r>
-          </a:p>
-          <a:p>
-            <a:pPr algn="ctr"/>
-            <a:r>
-              <a:rPr lang="es-ES" sz="1050" dirty="0">
-                <a:solidFill>
-                  <a:srgbClr val="FFFFFF"/>
-                </a:solidFill>
-              </a:rPr>
-              <a:t>Hipótesis de valor</a:t>
-            </a:r>
-          </a:p>
-        </p:txBody>
-      </p:sp>
-      <p:sp>
-        <p:nvSpPr>
-          <p:cNvPr id="146" name="Texto 146"/>
-          <p:cNvSpPr txBox="1"/>
-          <p:nvPr/>
-        </p:nvSpPr>
-        <p:spPr>
-          <a:xfrm>
-            <a:off x="4331000" y="3900000"/>
-            <a:ext cx="800000" cy="300000"/>
-          </a:xfrm>
-          <a:prstGeom prst="rect">
-            <a:avLst/>
-          </a:prstGeom>
-          <a:noFill/>
-        </p:spPr>
-        <p:txBody>
-          <a:bodyPr wrap="square" anchor="t" lIns="45720" rIns="45720">
-            <a:noAutofit/>
-          </a:bodyPr>
-          <a:lstStyle/>
-          <a:p>
-            <a:pPr algn="ctr"/>
-            <a:r>
-              <a:rPr lang="es-ES" sz="1200" b="1" dirty="0">
-                <a:solidFill>
-                  <a:srgbClr val="990F3D"/>
-                </a:solidFill>
-              </a:rPr>
-              <a:t>G2</a:t>
-            </a:r>
-          </a:p>
-        </p:txBody>
-      </p:sp>
-      <p:sp>
-        <p:nvSpPr>
-          <p:cNvPr id="147" name="Caja 147"/>
-          <p:cNvSpPr/>
-          <p:nvPr/>
-        </p:nvSpPr>
-        <p:spPr>
-          <a:xfrm>
-            <a:off x="4791000" y="2350000"/>
-            <a:ext cx="1240000" cy="1500000"/>
-          </a:xfrm>
-          <a:prstGeom prst="roundRect">
-            <a:avLst>
-              <a:gd name="adj" fmla="val 6000"/>
-            </a:avLst>
-          </a:prstGeom>
-          <a:solidFill>
-            <a:srgbClr val="990F3D"/>
-          </a:solidFill>
-          <a:ln>
-            <a:noFill/>
-          </a:ln>
-        </p:spPr>
-        <p:txBody>
-          <a:bodyPr wrap="square" anchor="ctr" lIns="45720" rIns="45720">
-            <a:noAutofit/>
-          </a:bodyPr>
-          <a:lstStyle/>
-          <a:p>
-            <a:pPr algn="ctr"/>
-            <a:r>
-              <a:rPr lang="es-ES" sz="2400" b="1" dirty="0">
-                <a:solidFill>
-                  <a:srgbClr val="FFFFFF"/>
-                </a:solidFill>
-              </a:rPr>
-              <a:t>F3</a:t>
-            </a:r>
-          </a:p>
-          <a:p>
-            <a:pPr algn="ctr"/>
-            <a:r>
-              <a:rPr lang="es-ES" sz="1050" dirty="0">
-                <a:solidFill>
-                  <a:srgbClr val="FFFFFF"/>
-                </a:solidFill>
-              </a:rPr>
-              <a:t>Viabilidad y riesgo</a:t>
-            </a:r>
-          </a:p>
-        </p:txBody>
-      </p:sp>
-      <p:sp>
-        <p:nvSpPr>
-          <p:cNvPr id="148" name="Texto 148"/>
-          <p:cNvSpPr txBox="1"/>
-          <p:nvPr/>
-        </p:nvSpPr>
-        <p:spPr>
-          <a:xfrm>
-            <a:off x="5701000" y="3900000"/>
-            <a:ext cx="800000" cy="300000"/>
-          </a:xfrm>
-          <a:prstGeom prst="rect">
-            <a:avLst/>
-          </a:prstGeom>
-          <a:noFill/>
-        </p:spPr>
-        <p:txBody>
-          <a:bodyPr wrap="square" anchor="t" lIns="45720" rIns="45720">
-            <a:noAutofit/>
-          </a:bodyPr>
-          <a:lstStyle/>
-          <a:p>
-            <a:pPr algn="ctr"/>
-            <a:r>
-              <a:rPr lang="es-ES" sz="1200" b="1" dirty="0">
-                <a:solidFill>
-                  <a:srgbClr val="990F3D"/>
-                </a:solidFill>
-              </a:rPr>
-              <a:t>G3</a:t>
-            </a:r>
-          </a:p>
-        </p:txBody>
-      </p:sp>
-      <p:sp>
-        <p:nvSpPr>
-          <p:cNvPr id="149" name="Caja 149"/>
-          <p:cNvSpPr/>
-          <p:nvPr/>
-        </p:nvSpPr>
-        <p:spPr>
-          <a:xfrm>
-            <a:off x="6161000" y="2350000"/>
-            <a:ext cx="1240000" cy="1500000"/>
-          </a:xfrm>
-          <a:prstGeom prst="roundRect">
-            <a:avLst>
-              <a:gd name="adj" fmla="val 6000"/>
-            </a:avLst>
-          </a:prstGeom>
-          <a:solidFill>
-            <a:srgbClr val="C9A78D"/>
-          </a:solidFill>
-          <a:ln>
-            <a:noFill/>
-          </a:ln>
-        </p:spPr>
-        <p:txBody>
-          <a:bodyPr wrap="square" anchor="ctr" lIns="45720" rIns="45720">
-            <a:noAutofit/>
-          </a:bodyPr>
-          <a:lstStyle/>
-          <a:p>
-            <a:pPr algn="ctr"/>
-            <a:r>
-              <a:rPr lang="es-ES" sz="2400" b="1" dirty="0">
-                <a:solidFill>
-                  <a:srgbClr val="564D47"/>
-                </a:solidFill>
-              </a:rPr>
-              <a:t>F4</a:t>
-            </a:r>
-          </a:p>
-          <a:p>
-            <a:pPr algn="ctr"/>
-            <a:r>
-              <a:rPr lang="es-ES" sz="1050" dirty="0">
-                <a:solidFill>
-                  <a:srgbClr val="564D47"/>
-                </a:solidFill>
-              </a:rPr>
-              <a:t>Diseño de la solución</a:t>
-            </a:r>
-          </a:p>
-        </p:txBody>
-      </p:sp>
-      <p:sp>
-        <p:nvSpPr>
-          <p:cNvPr id="150" name="Texto 150"/>
-          <p:cNvSpPr txBox="1"/>
-          <p:nvPr/>
-        </p:nvSpPr>
-        <p:spPr>
-          <a:xfrm>
-            <a:off x="7071000" y="3900000"/>
-            <a:ext cx="800000" cy="300000"/>
-          </a:xfrm>
-          <a:prstGeom prst="rect">
-            <a:avLst/>
-          </a:prstGeom>
-          <a:noFill/>
-        </p:spPr>
-        <p:txBody>
-          <a:bodyPr wrap="square" anchor="t" lIns="45720" rIns="45720">
-            <a:noAutofit/>
-          </a:bodyPr>
-          <a:lstStyle/>
-          <a:p>
-            <a:pPr algn="ctr"/>
-            <a:r>
-              <a:rPr lang="es-ES" sz="1200" b="1" dirty="0">
-                <a:solidFill>
-                  <a:srgbClr val="990F3D"/>
-                </a:solidFill>
-              </a:rPr>
-              <a:t>G4</a:t>
-            </a:r>
-          </a:p>
-        </p:txBody>
-      </p:sp>
-      <p:sp>
-        <p:nvSpPr>
-          <p:cNvPr id="151" name="Caja 151"/>
-          <p:cNvSpPr/>
-          <p:nvPr/>
-        </p:nvSpPr>
-        <p:spPr>
-          <a:xfrm>
-            <a:off x="7531000" y="2350000"/>
-            <a:ext cx="1240000" cy="1500000"/>
-          </a:xfrm>
-          <a:prstGeom prst="roundRect">
-            <a:avLst>
-              <a:gd name="adj" fmla="val 6000"/>
-            </a:avLst>
-          </a:prstGeom>
-          <a:solidFill>
-            <a:srgbClr val="C9A78D"/>
-          </a:solidFill>
-          <a:ln>
-            <a:noFill/>
-          </a:ln>
-        </p:spPr>
-        <p:txBody>
-          <a:bodyPr wrap="square" anchor="ctr" lIns="45720" rIns="45720">
-            <a:noAutofit/>
-          </a:bodyPr>
-          <a:lstStyle/>
-          <a:p>
-            <a:pPr algn="ctr"/>
-            <a:r>
-              <a:rPr lang="es-ES" sz="2400" b="1" dirty="0">
-                <a:solidFill>
-                  <a:srgbClr val="564D47"/>
-                </a:solidFill>
-              </a:rPr>
-              <a:t>F5</a:t>
-            </a:r>
-          </a:p>
-          <a:p>
-            <a:pPr algn="ctr"/>
-            <a:r>
-              <a:rPr lang="es-ES" sz="1050" dirty="0">
-                <a:solidFill>
-                  <a:srgbClr val="564D47"/>
-                </a:solidFill>
-              </a:rPr>
-              <a:t>Entrega y validación</a:t>
-            </a:r>
-          </a:p>
-        </p:txBody>
-      </p:sp>
-      <p:sp>
-        <p:nvSpPr>
-          <p:cNvPr id="152" name="Texto 152"/>
-          <p:cNvSpPr txBox="1"/>
-          <p:nvPr/>
-        </p:nvSpPr>
-        <p:spPr>
-          <a:xfrm>
-            <a:off x="8441000" y="3900000"/>
-            <a:ext cx="800000" cy="300000"/>
-          </a:xfrm>
-          <a:prstGeom prst="rect">
-            <a:avLst/>
-          </a:prstGeom>
-          <a:noFill/>
-        </p:spPr>
-        <p:txBody>
-          <a:bodyPr wrap="square" anchor="t" lIns="45720" rIns="45720">
-            <a:noAutofit/>
-          </a:bodyPr>
-          <a:lstStyle/>
-          <a:p>
-            <a:pPr algn="ctr"/>
-            <a:r>
-              <a:rPr lang="es-ES" sz="1200" b="1" dirty="0">
-                <a:solidFill>
-                  <a:srgbClr val="990F3D"/>
-                </a:solidFill>
-              </a:rPr>
-              <a:t>G5</a:t>
-            </a:r>
-          </a:p>
-        </p:txBody>
-      </p:sp>
-      <p:sp>
-        <p:nvSpPr>
-          <p:cNvPr id="153" name="Caja 153"/>
-          <p:cNvSpPr/>
-          <p:nvPr/>
-        </p:nvSpPr>
-        <p:spPr>
-          <a:xfrm>
-            <a:off x="8901000" y="2350000"/>
-            <a:ext cx="1240000" cy="1500000"/>
-          </a:xfrm>
-          <a:prstGeom prst="roundRect">
-            <a:avLst>
-              <a:gd name="adj" fmla="val 6000"/>
-            </a:avLst>
-          </a:prstGeom>
-          <a:solidFill>
-            <a:srgbClr val="C9A78D"/>
-          </a:solidFill>
-          <a:ln>
-            <a:noFill/>
-          </a:ln>
-        </p:spPr>
-        <p:txBody>
-          <a:bodyPr wrap="square" anchor="ctr" lIns="45720" rIns="45720">
-            <a:noAutofit/>
-          </a:bodyPr>
-          <a:lstStyle/>
-          <a:p>
-            <a:pPr algn="ctr"/>
-            <a:r>
-              <a:rPr lang="es-ES" sz="2400" b="1" dirty="0">
-                <a:solidFill>
-                  <a:srgbClr val="564D47"/>
-                </a:solidFill>
-              </a:rPr>
-              <a:t>F6</a:t>
-            </a:r>
-          </a:p>
-          <a:p>
-            <a:pPr algn="ctr"/>
-            <a:r>
-              <a:rPr lang="es-ES" sz="1050" dirty="0">
-                <a:solidFill>
-                  <a:srgbClr val="564D47"/>
-                </a:solidFill>
-              </a:rPr>
-              <a:t>Operación y gobierno</a:t>
-            </a:r>
-          </a:p>
-        </p:txBody>
-      </p:sp>
-      <p:sp>
-        <p:nvSpPr>
-          <p:cNvPr id="154" name="Texto 154"/>
-          <p:cNvSpPr txBox="1"/>
-          <p:nvPr/>
-        </p:nvSpPr>
-        <p:spPr>
-          <a:xfrm>
-            <a:off x="9811000" y="3900000"/>
-            <a:ext cx="800000" cy="300000"/>
-          </a:xfrm>
-          <a:prstGeom prst="rect">
-            <a:avLst/>
-          </a:prstGeom>
-          <a:noFill/>
-        </p:spPr>
-        <p:txBody>
-          <a:bodyPr wrap="square" anchor="t" lIns="45720" rIns="45720">
-            <a:noAutofit/>
-          </a:bodyPr>
-          <a:lstStyle/>
-          <a:p>
-            <a:pPr algn="ctr"/>
-            <a:r>
-              <a:rPr lang="es-ES" sz="1200" b="1" dirty="0">
-                <a:solidFill>
-                  <a:srgbClr val="990F3D"/>
-                </a:solidFill>
-              </a:rPr>
-              <a:t>R6</a:t>
-            </a:r>
-          </a:p>
-        </p:txBody>
-      </p:sp>
-      <p:sp>
-        <p:nvSpPr>
-          <p:cNvPr id="155" name="Caja 155"/>
-          <p:cNvSpPr/>
-          <p:nvPr/>
-        </p:nvSpPr>
-        <p:spPr>
-          <a:xfrm>
-            <a:off x="10271000" y="2350000"/>
-            <a:ext cx="1240000" cy="1500000"/>
-          </a:xfrm>
-          <a:prstGeom prst="roundRect">
-            <a:avLst>
-              <a:gd name="adj" fmla="val 6000"/>
-            </a:avLst>
-          </a:prstGeom>
-          <a:solidFill>
-            <a:srgbClr val="C9A78D"/>
-          </a:solidFill>
-          <a:ln>
-            <a:noFill/>
-          </a:ln>
-        </p:spPr>
-        <p:txBody>
-          <a:bodyPr wrap="square" anchor="ctr" lIns="45720" rIns="45720">
-            <a:noAutofit/>
-          </a:bodyPr>
-          <a:lstStyle/>
-          <a:p>
-            <a:pPr algn="ctr"/>
-            <a:r>
-              <a:rPr lang="es-ES" sz="2400" b="1" dirty="0">
-                <a:solidFill>
-                  <a:srgbClr val="564D47"/>
-                </a:solidFill>
-              </a:rPr>
-              <a:t>F7</a:t>
-            </a:r>
-          </a:p>
-          <a:p>
-            <a:pPr algn="ctr"/>
-            <a:r>
-              <a:rPr lang="es-ES" sz="1050" dirty="0">
-                <a:solidFill>
-                  <a:srgbClr val="564D47"/>
-                </a:solidFill>
-              </a:rPr>
-              <a:t>Evolución o retirada</a:t>
-            </a:r>
-          </a:p>
-        </p:txBody>
-      </p:sp>
-      <p:sp>
-        <p:nvSpPr>
-          <p:cNvPr id="156" name="Texto 156"/>
-          <p:cNvSpPr txBox="1"/>
-          <p:nvPr/>
-        </p:nvSpPr>
-        <p:spPr>
-          <a:xfrm>
-            <a:off x="11181000" y="3900000"/>
-            <a:ext cx="800000" cy="300000"/>
-          </a:xfrm>
-          <a:prstGeom prst="rect">
-            <a:avLst/>
-          </a:prstGeom>
-          <a:noFill/>
-        </p:spPr>
-        <p:txBody>
-          <a:bodyPr wrap="square" anchor="t" lIns="45720" rIns="45720">
-            <a:noAutofit/>
-          </a:bodyPr>
-          <a:lstStyle/>
-          <a:p>
-            <a:pPr algn="ctr"/>
-            <a:r>
-              <a:rPr lang="es-ES" sz="1200" b="1" dirty="0">
-                <a:solidFill>
-                  <a:srgbClr val="990F3D"/>
-                </a:solidFill>
-              </a:rPr>
-              <a:t>G7</a:t>
-            </a:r>
-          </a:p>
-        </p:txBody>
-      </p:sp>
-      <p:sp>
-        <p:nvSpPr>
-          <p:cNvPr id="157" name="Texto 157"/>
-          <p:cNvSpPr txBox="1"/>
-          <p:nvPr/>
-        </p:nvSpPr>
-        <p:spPr>
-          <a:xfrm>
-            <a:off x="609600" y="4430000"/>
-            <a:ext cx="10972800" cy="600000"/>
-          </a:xfrm>
-          <a:prstGeom prst="rect">
-            <a:avLst/>
-          </a:prstGeom>
-          <a:noFill/>
-        </p:spPr>
-        <p:txBody>
-          <a:bodyPr wrap="square" anchor="t" lIns="45720" rIns="45720">
-            <a:noAutofit/>
-          </a:bodyPr>
-          <a:lstStyle/>
-          <a:p>
-            <a:pPr algn="ctr"/>
-            <a:r>
-              <a:rPr lang="es-ES" sz="2200" b="1" dirty="0">
-                <a:solidFill>
-                  <a:srgbClr val="990F3D"/>
-                </a:solidFill>
-              </a:rPr>
-              <a:t>PARADA EN G3 · sale del embudo como «Descartado», con su motivo</a:t>
+              <a:t>PARADA EN G3 · SE EVITÓ CONSTRUIR Y OPERAR UN SISTEMA INVIABLE</a:t>
             </a:r>
           </a:p>
         </p:txBody>
@@ -2832,21 +2277,21 @@
                   <a:srgbClr val="990F3D"/>
                 </a:solidFill>
               </a:rPr>
-              <a:t>Ejemplo 2 · Cuando una iniciativa llega a producción</a:t>
-            </a:r>
-          </a:p>
-        </p:txBody>
-      </p:sp>
-      <p:sp>
-        <p:nvSpPr>
-          <p:cNvPr id="162" name="Texto 162"/>
+              <a:t>La iniciativa 1, sobre el ciclo de vida</a:t>
+            </a:r>
+          </a:p>
+        </p:txBody>
+      </p:sp>
+      <p:sp>
+        <p:nvSpPr>
+          <p:cNvPr id="168" name="Texto 168"/>
           <p:cNvSpPr txBox="1"/>
           <p:nvPr/>
         </p:nvSpPr>
         <p:spPr>
           <a:xfrm>
             <a:off x="609600" y="1330000"/>
-            <a:ext cx="10972800" cy="500000"/>
+            <a:ext cx="10972800" cy="450000"/>
           </a:xfrm>
           <a:prstGeom prst="rect">
             <a:avLst/>
@@ -2861,169 +2306,26 @@
           <a:p>
             <a:pPr algn="l"/>
             <a:r>
-              <a:rPr lang="es-ES" sz="1700" b="1" dirty="0">
-                <a:solidFill>
-                  <a:srgbClr val="2F2B28"/>
-                </a:solidFill>
-              </a:rPr>
-              <a:t>Asistente de respuesta a incidencias de TI de primer nivel</a:t>
-            </a:r>
-          </a:p>
-        </p:txBody>
-      </p:sp>
-      <p:sp>
-        <p:nvSpPr>
-          <p:cNvPr id="163" name="Texto 163"/>
-          <p:cNvSpPr txBox="1"/>
-          <p:nvPr/>
-        </p:nvSpPr>
-        <p:spPr>
-          <a:xfrm>
-            <a:off x="609600" y="1900000"/>
-            <a:ext cx="10972800" cy="3550000"/>
-          </a:xfrm>
-          <a:prstGeom prst="rect">
-            <a:avLst/>
-          </a:prstGeom>
-          <a:noFill/>
-        </p:spPr>
-        <p:txBody>
-          <a:bodyPr wrap="square" anchor="t" lIns="45720" rIns="45720">
-            <a:noAutofit/>
-          </a:bodyPr>
-          <a:lstStyle/>
-          <a:p>
-            <a:pPr marL="285750" indent="-285750">
-              <a:spcAft>
-                <a:spcPts val="400"/>
-              </a:spcAft>
-              <a:buClr>
-                <a:srgbClr val="990F3D"/>
-              </a:buClr>
-              <a:buFont typeface="Arial"/>
-              <a:buChar char="•"/>
-            </a:pPr>
-            <a:r>
               <a:rPr lang="es-ES" sz="1500" dirty="0">
                 <a:solidFill>
-                  <a:srgbClr val="2F2B28"/>
-                </a:solidFill>
-              </a:rPr>
-              <a:t>Fases 0 y 1: TI la patrocina; frente a la alternativa sin IA (más plantilla), se propone la esfera de operaciones con ambición Optimizar (P07).</a:t>
-            </a:r>
-          </a:p>
-          <a:p>
-            <a:pPr marL="285750" indent="-285750">
-              <a:spcAft>
-                <a:spcPts val="400"/>
-              </a:spcAft>
-              <a:buClr>
-                <a:srgbClr val="990F3D"/>
-              </a:buClr>
-              <a:buFont typeface="Arial"/>
-              <a:buChar char="•"/>
-            </a:pPr>
-            <a:r>
-              <a:rPr lang="es-ES" sz="1500" dirty="0">
-                <a:solidFill>
-                  <a:srgbClr val="2F2B28"/>
-                </a:solidFill>
-              </a:rPr>
-              <a:t>Fase 2: hipótesis de un 30 % menos de tiempo de resolución en incidencias sencillas; el piloto controlado da un 32 %.</a:t>
-            </a:r>
-          </a:p>
-          <a:p>
-            <a:pPr marL="285750" indent="-285750">
-              <a:spcAft>
-                <a:spcPts val="400"/>
-              </a:spcAft>
-              <a:buClr>
-                <a:srgbClr val="990F3D"/>
-              </a:buClr>
-              <a:buFont typeface="Arial"/>
-              <a:buChar char="•"/>
-            </a:pPr>
-            <a:r>
-              <a:rPr lang="es-ES" sz="1500" dirty="0">
-                <a:solidFill>
-                  <a:srgbClr val="2F2B28"/>
-                </a:solidFill>
-              </a:rPr>
-              <a:t>Fase 3: sin sesgo relevante, riesgo residual medio aceptado por su órgano (P12), proveedor evaluado (P14). G3, Continuar.</a:t>
-            </a:r>
-          </a:p>
-          <a:p>
-            <a:pPr marL="285750" indent="-285750">
-              <a:spcAft>
-                <a:spcPts val="400"/>
-              </a:spcAft>
-              <a:buClr>
-                <a:srgbClr val="990F3D"/>
-              </a:buClr>
-              <a:buFont typeface="Arial"/>
-              <a:buChar char="•"/>
-            </a:pPr>
-            <a:r>
-              <a:rPr lang="es-ES" sz="1500" dirty="0">
-                <a:solidFill>
-                  <a:srgbClr val="2F2B28"/>
-                </a:solidFill>
-              </a:rPr>
-              <a:t>Fases 4 y 5: supervisión humana obligatoria por encima de cierta gravedad (P17), reversión probada (P19) y firma de puesta en producción (P23).</a:t>
-            </a:r>
-          </a:p>
-          <a:p>
-            <a:pPr marL="285750" indent="-285750">
-              <a:spcAft>
-                <a:spcPts val="400"/>
-              </a:spcAft>
-              <a:buClr>
-                <a:srgbClr val="990F3D"/>
-              </a:buClr>
-              <a:buFont typeface="Arial"/>
-              <a:buChar char="•"/>
-            </a:pPr>
-            <a:r>
-              <a:rPr lang="es-ES" sz="1500" dirty="0">
-                <a:solidFill>
-                  <a:srgbClr val="2F2B28"/>
-                </a:solidFill>
-              </a:rPr>
-              <a:t>Fase 6: catorce meses en uso. Control de gestión valida 1,1 M€ al año (P28); la capacidad liberada se reasignó a incidencias complejas.</a:t>
-            </a:r>
-          </a:p>
-          <a:p>
-            <a:pPr marL="285750" indent="-285750">
-              <a:spcAft>
-                <a:spcPts val="400"/>
-              </a:spcAft>
-              <a:buClr>
-                <a:srgbClr val="990F3D"/>
-              </a:buClr>
-              <a:buFont typeface="Arial"/>
-              <a:buChar char="•"/>
-            </a:pPr>
-            <a:r>
-              <a:rPr lang="es-ES" sz="1500" dirty="0">
-                <a:solidFill>
-                  <a:srgbClr val="2F2B28"/>
-                </a:solidFill>
-              </a:rPr>
-              <a:t>En el embudo está en «En uso»; en el panel suma al neto anual porque su valor está validado, no declarado.</a:t>
-            </a:r>
-          </a:p>
-        </p:txBody>
-      </p:sp>
-      <p:sp>
-        <p:nvSpPr>
-          <p:cNvPr id="164" name="Caja 164"/>
+                  <a:srgbClr val="564D47"/>
+                </a:solidFill>
+              </a:rPr>
+              <a:t>Llegó a la fase 3 y no superó la puerta G3</a:t>
+            </a:r>
+          </a:p>
+        </p:txBody>
+      </p:sp>
+      <p:sp>
+        <p:nvSpPr>
+          <p:cNvPr id="148" name="Caja 148"/>
           <p:cNvSpPr/>
           <p:nvPr/>
         </p:nvSpPr>
         <p:spPr>
           <a:xfrm>
-            <a:off x="609600" y="5600000"/>
-            <a:ext cx="10972800" cy="900000"/>
+            <a:off x="681000" y="2350000"/>
+            <a:ext cx="1240000" cy="1500000"/>
           </a:xfrm>
           <a:prstGeom prst="roundRect">
             <a:avLst>
@@ -3031,7 +2333,7 @@
             </a:avLst>
           </a:prstGeom>
           <a:solidFill>
-            <a:srgbClr val="0D7680"/>
+            <a:srgbClr val="990F3D"/>
           </a:solidFill>
           <a:ln>
             <a:noFill/>
@@ -3045,12 +2347,693 @@
           <a:p>
             <a:pPr algn="ctr"/>
             <a:r>
-              <a:rPr lang="es-ES" sz="2100" b="1" dirty="0">
+              <a:rPr lang="es-ES" sz="2400" b="1" dirty="0">
                 <a:solidFill>
                   <a:srgbClr val="FFFFFF"/>
                 </a:solidFill>
               </a:rPr>
-              <a:t>EN PRODUCCIÓN · 1,1 M€ DE RETORNO ANUAL VALIDADO · R6 TRIMESTRAL</a:t>
+              <a:t>F0</a:t>
+            </a:r>
+          </a:p>
+          <a:p>
+            <a:pPr algn="ctr"/>
+            <a:r>
+              <a:rPr lang="es-ES" sz="1050" dirty="0">
+                <a:solidFill>
+                  <a:srgbClr val="FFFFFF"/>
+                </a:solidFill>
+              </a:rPr>
+              <a:t>Contexto y restricciones</a:t>
+            </a:r>
+          </a:p>
+        </p:txBody>
+      </p:sp>
+      <p:sp>
+        <p:nvSpPr>
+          <p:cNvPr id="149" name="Texto 149"/>
+          <p:cNvSpPr txBox="1"/>
+          <p:nvPr/>
+        </p:nvSpPr>
+        <p:spPr>
+          <a:xfrm>
+            <a:off x="1591000" y="3900000"/>
+            <a:ext cx="800000" cy="300000"/>
+          </a:xfrm>
+          <a:prstGeom prst="rect">
+            <a:avLst/>
+          </a:prstGeom>
+          <a:noFill/>
+        </p:spPr>
+        <p:txBody>
+          <a:bodyPr wrap="square" anchor="t" lIns="45720" rIns="45720">
+            <a:noAutofit/>
+          </a:bodyPr>
+          <a:lstStyle/>
+          <a:p>
+            <a:pPr algn="ctr"/>
+            <a:r>
+              <a:rPr lang="es-ES" sz="1200" b="1" dirty="0">
+                <a:solidFill>
+                  <a:srgbClr val="990F3D"/>
+                </a:solidFill>
+              </a:rPr>
+              <a:t>G0</a:t>
+            </a:r>
+          </a:p>
+        </p:txBody>
+      </p:sp>
+      <p:sp>
+        <p:nvSpPr>
+          <p:cNvPr id="150" name="Caja 150"/>
+          <p:cNvSpPr/>
+          <p:nvPr/>
+        </p:nvSpPr>
+        <p:spPr>
+          <a:xfrm>
+            <a:off x="2051000" y="2350000"/>
+            <a:ext cx="1240000" cy="1500000"/>
+          </a:xfrm>
+          <a:prstGeom prst="roundRect">
+            <a:avLst>
+              <a:gd name="adj" fmla="val 6000"/>
+            </a:avLst>
+          </a:prstGeom>
+          <a:solidFill>
+            <a:srgbClr val="990F3D"/>
+          </a:solidFill>
+          <a:ln>
+            <a:noFill/>
+          </a:ln>
+        </p:spPr>
+        <p:txBody>
+          <a:bodyPr wrap="square" anchor="ctr" lIns="45720" rIns="45720">
+            <a:noAutofit/>
+          </a:bodyPr>
+          <a:lstStyle/>
+          <a:p>
+            <a:pPr algn="ctr"/>
+            <a:r>
+              <a:rPr lang="es-ES" sz="2400" b="1" dirty="0">
+                <a:solidFill>
+                  <a:srgbClr val="FFFFFF"/>
+                </a:solidFill>
+              </a:rPr>
+              <a:t>F1</a:t>
+            </a:r>
+          </a:p>
+          <a:p>
+            <a:pPr algn="ctr"/>
+            <a:r>
+              <a:rPr lang="es-ES" sz="1050" dirty="0">
+                <a:solidFill>
+                  <a:srgbClr val="FFFFFF"/>
+                </a:solidFill>
+              </a:rPr>
+              <a:t>Descubrimiento de oportunidades</a:t>
+            </a:r>
+          </a:p>
+        </p:txBody>
+      </p:sp>
+      <p:sp>
+        <p:nvSpPr>
+          <p:cNvPr id="151" name="Texto 151"/>
+          <p:cNvSpPr txBox="1"/>
+          <p:nvPr/>
+        </p:nvSpPr>
+        <p:spPr>
+          <a:xfrm>
+            <a:off x="2961000" y="3900000"/>
+            <a:ext cx="800000" cy="300000"/>
+          </a:xfrm>
+          <a:prstGeom prst="rect">
+            <a:avLst/>
+          </a:prstGeom>
+          <a:noFill/>
+        </p:spPr>
+        <p:txBody>
+          <a:bodyPr wrap="square" anchor="t" lIns="45720" rIns="45720">
+            <a:noAutofit/>
+          </a:bodyPr>
+          <a:lstStyle/>
+          <a:p>
+            <a:pPr algn="ctr"/>
+            <a:r>
+              <a:rPr lang="es-ES" sz="1200" b="1" dirty="0">
+                <a:solidFill>
+                  <a:srgbClr val="990F3D"/>
+                </a:solidFill>
+              </a:rPr>
+              <a:t>G1</a:t>
+            </a:r>
+          </a:p>
+        </p:txBody>
+      </p:sp>
+      <p:sp>
+        <p:nvSpPr>
+          <p:cNvPr id="152" name="Caja 152"/>
+          <p:cNvSpPr/>
+          <p:nvPr/>
+        </p:nvSpPr>
+        <p:spPr>
+          <a:xfrm>
+            <a:off x="3421000" y="2350000"/>
+            <a:ext cx="1240000" cy="1500000"/>
+          </a:xfrm>
+          <a:prstGeom prst="roundRect">
+            <a:avLst>
+              <a:gd name="adj" fmla="val 6000"/>
+            </a:avLst>
+          </a:prstGeom>
+          <a:solidFill>
+            <a:srgbClr val="990F3D"/>
+          </a:solidFill>
+          <a:ln>
+            <a:noFill/>
+          </a:ln>
+        </p:spPr>
+        <p:txBody>
+          <a:bodyPr wrap="square" anchor="ctr" lIns="45720" rIns="45720">
+            <a:noAutofit/>
+          </a:bodyPr>
+          <a:lstStyle/>
+          <a:p>
+            <a:pPr algn="ctr"/>
+            <a:r>
+              <a:rPr lang="es-ES" sz="2400" b="1" dirty="0">
+                <a:solidFill>
+                  <a:srgbClr val="FFFFFF"/>
+                </a:solidFill>
+              </a:rPr>
+              <a:t>F2</a:t>
+            </a:r>
+          </a:p>
+          <a:p>
+            <a:pPr algn="ctr"/>
+            <a:r>
+              <a:rPr lang="es-ES" sz="1050" dirty="0">
+                <a:solidFill>
+                  <a:srgbClr val="FFFFFF"/>
+                </a:solidFill>
+              </a:rPr>
+              <a:t>Hipótesis de valor</a:t>
+            </a:r>
+          </a:p>
+        </p:txBody>
+      </p:sp>
+      <p:sp>
+        <p:nvSpPr>
+          <p:cNvPr id="153" name="Texto 153"/>
+          <p:cNvSpPr txBox="1"/>
+          <p:nvPr/>
+        </p:nvSpPr>
+        <p:spPr>
+          <a:xfrm>
+            <a:off x="4331000" y="3900000"/>
+            <a:ext cx="800000" cy="300000"/>
+          </a:xfrm>
+          <a:prstGeom prst="rect">
+            <a:avLst/>
+          </a:prstGeom>
+          <a:noFill/>
+        </p:spPr>
+        <p:txBody>
+          <a:bodyPr wrap="square" anchor="t" lIns="45720" rIns="45720">
+            <a:noAutofit/>
+          </a:bodyPr>
+          <a:lstStyle/>
+          <a:p>
+            <a:pPr algn="ctr"/>
+            <a:r>
+              <a:rPr lang="es-ES" sz="1200" b="1" dirty="0">
+                <a:solidFill>
+                  <a:srgbClr val="990F3D"/>
+                </a:solidFill>
+              </a:rPr>
+              <a:t>G2</a:t>
+            </a:r>
+          </a:p>
+        </p:txBody>
+      </p:sp>
+      <p:sp>
+        <p:nvSpPr>
+          <p:cNvPr id="154" name="Caja 154"/>
+          <p:cNvSpPr/>
+          <p:nvPr/>
+        </p:nvSpPr>
+        <p:spPr>
+          <a:xfrm>
+            <a:off x="4791000" y="2350000"/>
+            <a:ext cx="1240000" cy="1500000"/>
+          </a:xfrm>
+          <a:prstGeom prst="roundRect">
+            <a:avLst>
+              <a:gd name="adj" fmla="val 6000"/>
+            </a:avLst>
+          </a:prstGeom>
+          <a:solidFill>
+            <a:srgbClr val="990F3D"/>
+          </a:solidFill>
+          <a:ln>
+            <a:noFill/>
+          </a:ln>
+        </p:spPr>
+        <p:txBody>
+          <a:bodyPr wrap="square" anchor="ctr" lIns="45720" rIns="45720">
+            <a:noAutofit/>
+          </a:bodyPr>
+          <a:lstStyle/>
+          <a:p>
+            <a:pPr algn="ctr"/>
+            <a:r>
+              <a:rPr lang="es-ES" sz="2400" b="1" dirty="0">
+                <a:solidFill>
+                  <a:srgbClr val="FFFFFF"/>
+                </a:solidFill>
+              </a:rPr>
+              <a:t>F3</a:t>
+            </a:r>
+          </a:p>
+          <a:p>
+            <a:pPr algn="ctr"/>
+            <a:r>
+              <a:rPr lang="es-ES" sz="1050" dirty="0">
+                <a:solidFill>
+                  <a:srgbClr val="FFFFFF"/>
+                </a:solidFill>
+              </a:rPr>
+              <a:t>Viabilidad y riesgo</a:t>
+            </a:r>
+          </a:p>
+        </p:txBody>
+      </p:sp>
+      <p:sp>
+        <p:nvSpPr>
+          <p:cNvPr id="155" name="Texto 155"/>
+          <p:cNvSpPr txBox="1"/>
+          <p:nvPr/>
+        </p:nvSpPr>
+        <p:spPr>
+          <a:xfrm>
+            <a:off x="5701000" y="3900000"/>
+            <a:ext cx="800000" cy="300000"/>
+          </a:xfrm>
+          <a:prstGeom prst="rect">
+            <a:avLst/>
+          </a:prstGeom>
+          <a:noFill/>
+        </p:spPr>
+        <p:txBody>
+          <a:bodyPr wrap="square" anchor="t" lIns="45720" rIns="45720">
+            <a:noAutofit/>
+          </a:bodyPr>
+          <a:lstStyle/>
+          <a:p>
+            <a:pPr algn="ctr"/>
+            <a:r>
+              <a:rPr lang="es-ES" sz="1200" b="1" dirty="0">
+                <a:solidFill>
+                  <a:srgbClr val="990F3D"/>
+                </a:solidFill>
+              </a:rPr>
+              <a:t>G3</a:t>
+            </a:r>
+          </a:p>
+        </p:txBody>
+      </p:sp>
+      <p:sp>
+        <p:nvSpPr>
+          <p:cNvPr id="156" name="Caja 156"/>
+          <p:cNvSpPr/>
+          <p:nvPr/>
+        </p:nvSpPr>
+        <p:spPr>
+          <a:xfrm>
+            <a:off x="6161000" y="2350000"/>
+            <a:ext cx="1240000" cy="1500000"/>
+          </a:xfrm>
+          <a:prstGeom prst="roundRect">
+            <a:avLst>
+              <a:gd name="adj" fmla="val 6000"/>
+            </a:avLst>
+          </a:prstGeom>
+          <a:solidFill>
+            <a:srgbClr val="C9A78D"/>
+          </a:solidFill>
+          <a:ln>
+            <a:noFill/>
+          </a:ln>
+        </p:spPr>
+        <p:txBody>
+          <a:bodyPr wrap="square" anchor="ctr" lIns="45720" rIns="45720">
+            <a:noAutofit/>
+          </a:bodyPr>
+          <a:lstStyle/>
+          <a:p>
+            <a:pPr algn="ctr"/>
+            <a:r>
+              <a:rPr lang="es-ES" sz="2400" b="1" dirty="0">
+                <a:solidFill>
+                  <a:srgbClr val="564D47"/>
+                </a:solidFill>
+              </a:rPr>
+              <a:t>F4</a:t>
+            </a:r>
+          </a:p>
+          <a:p>
+            <a:pPr algn="ctr"/>
+            <a:r>
+              <a:rPr lang="es-ES" sz="1050" dirty="0">
+                <a:solidFill>
+                  <a:srgbClr val="564D47"/>
+                </a:solidFill>
+              </a:rPr>
+              <a:t>Diseño de la solución</a:t>
+            </a:r>
+          </a:p>
+        </p:txBody>
+      </p:sp>
+      <p:sp>
+        <p:nvSpPr>
+          <p:cNvPr id="157" name="Texto 157"/>
+          <p:cNvSpPr txBox="1"/>
+          <p:nvPr/>
+        </p:nvSpPr>
+        <p:spPr>
+          <a:xfrm>
+            <a:off x="7071000" y="3900000"/>
+            <a:ext cx="800000" cy="300000"/>
+          </a:xfrm>
+          <a:prstGeom prst="rect">
+            <a:avLst/>
+          </a:prstGeom>
+          <a:noFill/>
+        </p:spPr>
+        <p:txBody>
+          <a:bodyPr wrap="square" anchor="t" lIns="45720" rIns="45720">
+            <a:noAutofit/>
+          </a:bodyPr>
+          <a:lstStyle/>
+          <a:p>
+            <a:pPr algn="ctr"/>
+            <a:r>
+              <a:rPr lang="es-ES" sz="1200" b="1" dirty="0">
+                <a:solidFill>
+                  <a:srgbClr val="990F3D"/>
+                </a:solidFill>
+              </a:rPr>
+              <a:t>G4</a:t>
+            </a:r>
+          </a:p>
+        </p:txBody>
+      </p:sp>
+      <p:sp>
+        <p:nvSpPr>
+          <p:cNvPr id="158" name="Caja 158"/>
+          <p:cNvSpPr/>
+          <p:nvPr/>
+        </p:nvSpPr>
+        <p:spPr>
+          <a:xfrm>
+            <a:off x="7531000" y="2350000"/>
+            <a:ext cx="1240000" cy="1500000"/>
+          </a:xfrm>
+          <a:prstGeom prst="roundRect">
+            <a:avLst>
+              <a:gd name="adj" fmla="val 6000"/>
+            </a:avLst>
+          </a:prstGeom>
+          <a:solidFill>
+            <a:srgbClr val="C9A78D"/>
+          </a:solidFill>
+          <a:ln>
+            <a:noFill/>
+          </a:ln>
+        </p:spPr>
+        <p:txBody>
+          <a:bodyPr wrap="square" anchor="ctr" lIns="45720" rIns="45720">
+            <a:noAutofit/>
+          </a:bodyPr>
+          <a:lstStyle/>
+          <a:p>
+            <a:pPr algn="ctr"/>
+            <a:r>
+              <a:rPr lang="es-ES" sz="2400" b="1" dirty="0">
+                <a:solidFill>
+                  <a:srgbClr val="564D47"/>
+                </a:solidFill>
+              </a:rPr>
+              <a:t>F5</a:t>
+            </a:r>
+          </a:p>
+          <a:p>
+            <a:pPr algn="ctr"/>
+            <a:r>
+              <a:rPr lang="es-ES" sz="1050" dirty="0">
+                <a:solidFill>
+                  <a:srgbClr val="564D47"/>
+                </a:solidFill>
+              </a:rPr>
+              <a:t>Entrega y validación</a:t>
+            </a:r>
+          </a:p>
+        </p:txBody>
+      </p:sp>
+      <p:sp>
+        <p:nvSpPr>
+          <p:cNvPr id="159" name="Texto 159"/>
+          <p:cNvSpPr txBox="1"/>
+          <p:nvPr/>
+        </p:nvSpPr>
+        <p:spPr>
+          <a:xfrm>
+            <a:off x="8441000" y="3900000"/>
+            <a:ext cx="800000" cy="300000"/>
+          </a:xfrm>
+          <a:prstGeom prst="rect">
+            <a:avLst/>
+          </a:prstGeom>
+          <a:noFill/>
+        </p:spPr>
+        <p:txBody>
+          <a:bodyPr wrap="square" anchor="t" lIns="45720" rIns="45720">
+            <a:noAutofit/>
+          </a:bodyPr>
+          <a:lstStyle/>
+          <a:p>
+            <a:pPr algn="ctr"/>
+            <a:r>
+              <a:rPr lang="es-ES" sz="1200" b="1" dirty="0">
+                <a:solidFill>
+                  <a:srgbClr val="990F3D"/>
+                </a:solidFill>
+              </a:rPr>
+              <a:t>G5</a:t>
+            </a:r>
+          </a:p>
+        </p:txBody>
+      </p:sp>
+      <p:sp>
+        <p:nvSpPr>
+          <p:cNvPr id="160" name="Caja 160"/>
+          <p:cNvSpPr/>
+          <p:nvPr/>
+        </p:nvSpPr>
+        <p:spPr>
+          <a:xfrm>
+            <a:off x="8901000" y="2350000"/>
+            <a:ext cx="1240000" cy="1500000"/>
+          </a:xfrm>
+          <a:prstGeom prst="roundRect">
+            <a:avLst>
+              <a:gd name="adj" fmla="val 6000"/>
+            </a:avLst>
+          </a:prstGeom>
+          <a:solidFill>
+            <a:srgbClr val="C9A78D"/>
+          </a:solidFill>
+          <a:ln>
+            <a:noFill/>
+          </a:ln>
+        </p:spPr>
+        <p:txBody>
+          <a:bodyPr wrap="square" anchor="ctr" lIns="45720" rIns="45720">
+            <a:noAutofit/>
+          </a:bodyPr>
+          <a:lstStyle/>
+          <a:p>
+            <a:pPr algn="ctr"/>
+            <a:r>
+              <a:rPr lang="es-ES" sz="2400" b="1" dirty="0">
+                <a:solidFill>
+                  <a:srgbClr val="564D47"/>
+                </a:solidFill>
+              </a:rPr>
+              <a:t>F6</a:t>
+            </a:r>
+          </a:p>
+          <a:p>
+            <a:pPr algn="ctr"/>
+            <a:r>
+              <a:rPr lang="es-ES" sz="1050" dirty="0">
+                <a:solidFill>
+                  <a:srgbClr val="564D47"/>
+                </a:solidFill>
+              </a:rPr>
+              <a:t>Operación y gobierno</a:t>
+            </a:r>
+          </a:p>
+        </p:txBody>
+      </p:sp>
+      <p:sp>
+        <p:nvSpPr>
+          <p:cNvPr id="161" name="Texto 161"/>
+          <p:cNvSpPr txBox="1"/>
+          <p:nvPr/>
+        </p:nvSpPr>
+        <p:spPr>
+          <a:xfrm>
+            <a:off x="9811000" y="3900000"/>
+            <a:ext cx="800000" cy="300000"/>
+          </a:xfrm>
+          <a:prstGeom prst="rect">
+            <a:avLst/>
+          </a:prstGeom>
+          <a:noFill/>
+        </p:spPr>
+        <p:txBody>
+          <a:bodyPr wrap="square" anchor="t" lIns="45720" rIns="45720">
+            <a:noAutofit/>
+          </a:bodyPr>
+          <a:lstStyle/>
+          <a:p>
+            <a:pPr algn="ctr"/>
+            <a:r>
+              <a:rPr lang="es-ES" sz="1200" b="1" dirty="0">
+                <a:solidFill>
+                  <a:srgbClr val="990F3D"/>
+                </a:solidFill>
+              </a:rPr>
+              <a:t>R6</a:t>
+            </a:r>
+          </a:p>
+        </p:txBody>
+      </p:sp>
+      <p:sp>
+        <p:nvSpPr>
+          <p:cNvPr id="162" name="Caja 162"/>
+          <p:cNvSpPr/>
+          <p:nvPr/>
+        </p:nvSpPr>
+        <p:spPr>
+          <a:xfrm>
+            <a:off x="10271000" y="2350000"/>
+            <a:ext cx="1240000" cy="1500000"/>
+          </a:xfrm>
+          <a:prstGeom prst="roundRect">
+            <a:avLst>
+              <a:gd name="adj" fmla="val 6000"/>
+            </a:avLst>
+          </a:prstGeom>
+          <a:solidFill>
+            <a:srgbClr val="C9A78D"/>
+          </a:solidFill>
+          <a:ln>
+            <a:noFill/>
+          </a:ln>
+        </p:spPr>
+        <p:txBody>
+          <a:bodyPr wrap="square" anchor="ctr" lIns="45720" rIns="45720">
+            <a:noAutofit/>
+          </a:bodyPr>
+          <a:lstStyle/>
+          <a:p>
+            <a:pPr algn="ctr"/>
+            <a:r>
+              <a:rPr lang="es-ES" sz="2400" b="1" dirty="0">
+                <a:solidFill>
+                  <a:srgbClr val="564D47"/>
+                </a:solidFill>
+              </a:rPr>
+              <a:t>F7</a:t>
+            </a:r>
+          </a:p>
+          <a:p>
+            <a:pPr algn="ctr"/>
+            <a:r>
+              <a:rPr lang="es-ES" sz="1050" dirty="0">
+                <a:solidFill>
+                  <a:srgbClr val="564D47"/>
+                </a:solidFill>
+              </a:rPr>
+              <a:t>Evolución o retirada</a:t>
+            </a:r>
+          </a:p>
+        </p:txBody>
+      </p:sp>
+      <p:sp>
+        <p:nvSpPr>
+          <p:cNvPr id="163" name="Texto 163"/>
+          <p:cNvSpPr txBox="1"/>
+          <p:nvPr/>
+        </p:nvSpPr>
+        <p:spPr>
+          <a:xfrm>
+            <a:off x="11181000" y="3900000"/>
+            <a:ext cx="800000" cy="300000"/>
+          </a:xfrm>
+          <a:prstGeom prst="rect">
+            <a:avLst/>
+          </a:prstGeom>
+          <a:noFill/>
+        </p:spPr>
+        <p:txBody>
+          <a:bodyPr wrap="square" anchor="t" lIns="45720" rIns="45720">
+            <a:noAutofit/>
+          </a:bodyPr>
+          <a:lstStyle/>
+          <a:p>
+            <a:pPr algn="ctr"/>
+            <a:r>
+              <a:rPr lang="es-ES" sz="1200" b="1" dirty="0">
+                <a:solidFill>
+                  <a:srgbClr val="990F3D"/>
+                </a:solidFill>
+              </a:rPr>
+              <a:t>G7</a:t>
+            </a:r>
+          </a:p>
+        </p:txBody>
+      </p:sp>
+      <p:sp>
+        <p:nvSpPr>
+          <p:cNvPr id="164" name="Texto 164"/>
+          <p:cNvSpPr txBox="1"/>
+          <p:nvPr/>
+        </p:nvSpPr>
+        <p:spPr>
+          <a:xfrm>
+            <a:off x="609600" y="4430000"/>
+            <a:ext cx="10972800" cy="600000"/>
+          </a:xfrm>
+          <a:prstGeom prst="rect">
+            <a:avLst/>
+          </a:prstGeom>
+          <a:noFill/>
+        </p:spPr>
+        <p:txBody>
+          <a:bodyPr wrap="square" anchor="t" lIns="45720" rIns="45720">
+            <a:noAutofit/>
+          </a:bodyPr>
+          <a:lstStyle/>
+          <a:p>
+            <a:pPr algn="ctr"/>
+            <a:r>
+              <a:rPr lang="es-ES" sz="2200" b="1" dirty="0">
+                <a:solidFill>
+                  <a:srgbClr val="990F3D"/>
+                </a:solidFill>
+              </a:rPr>
+              <a:t>PARADA EN G3 · sale del embudo como «Descartado», con su motivo</a:t>
             </a:r>
           </a:p>
         </p:txBody>
@@ -3090,7 +3073,7 @@
       </p:grpSpPr>
       <p:sp>
         <p:nvSpPr>
-          <p:cNvPr id="185" name="Marca"/>
+          <p:cNvPr id="172" name="Marca"/>
           <p:cNvSpPr/>
           <p:nvPr/>
         </p:nvSpPr>
@@ -3114,7 +3097,7 @@
       </p:sp>
       <p:sp>
         <p:nvSpPr>
-          <p:cNvPr id="186" name="Texto 186"/>
+          <p:cNvPr id="173" name="Texto 173"/>
           <p:cNvSpPr txBox="1"/>
           <p:nvPr/>
         </p:nvSpPr>
@@ -3148,7 +3131,7 @@
       </p:sp>
       <p:sp>
         <p:nvSpPr>
-          <p:cNvPr id="187" name="Texto 187"/>
+          <p:cNvPr id="174" name="Texto 174"/>
           <p:cNvSpPr txBox="1"/>
           <p:nvPr/>
         </p:nvSpPr>
@@ -3175,21 +3158,21 @@
                   <a:srgbClr val="990F3D"/>
                 </a:solidFill>
               </a:rPr>
-              <a:t>La iniciativa 2, sobre el ciclo de vida</a:t>
-            </a:r>
-          </a:p>
-        </p:txBody>
-      </p:sp>
-      <p:sp>
-        <p:nvSpPr>
-          <p:cNvPr id="188" name="Texto 188"/>
+              <a:t>Ejemplo 2 · Cuando una iniciativa llega a producción</a:t>
+            </a:r>
+          </a:p>
+        </p:txBody>
+      </p:sp>
+      <p:sp>
+        <p:nvSpPr>
+          <p:cNvPr id="169" name="Texto 169"/>
           <p:cNvSpPr txBox="1"/>
           <p:nvPr/>
         </p:nvSpPr>
         <p:spPr>
           <a:xfrm>
             <a:off x="609600" y="1330000"/>
-            <a:ext cx="10972800" cy="450000"/>
+            <a:ext cx="10972800" cy="500000"/>
           </a:xfrm>
           <a:prstGeom prst="rect">
             <a:avLst/>
@@ -3204,26 +3187,169 @@
           <a:p>
             <a:pPr algn="l"/>
             <a:r>
+              <a:rPr lang="es-ES" sz="1700" b="1" dirty="0">
+                <a:solidFill>
+                  <a:srgbClr val="2F2B28"/>
+                </a:solidFill>
+              </a:rPr>
+              <a:t>Asistente de respuesta a incidencias de TI de primer nivel</a:t>
+            </a:r>
+          </a:p>
+        </p:txBody>
+      </p:sp>
+      <p:sp>
+        <p:nvSpPr>
+          <p:cNvPr id="170" name="Texto 170"/>
+          <p:cNvSpPr txBox="1"/>
+          <p:nvPr/>
+        </p:nvSpPr>
+        <p:spPr>
+          <a:xfrm>
+            <a:off x="609600" y="1900000"/>
+            <a:ext cx="10972800" cy="3550000"/>
+          </a:xfrm>
+          <a:prstGeom prst="rect">
+            <a:avLst/>
+          </a:prstGeom>
+          <a:noFill/>
+        </p:spPr>
+        <p:txBody>
+          <a:bodyPr wrap="square" anchor="t" lIns="45720" rIns="45720">
+            <a:noAutofit/>
+          </a:bodyPr>
+          <a:lstStyle/>
+          <a:p>
+            <a:pPr marL="285750" indent="-285750">
+              <a:spcAft>
+                <a:spcPts val="400"/>
+              </a:spcAft>
+              <a:buClr>
+                <a:srgbClr val="990F3D"/>
+              </a:buClr>
+              <a:buFont typeface="Arial"/>
+              <a:buChar char="•"/>
+            </a:pPr>
+            <a:r>
               <a:rPr lang="es-ES" sz="1500" dirty="0">
                 <a:solidFill>
-                  <a:srgbClr val="564D47"/>
-                </a:solidFill>
-              </a:rPr>
-              <a:t>Recorrió las fases 0 a 6 y sigue en uso; la fase 7 llegará con G7</a:t>
-            </a:r>
-          </a:p>
-        </p:txBody>
-      </p:sp>
-      <p:sp>
-        <p:nvSpPr>
-          <p:cNvPr id="168" name="Caja 168"/>
+                  <a:srgbClr val="2F2B28"/>
+                </a:solidFill>
+              </a:rPr>
+              <a:t>Fases 0 y 1: TI la patrocina; frente a la alternativa sin IA (más plantilla), se propone la esfera de operaciones con ambición Optimizar (P07).</a:t>
+            </a:r>
+          </a:p>
+          <a:p>
+            <a:pPr marL="285750" indent="-285750">
+              <a:spcAft>
+                <a:spcPts val="400"/>
+              </a:spcAft>
+              <a:buClr>
+                <a:srgbClr val="990F3D"/>
+              </a:buClr>
+              <a:buFont typeface="Arial"/>
+              <a:buChar char="•"/>
+            </a:pPr>
+            <a:r>
+              <a:rPr lang="es-ES" sz="1500" dirty="0">
+                <a:solidFill>
+                  <a:srgbClr val="2F2B28"/>
+                </a:solidFill>
+              </a:rPr>
+              <a:t>Fase 2: hipótesis de un 30 % menos de tiempo de resolución en incidencias sencillas; el piloto controlado da un 32 %.</a:t>
+            </a:r>
+          </a:p>
+          <a:p>
+            <a:pPr marL="285750" indent="-285750">
+              <a:spcAft>
+                <a:spcPts val="400"/>
+              </a:spcAft>
+              <a:buClr>
+                <a:srgbClr val="990F3D"/>
+              </a:buClr>
+              <a:buFont typeface="Arial"/>
+              <a:buChar char="•"/>
+            </a:pPr>
+            <a:r>
+              <a:rPr lang="es-ES" sz="1500" dirty="0">
+                <a:solidFill>
+                  <a:srgbClr val="2F2B28"/>
+                </a:solidFill>
+              </a:rPr>
+              <a:t>Fase 3: sin sesgo relevante, riesgo residual medio aceptado por su órgano (P12), proveedor evaluado (P14). G3, Continuar.</a:t>
+            </a:r>
+          </a:p>
+          <a:p>
+            <a:pPr marL="285750" indent="-285750">
+              <a:spcAft>
+                <a:spcPts val="400"/>
+              </a:spcAft>
+              <a:buClr>
+                <a:srgbClr val="990F3D"/>
+              </a:buClr>
+              <a:buFont typeface="Arial"/>
+              <a:buChar char="•"/>
+            </a:pPr>
+            <a:r>
+              <a:rPr lang="es-ES" sz="1500" dirty="0">
+                <a:solidFill>
+                  <a:srgbClr val="2F2B28"/>
+                </a:solidFill>
+              </a:rPr>
+              <a:t>Fases 4 y 5: supervisión humana obligatoria por encima de cierta gravedad (P17), reversión probada (P19) y firma de puesta en producción (P23).</a:t>
+            </a:r>
+          </a:p>
+          <a:p>
+            <a:pPr marL="285750" indent="-285750">
+              <a:spcAft>
+                <a:spcPts val="400"/>
+              </a:spcAft>
+              <a:buClr>
+                <a:srgbClr val="990F3D"/>
+              </a:buClr>
+              <a:buFont typeface="Arial"/>
+              <a:buChar char="•"/>
+            </a:pPr>
+            <a:r>
+              <a:rPr lang="es-ES" sz="1500" dirty="0">
+                <a:solidFill>
+                  <a:srgbClr val="2F2B28"/>
+                </a:solidFill>
+              </a:rPr>
+              <a:t>Fase 6: catorce meses en uso. Control de gestión valida 1,1 M€ al año (P28); la capacidad liberada se reasignó a incidencias complejas.</a:t>
+            </a:r>
+          </a:p>
+          <a:p>
+            <a:pPr marL="285750" indent="-285750">
+              <a:spcAft>
+                <a:spcPts val="400"/>
+              </a:spcAft>
+              <a:buClr>
+                <a:srgbClr val="990F3D"/>
+              </a:buClr>
+              <a:buFont typeface="Arial"/>
+              <a:buChar char="•"/>
+            </a:pPr>
+            <a:r>
+              <a:rPr lang="es-ES" sz="1500" dirty="0">
+                <a:solidFill>
+                  <a:srgbClr val="2F2B28"/>
+                </a:solidFill>
+              </a:rPr>
+              <a:t>En el embudo está en «En uso»; en el panel suma al neto anual porque su valor está validado, no declarado.</a:t>
+            </a:r>
+          </a:p>
+        </p:txBody>
+      </p:sp>
+      <p:sp>
+        <p:nvSpPr>
+          <p:cNvPr id="171" name="Caja 171"/>
           <p:cNvSpPr/>
           <p:nvPr/>
         </p:nvSpPr>
         <p:spPr>
           <a:xfrm>
-            <a:off x="681000" y="2350000"/>
-            <a:ext cx="1240000" cy="1500000"/>
+            <a:off x="609600" y="5600000"/>
+            <a:ext cx="10972800" cy="900000"/>
           </a:xfrm>
           <a:prstGeom prst="roundRect">
             <a:avLst>
@@ -3245,693 +3371,12 @@
           <a:p>
             <a:pPr algn="ctr"/>
             <a:r>
-              <a:rPr lang="es-ES" sz="2400" b="1" dirty="0">
+              <a:rPr lang="es-ES" sz="2100" b="1" dirty="0">
                 <a:solidFill>
                   <a:srgbClr val="FFFFFF"/>
                 </a:solidFill>
               </a:rPr>
-              <a:t>F0</a:t>
-            </a:r>
-          </a:p>
-          <a:p>
-            <a:pPr algn="ctr"/>
-            <a:r>
-              <a:rPr lang="es-ES" sz="1050" dirty="0">
-                <a:solidFill>
-                  <a:srgbClr val="FFFFFF"/>
-                </a:solidFill>
-              </a:rPr>
-              <a:t>Contexto y restricciones</a:t>
-            </a:r>
-          </a:p>
-        </p:txBody>
-      </p:sp>
-      <p:sp>
-        <p:nvSpPr>
-          <p:cNvPr id="169" name="Texto 169"/>
-          <p:cNvSpPr txBox="1"/>
-          <p:nvPr/>
-        </p:nvSpPr>
-        <p:spPr>
-          <a:xfrm>
-            <a:off x="1591000" y="3900000"/>
-            <a:ext cx="800000" cy="300000"/>
-          </a:xfrm>
-          <a:prstGeom prst="rect">
-            <a:avLst/>
-          </a:prstGeom>
-          <a:noFill/>
-        </p:spPr>
-        <p:txBody>
-          <a:bodyPr wrap="square" anchor="t" lIns="45720" rIns="45720">
-            <a:noAutofit/>
-          </a:bodyPr>
-          <a:lstStyle/>
-          <a:p>
-            <a:pPr algn="ctr"/>
-            <a:r>
-              <a:rPr lang="es-ES" sz="1200" b="1" dirty="0">
-                <a:solidFill>
-                  <a:srgbClr val="990F3D"/>
-                </a:solidFill>
-              </a:rPr>
-              <a:t>G0</a:t>
-            </a:r>
-          </a:p>
-        </p:txBody>
-      </p:sp>
-      <p:sp>
-        <p:nvSpPr>
-          <p:cNvPr id="170" name="Caja 170"/>
-          <p:cNvSpPr/>
-          <p:nvPr/>
-        </p:nvSpPr>
-        <p:spPr>
-          <a:xfrm>
-            <a:off x="2051000" y="2350000"/>
-            <a:ext cx="1240000" cy="1500000"/>
-          </a:xfrm>
-          <a:prstGeom prst="roundRect">
-            <a:avLst>
-              <a:gd name="adj" fmla="val 6000"/>
-            </a:avLst>
-          </a:prstGeom>
-          <a:solidFill>
-            <a:srgbClr val="0D7680"/>
-          </a:solidFill>
-          <a:ln>
-            <a:noFill/>
-          </a:ln>
-        </p:spPr>
-        <p:txBody>
-          <a:bodyPr wrap="square" anchor="ctr" lIns="45720" rIns="45720">
-            <a:noAutofit/>
-          </a:bodyPr>
-          <a:lstStyle/>
-          <a:p>
-            <a:pPr algn="ctr"/>
-            <a:r>
-              <a:rPr lang="es-ES" sz="2400" b="1" dirty="0">
-                <a:solidFill>
-                  <a:srgbClr val="FFFFFF"/>
-                </a:solidFill>
-              </a:rPr>
-              <a:t>F1</a:t>
-            </a:r>
-          </a:p>
-          <a:p>
-            <a:pPr algn="ctr"/>
-            <a:r>
-              <a:rPr lang="es-ES" sz="1050" dirty="0">
-                <a:solidFill>
-                  <a:srgbClr val="FFFFFF"/>
-                </a:solidFill>
-              </a:rPr>
-              <a:t>Descubrimiento de oportunidades</a:t>
-            </a:r>
-          </a:p>
-        </p:txBody>
-      </p:sp>
-      <p:sp>
-        <p:nvSpPr>
-          <p:cNvPr id="171" name="Texto 171"/>
-          <p:cNvSpPr txBox="1"/>
-          <p:nvPr/>
-        </p:nvSpPr>
-        <p:spPr>
-          <a:xfrm>
-            <a:off x="2961000" y="3900000"/>
-            <a:ext cx="800000" cy="300000"/>
-          </a:xfrm>
-          <a:prstGeom prst="rect">
-            <a:avLst/>
-          </a:prstGeom>
-          <a:noFill/>
-        </p:spPr>
-        <p:txBody>
-          <a:bodyPr wrap="square" anchor="t" lIns="45720" rIns="45720">
-            <a:noAutofit/>
-          </a:bodyPr>
-          <a:lstStyle/>
-          <a:p>
-            <a:pPr algn="ctr"/>
-            <a:r>
-              <a:rPr lang="es-ES" sz="1200" b="1" dirty="0">
-                <a:solidFill>
-                  <a:srgbClr val="990F3D"/>
-                </a:solidFill>
-              </a:rPr>
-              <a:t>G1</a:t>
-            </a:r>
-          </a:p>
-        </p:txBody>
-      </p:sp>
-      <p:sp>
-        <p:nvSpPr>
-          <p:cNvPr id="172" name="Caja 172"/>
-          <p:cNvSpPr/>
-          <p:nvPr/>
-        </p:nvSpPr>
-        <p:spPr>
-          <a:xfrm>
-            <a:off x="3421000" y="2350000"/>
-            <a:ext cx="1240000" cy="1500000"/>
-          </a:xfrm>
-          <a:prstGeom prst="roundRect">
-            <a:avLst>
-              <a:gd name="adj" fmla="val 6000"/>
-            </a:avLst>
-          </a:prstGeom>
-          <a:solidFill>
-            <a:srgbClr val="0D7680"/>
-          </a:solidFill>
-          <a:ln>
-            <a:noFill/>
-          </a:ln>
-        </p:spPr>
-        <p:txBody>
-          <a:bodyPr wrap="square" anchor="ctr" lIns="45720" rIns="45720">
-            <a:noAutofit/>
-          </a:bodyPr>
-          <a:lstStyle/>
-          <a:p>
-            <a:pPr algn="ctr"/>
-            <a:r>
-              <a:rPr lang="es-ES" sz="2400" b="1" dirty="0">
-                <a:solidFill>
-                  <a:srgbClr val="FFFFFF"/>
-                </a:solidFill>
-              </a:rPr>
-              <a:t>F2</a:t>
-            </a:r>
-          </a:p>
-          <a:p>
-            <a:pPr algn="ctr"/>
-            <a:r>
-              <a:rPr lang="es-ES" sz="1050" dirty="0">
-                <a:solidFill>
-                  <a:srgbClr val="FFFFFF"/>
-                </a:solidFill>
-              </a:rPr>
-              <a:t>Hipótesis de valor</a:t>
-            </a:r>
-          </a:p>
-        </p:txBody>
-      </p:sp>
-      <p:sp>
-        <p:nvSpPr>
-          <p:cNvPr id="173" name="Texto 173"/>
-          <p:cNvSpPr txBox="1"/>
-          <p:nvPr/>
-        </p:nvSpPr>
-        <p:spPr>
-          <a:xfrm>
-            <a:off x="4331000" y="3900000"/>
-            <a:ext cx="800000" cy="300000"/>
-          </a:xfrm>
-          <a:prstGeom prst="rect">
-            <a:avLst/>
-          </a:prstGeom>
-          <a:noFill/>
-        </p:spPr>
-        <p:txBody>
-          <a:bodyPr wrap="square" anchor="t" lIns="45720" rIns="45720">
-            <a:noAutofit/>
-          </a:bodyPr>
-          <a:lstStyle/>
-          <a:p>
-            <a:pPr algn="ctr"/>
-            <a:r>
-              <a:rPr lang="es-ES" sz="1200" b="1" dirty="0">
-                <a:solidFill>
-                  <a:srgbClr val="990F3D"/>
-                </a:solidFill>
-              </a:rPr>
-              <a:t>G2</a:t>
-            </a:r>
-          </a:p>
-        </p:txBody>
-      </p:sp>
-      <p:sp>
-        <p:nvSpPr>
-          <p:cNvPr id="174" name="Caja 174"/>
-          <p:cNvSpPr/>
-          <p:nvPr/>
-        </p:nvSpPr>
-        <p:spPr>
-          <a:xfrm>
-            <a:off x="4791000" y="2350000"/>
-            <a:ext cx="1240000" cy="1500000"/>
-          </a:xfrm>
-          <a:prstGeom prst="roundRect">
-            <a:avLst>
-              <a:gd name="adj" fmla="val 6000"/>
-            </a:avLst>
-          </a:prstGeom>
-          <a:solidFill>
-            <a:srgbClr val="0D7680"/>
-          </a:solidFill>
-          <a:ln>
-            <a:noFill/>
-          </a:ln>
-        </p:spPr>
-        <p:txBody>
-          <a:bodyPr wrap="square" anchor="ctr" lIns="45720" rIns="45720">
-            <a:noAutofit/>
-          </a:bodyPr>
-          <a:lstStyle/>
-          <a:p>
-            <a:pPr algn="ctr"/>
-            <a:r>
-              <a:rPr lang="es-ES" sz="2400" b="1" dirty="0">
-                <a:solidFill>
-                  <a:srgbClr val="FFFFFF"/>
-                </a:solidFill>
-              </a:rPr>
-              <a:t>F3</a:t>
-            </a:r>
-          </a:p>
-          <a:p>
-            <a:pPr algn="ctr"/>
-            <a:r>
-              <a:rPr lang="es-ES" sz="1050" dirty="0">
-                <a:solidFill>
-                  <a:srgbClr val="FFFFFF"/>
-                </a:solidFill>
-              </a:rPr>
-              <a:t>Viabilidad y riesgo</a:t>
-            </a:r>
-          </a:p>
-        </p:txBody>
-      </p:sp>
-      <p:sp>
-        <p:nvSpPr>
-          <p:cNvPr id="175" name="Texto 175"/>
-          <p:cNvSpPr txBox="1"/>
-          <p:nvPr/>
-        </p:nvSpPr>
-        <p:spPr>
-          <a:xfrm>
-            <a:off x="5701000" y="3900000"/>
-            <a:ext cx="800000" cy="300000"/>
-          </a:xfrm>
-          <a:prstGeom prst="rect">
-            <a:avLst/>
-          </a:prstGeom>
-          <a:noFill/>
-        </p:spPr>
-        <p:txBody>
-          <a:bodyPr wrap="square" anchor="t" lIns="45720" rIns="45720">
-            <a:noAutofit/>
-          </a:bodyPr>
-          <a:lstStyle/>
-          <a:p>
-            <a:pPr algn="ctr"/>
-            <a:r>
-              <a:rPr lang="es-ES" sz="1200" b="1" dirty="0">
-                <a:solidFill>
-                  <a:srgbClr val="990F3D"/>
-                </a:solidFill>
-              </a:rPr>
-              <a:t>G3</a:t>
-            </a:r>
-          </a:p>
-        </p:txBody>
-      </p:sp>
-      <p:sp>
-        <p:nvSpPr>
-          <p:cNvPr id="176" name="Caja 176"/>
-          <p:cNvSpPr/>
-          <p:nvPr/>
-        </p:nvSpPr>
-        <p:spPr>
-          <a:xfrm>
-            <a:off x="6161000" y="2350000"/>
-            <a:ext cx="1240000" cy="1500000"/>
-          </a:xfrm>
-          <a:prstGeom prst="roundRect">
-            <a:avLst>
-              <a:gd name="adj" fmla="val 6000"/>
-            </a:avLst>
-          </a:prstGeom>
-          <a:solidFill>
-            <a:srgbClr val="0D7680"/>
-          </a:solidFill>
-          <a:ln>
-            <a:noFill/>
-          </a:ln>
-        </p:spPr>
-        <p:txBody>
-          <a:bodyPr wrap="square" anchor="ctr" lIns="45720" rIns="45720">
-            <a:noAutofit/>
-          </a:bodyPr>
-          <a:lstStyle/>
-          <a:p>
-            <a:pPr algn="ctr"/>
-            <a:r>
-              <a:rPr lang="es-ES" sz="2400" b="1" dirty="0">
-                <a:solidFill>
-                  <a:srgbClr val="FFFFFF"/>
-                </a:solidFill>
-              </a:rPr>
-              <a:t>F4</a:t>
-            </a:r>
-          </a:p>
-          <a:p>
-            <a:pPr algn="ctr"/>
-            <a:r>
-              <a:rPr lang="es-ES" sz="1050" dirty="0">
-                <a:solidFill>
-                  <a:srgbClr val="FFFFFF"/>
-                </a:solidFill>
-              </a:rPr>
-              <a:t>Diseño de la solución</a:t>
-            </a:r>
-          </a:p>
-        </p:txBody>
-      </p:sp>
-      <p:sp>
-        <p:nvSpPr>
-          <p:cNvPr id="177" name="Texto 177"/>
-          <p:cNvSpPr txBox="1"/>
-          <p:nvPr/>
-        </p:nvSpPr>
-        <p:spPr>
-          <a:xfrm>
-            <a:off x="7071000" y="3900000"/>
-            <a:ext cx="800000" cy="300000"/>
-          </a:xfrm>
-          <a:prstGeom prst="rect">
-            <a:avLst/>
-          </a:prstGeom>
-          <a:noFill/>
-        </p:spPr>
-        <p:txBody>
-          <a:bodyPr wrap="square" anchor="t" lIns="45720" rIns="45720">
-            <a:noAutofit/>
-          </a:bodyPr>
-          <a:lstStyle/>
-          <a:p>
-            <a:pPr algn="ctr"/>
-            <a:r>
-              <a:rPr lang="es-ES" sz="1200" b="1" dirty="0">
-                <a:solidFill>
-                  <a:srgbClr val="990F3D"/>
-                </a:solidFill>
-              </a:rPr>
-              <a:t>G4</a:t>
-            </a:r>
-          </a:p>
-        </p:txBody>
-      </p:sp>
-      <p:sp>
-        <p:nvSpPr>
-          <p:cNvPr id="178" name="Caja 178"/>
-          <p:cNvSpPr/>
-          <p:nvPr/>
-        </p:nvSpPr>
-        <p:spPr>
-          <a:xfrm>
-            <a:off x="7531000" y="2350000"/>
-            <a:ext cx="1240000" cy="1500000"/>
-          </a:xfrm>
-          <a:prstGeom prst="roundRect">
-            <a:avLst>
-              <a:gd name="adj" fmla="val 6000"/>
-            </a:avLst>
-          </a:prstGeom>
-          <a:solidFill>
-            <a:srgbClr val="0D7680"/>
-          </a:solidFill>
-          <a:ln>
-            <a:noFill/>
-          </a:ln>
-        </p:spPr>
-        <p:txBody>
-          <a:bodyPr wrap="square" anchor="ctr" lIns="45720" rIns="45720">
-            <a:noAutofit/>
-          </a:bodyPr>
-          <a:lstStyle/>
-          <a:p>
-            <a:pPr algn="ctr"/>
-            <a:r>
-              <a:rPr lang="es-ES" sz="2400" b="1" dirty="0">
-                <a:solidFill>
-                  <a:srgbClr val="FFFFFF"/>
-                </a:solidFill>
-              </a:rPr>
-              <a:t>F5</a:t>
-            </a:r>
-          </a:p>
-          <a:p>
-            <a:pPr algn="ctr"/>
-            <a:r>
-              <a:rPr lang="es-ES" sz="1050" dirty="0">
-                <a:solidFill>
-                  <a:srgbClr val="FFFFFF"/>
-                </a:solidFill>
-              </a:rPr>
-              <a:t>Entrega y validación</a:t>
-            </a:r>
-          </a:p>
-        </p:txBody>
-      </p:sp>
-      <p:sp>
-        <p:nvSpPr>
-          <p:cNvPr id="179" name="Texto 179"/>
-          <p:cNvSpPr txBox="1"/>
-          <p:nvPr/>
-        </p:nvSpPr>
-        <p:spPr>
-          <a:xfrm>
-            <a:off x="8441000" y="3900000"/>
-            <a:ext cx="800000" cy="300000"/>
-          </a:xfrm>
-          <a:prstGeom prst="rect">
-            <a:avLst/>
-          </a:prstGeom>
-          <a:noFill/>
-        </p:spPr>
-        <p:txBody>
-          <a:bodyPr wrap="square" anchor="t" lIns="45720" rIns="45720">
-            <a:noAutofit/>
-          </a:bodyPr>
-          <a:lstStyle/>
-          <a:p>
-            <a:pPr algn="ctr"/>
-            <a:r>
-              <a:rPr lang="es-ES" sz="1200" b="1" dirty="0">
-                <a:solidFill>
-                  <a:srgbClr val="990F3D"/>
-                </a:solidFill>
-              </a:rPr>
-              <a:t>G5</a:t>
-            </a:r>
-          </a:p>
-        </p:txBody>
-      </p:sp>
-      <p:sp>
-        <p:nvSpPr>
-          <p:cNvPr id="180" name="Caja 180"/>
-          <p:cNvSpPr/>
-          <p:nvPr/>
-        </p:nvSpPr>
-        <p:spPr>
-          <a:xfrm>
-            <a:off x="8901000" y="2350000"/>
-            <a:ext cx="1240000" cy="1500000"/>
-          </a:xfrm>
-          <a:prstGeom prst="roundRect">
-            <a:avLst>
-              <a:gd name="adj" fmla="val 6000"/>
-            </a:avLst>
-          </a:prstGeom>
-          <a:solidFill>
-            <a:srgbClr val="0D7680"/>
-          </a:solidFill>
-          <a:ln>
-            <a:noFill/>
-          </a:ln>
-        </p:spPr>
-        <p:txBody>
-          <a:bodyPr wrap="square" anchor="ctr" lIns="45720" rIns="45720">
-            <a:noAutofit/>
-          </a:bodyPr>
-          <a:lstStyle/>
-          <a:p>
-            <a:pPr algn="ctr"/>
-            <a:r>
-              <a:rPr lang="es-ES" sz="2400" b="1" dirty="0">
-                <a:solidFill>
-                  <a:srgbClr val="FFFFFF"/>
-                </a:solidFill>
-              </a:rPr>
-              <a:t>F6</a:t>
-            </a:r>
-          </a:p>
-          <a:p>
-            <a:pPr algn="ctr"/>
-            <a:r>
-              <a:rPr lang="es-ES" sz="1050" dirty="0">
-                <a:solidFill>
-                  <a:srgbClr val="FFFFFF"/>
-                </a:solidFill>
-              </a:rPr>
-              <a:t>Operación y gobierno</a:t>
-            </a:r>
-          </a:p>
-        </p:txBody>
-      </p:sp>
-      <p:sp>
-        <p:nvSpPr>
-          <p:cNvPr id="181" name="Texto 181"/>
-          <p:cNvSpPr txBox="1"/>
-          <p:nvPr/>
-        </p:nvSpPr>
-        <p:spPr>
-          <a:xfrm>
-            <a:off x="9811000" y="3900000"/>
-            <a:ext cx="800000" cy="300000"/>
-          </a:xfrm>
-          <a:prstGeom prst="rect">
-            <a:avLst/>
-          </a:prstGeom>
-          <a:noFill/>
-        </p:spPr>
-        <p:txBody>
-          <a:bodyPr wrap="square" anchor="t" lIns="45720" rIns="45720">
-            <a:noAutofit/>
-          </a:bodyPr>
-          <a:lstStyle/>
-          <a:p>
-            <a:pPr algn="ctr"/>
-            <a:r>
-              <a:rPr lang="es-ES" sz="1200" b="1" dirty="0">
-                <a:solidFill>
-                  <a:srgbClr val="990F3D"/>
-                </a:solidFill>
-              </a:rPr>
-              <a:t>R6</a:t>
-            </a:r>
-          </a:p>
-        </p:txBody>
-      </p:sp>
-      <p:sp>
-        <p:nvSpPr>
-          <p:cNvPr id="182" name="Caja 182"/>
-          <p:cNvSpPr/>
-          <p:nvPr/>
-        </p:nvSpPr>
-        <p:spPr>
-          <a:xfrm>
-            <a:off x="10271000" y="2350000"/>
-            <a:ext cx="1240000" cy="1500000"/>
-          </a:xfrm>
-          <a:prstGeom prst="roundRect">
-            <a:avLst>
-              <a:gd name="adj" fmla="val 6000"/>
-            </a:avLst>
-          </a:prstGeom>
-          <a:solidFill>
-            <a:srgbClr val="C9A78D"/>
-          </a:solidFill>
-          <a:ln>
-            <a:noFill/>
-          </a:ln>
-        </p:spPr>
-        <p:txBody>
-          <a:bodyPr wrap="square" anchor="ctr" lIns="45720" rIns="45720">
-            <a:noAutofit/>
-          </a:bodyPr>
-          <a:lstStyle/>
-          <a:p>
-            <a:pPr algn="ctr"/>
-            <a:r>
-              <a:rPr lang="es-ES" sz="2400" b="1" dirty="0">
-                <a:solidFill>
-                  <a:srgbClr val="564D47"/>
-                </a:solidFill>
-              </a:rPr>
-              <a:t>F7</a:t>
-            </a:r>
-          </a:p>
-          <a:p>
-            <a:pPr algn="ctr"/>
-            <a:r>
-              <a:rPr lang="es-ES" sz="1050" dirty="0">
-                <a:solidFill>
-                  <a:srgbClr val="564D47"/>
-                </a:solidFill>
-              </a:rPr>
-              <a:t>Evolución o retirada</a:t>
-            </a:r>
-          </a:p>
-        </p:txBody>
-      </p:sp>
-      <p:sp>
-        <p:nvSpPr>
-          <p:cNvPr id="183" name="Texto 183"/>
-          <p:cNvSpPr txBox="1"/>
-          <p:nvPr/>
-        </p:nvSpPr>
-        <p:spPr>
-          <a:xfrm>
-            <a:off x="11181000" y="3900000"/>
-            <a:ext cx="800000" cy="300000"/>
-          </a:xfrm>
-          <a:prstGeom prst="rect">
-            <a:avLst/>
-          </a:prstGeom>
-          <a:noFill/>
-        </p:spPr>
-        <p:txBody>
-          <a:bodyPr wrap="square" anchor="t" lIns="45720" rIns="45720">
-            <a:noAutofit/>
-          </a:bodyPr>
-          <a:lstStyle/>
-          <a:p>
-            <a:pPr algn="ctr"/>
-            <a:r>
-              <a:rPr lang="es-ES" sz="1200" b="1" dirty="0">
-                <a:solidFill>
-                  <a:srgbClr val="990F3D"/>
-                </a:solidFill>
-              </a:rPr>
-              <a:t>G7</a:t>
-            </a:r>
-          </a:p>
-        </p:txBody>
-      </p:sp>
-      <p:sp>
-        <p:nvSpPr>
-          <p:cNvPr id="184" name="Texto 184"/>
-          <p:cNvSpPr txBox="1"/>
-          <p:nvPr/>
-        </p:nvSpPr>
-        <p:spPr>
-          <a:xfrm>
-            <a:off x="609600" y="4430000"/>
-            <a:ext cx="10972800" cy="600000"/>
-          </a:xfrm>
-          <a:prstGeom prst="rect">
-            <a:avLst/>
-          </a:prstGeom>
-          <a:noFill/>
-        </p:spPr>
-        <p:txBody>
-          <a:bodyPr wrap="square" anchor="t" lIns="45720" rIns="45720">
-            <a:noAutofit/>
-          </a:bodyPr>
-          <a:lstStyle/>
-          <a:p>
-            <a:pPr algn="ctr"/>
-            <a:r>
-              <a:rPr lang="es-ES" sz="2200" b="1" dirty="0">
-                <a:solidFill>
-                  <a:srgbClr val="0D7680"/>
-                </a:solidFill>
-              </a:rPr>
-              <a:t>EN USO · cada R6 confirma que sigue aportando valor bajo control</a:t>
+              <a:t>EN PRODUCCIÓN · 1,1 M€ DE RETORNO ANUAL VALIDADO · R6 TRIMESTRAL</a:t>
             </a:r>
           </a:p>
         </p:txBody>
@@ -3971,7 +3416,7 @@
       </p:grpSpPr>
       <p:sp>
         <p:nvSpPr>
-          <p:cNvPr id="190" name="Marca"/>
+          <p:cNvPr id="192" name="Marca"/>
           <p:cNvSpPr/>
           <p:nvPr/>
         </p:nvSpPr>
@@ -3995,7 +3440,7 @@
       </p:sp>
       <p:sp>
         <p:nvSpPr>
-          <p:cNvPr id="191" name="Texto 191"/>
+          <p:cNvPr id="193" name="Texto 193"/>
           <p:cNvSpPr txBox="1"/>
           <p:nvPr/>
         </p:nvSpPr>
@@ -4029,7 +3474,7 @@
       </p:sp>
       <p:sp>
         <p:nvSpPr>
-          <p:cNvPr id="192" name="Texto 192"/>
+          <p:cNvPr id="194" name="Texto 194"/>
           <p:cNvSpPr txBox="1"/>
           <p:nvPr/>
         </p:nvSpPr>
@@ -4056,130 +3501,763 @@
                   <a:srgbClr val="990F3D"/>
                 </a:solidFill>
               </a:rPr>
-              <a:t>Cómo se mide el valor</a:t>
-            </a:r>
-          </a:p>
-        </p:txBody>
-      </p:sp>
-      <p:sp>
-        <p:nvSpPr>
-          <p:cNvPr id="189" name="Texto 189"/>
-          <p:cNvSpPr txBox="1"/>
-          <p:nvPr/>
-        </p:nvSpPr>
-        <p:spPr>
-          <a:xfrm>
-            <a:off x="609600" y="1750000"/>
-            <a:ext cx="10972800" cy="4400000"/>
-          </a:xfrm>
-          <a:prstGeom prst="rect">
-            <a:avLst/>
-          </a:prstGeom>
-          <a:noFill/>
-        </p:spPr>
-        <p:txBody>
-          <a:bodyPr wrap="square" anchor="t" lIns="45720" rIns="45720">
-            <a:noAutofit/>
-          </a:bodyPr>
-          <a:lstStyle/>
-          <a:p>
-            <a:pPr marL="285750" indent="-285750">
-              <a:spcAft>
-                <a:spcPts val="400"/>
-              </a:spcAft>
-              <a:buClr>
-                <a:srgbClr val="990F3D"/>
-              </a:buClr>
-              <a:buFont typeface="Arial"/>
-              <a:buChar char="•"/>
-            </a:pPr>
-            <a:r>
-              <a:rPr lang="es-ES" sz="1800" dirty="0">
-                <a:solidFill>
-                  <a:srgbClr val="2F2B28"/>
-                </a:solidFill>
-              </a:rPr>
-              <a:t>Todo importe lleva fórmula y estado: validado (control de gestión), declarado (el equipo) o estimado.</a:t>
-            </a:r>
-          </a:p>
-          <a:p>
-            <a:pPr marL="285750" indent="-285750">
-              <a:spcAft>
-                <a:spcPts val="400"/>
-              </a:spcAft>
-              <a:buClr>
-                <a:srgbClr val="990F3D"/>
-              </a:buClr>
-              <a:buFont typeface="Arial"/>
-              <a:buChar char="•"/>
-            </a:pPr>
-            <a:r>
-              <a:rPr lang="es-ES" sz="1800" dirty="0">
-                <a:solidFill>
-                  <a:srgbClr val="2F2B28"/>
-                </a:solidFill>
-              </a:rPr>
-              <a:t>Las horas liberadas no son ahorro hasta que se materializan: baja un coste o se reasignan a una actividad con valor.</a:t>
-            </a:r>
-          </a:p>
-          <a:p>
-            <a:pPr marL="285750" indent="-285750">
-              <a:spcAft>
-                <a:spcPts val="400"/>
-              </a:spcAft>
-              <a:buClr>
-                <a:srgbClr val="990F3D"/>
-              </a:buClr>
-              <a:buFont typeface="Arial"/>
-              <a:buChar char="•"/>
-            </a:pPr>
-            <a:r>
-              <a:rPr lang="es-ES" sz="1800" dirty="0">
-                <a:solidFill>
-                  <a:srgbClr val="2F2B28"/>
-                </a:solidFill>
-              </a:rPr>
-              <a:t>El coste es completo: construcción, consumo, operación, supervisión humana y retirada.</a:t>
-            </a:r>
-          </a:p>
-          <a:p>
-            <a:pPr marL="285750" indent="-285750">
-              <a:spcAft>
-                <a:spcPts val="400"/>
-              </a:spcAft>
-              <a:buClr>
-                <a:srgbClr val="990F3D"/>
-              </a:buClr>
-              <a:buFont typeface="Arial"/>
-              <a:buChar char="•"/>
-            </a:pPr>
-            <a:r>
-              <a:rPr lang="es-ES" sz="1800" dirty="0">
-                <a:solidFill>
-                  <a:srgbClr val="2F2B28"/>
-                </a:solidFill>
-              </a:rPr>
-              <a:t>El índice de transformación usa ocho señales de evidencia para separar transformar de solo eficientar.</a:t>
-            </a:r>
-          </a:p>
-          <a:p>
-            <a:pPr marL="285750" indent="-285750">
-              <a:spcAft>
-                <a:spcPts val="400"/>
-              </a:spcAft>
-              <a:buClr>
-                <a:srgbClr val="990F3D"/>
-              </a:buClr>
-              <a:buFont typeface="Arial"/>
-              <a:buChar char="•"/>
-            </a:pPr>
-            <a:r>
-              <a:rPr lang="es-ES" sz="1800" dirty="0">
-                <a:solidFill>
-                  <a:srgbClr val="2F2B28"/>
-                </a:solidFill>
-              </a:rPr>
-              <a:t>Diez reglas de medición (documento 40). Ninguna cifra entra en el neto de la cartera sin su estado.</a:t>
+              <a:t>La iniciativa 2, sobre el ciclo de vida</a:t>
+            </a:r>
+          </a:p>
+        </p:txBody>
+      </p:sp>
+      <p:sp>
+        <p:nvSpPr>
+          <p:cNvPr id="195" name="Texto 195"/>
+          <p:cNvSpPr txBox="1"/>
+          <p:nvPr/>
+        </p:nvSpPr>
+        <p:spPr>
+          <a:xfrm>
+            <a:off x="609600" y="1330000"/>
+            <a:ext cx="10972800" cy="450000"/>
+          </a:xfrm>
+          <a:prstGeom prst="rect">
+            <a:avLst/>
+          </a:prstGeom>
+          <a:noFill/>
+        </p:spPr>
+        <p:txBody>
+          <a:bodyPr wrap="square" anchor="t" lIns="45720" rIns="45720">
+            <a:noAutofit/>
+          </a:bodyPr>
+          <a:lstStyle/>
+          <a:p>
+            <a:pPr algn="l"/>
+            <a:r>
+              <a:rPr lang="es-ES" sz="1500" dirty="0">
+                <a:solidFill>
+                  <a:srgbClr val="564D47"/>
+                </a:solidFill>
+              </a:rPr>
+              <a:t>Recorrió las fases 0 a 6 y sigue en uso; la fase 7 llegará con G7</a:t>
+            </a:r>
+          </a:p>
+        </p:txBody>
+      </p:sp>
+      <p:sp>
+        <p:nvSpPr>
+          <p:cNvPr id="175" name="Caja 175"/>
+          <p:cNvSpPr/>
+          <p:nvPr/>
+        </p:nvSpPr>
+        <p:spPr>
+          <a:xfrm>
+            <a:off x="681000" y="2350000"/>
+            <a:ext cx="1240000" cy="1500000"/>
+          </a:xfrm>
+          <a:prstGeom prst="roundRect">
+            <a:avLst>
+              <a:gd name="adj" fmla="val 6000"/>
+            </a:avLst>
+          </a:prstGeom>
+          <a:solidFill>
+            <a:srgbClr val="0D7680"/>
+          </a:solidFill>
+          <a:ln>
+            <a:noFill/>
+          </a:ln>
+        </p:spPr>
+        <p:txBody>
+          <a:bodyPr wrap="square" anchor="ctr" lIns="45720" rIns="45720">
+            <a:noAutofit/>
+          </a:bodyPr>
+          <a:lstStyle/>
+          <a:p>
+            <a:pPr algn="ctr"/>
+            <a:r>
+              <a:rPr lang="es-ES" sz="2400" b="1" dirty="0">
+                <a:solidFill>
+                  <a:srgbClr val="FFFFFF"/>
+                </a:solidFill>
+              </a:rPr>
+              <a:t>F0</a:t>
+            </a:r>
+          </a:p>
+          <a:p>
+            <a:pPr algn="ctr"/>
+            <a:r>
+              <a:rPr lang="es-ES" sz="1050" dirty="0">
+                <a:solidFill>
+                  <a:srgbClr val="FFFFFF"/>
+                </a:solidFill>
+              </a:rPr>
+              <a:t>Contexto y restricciones</a:t>
+            </a:r>
+          </a:p>
+        </p:txBody>
+      </p:sp>
+      <p:sp>
+        <p:nvSpPr>
+          <p:cNvPr id="176" name="Texto 176"/>
+          <p:cNvSpPr txBox="1"/>
+          <p:nvPr/>
+        </p:nvSpPr>
+        <p:spPr>
+          <a:xfrm>
+            <a:off x="1591000" y="3900000"/>
+            <a:ext cx="800000" cy="300000"/>
+          </a:xfrm>
+          <a:prstGeom prst="rect">
+            <a:avLst/>
+          </a:prstGeom>
+          <a:noFill/>
+        </p:spPr>
+        <p:txBody>
+          <a:bodyPr wrap="square" anchor="t" lIns="45720" rIns="45720">
+            <a:noAutofit/>
+          </a:bodyPr>
+          <a:lstStyle/>
+          <a:p>
+            <a:pPr algn="ctr"/>
+            <a:r>
+              <a:rPr lang="es-ES" sz="1200" b="1" dirty="0">
+                <a:solidFill>
+                  <a:srgbClr val="990F3D"/>
+                </a:solidFill>
+              </a:rPr>
+              <a:t>G0</a:t>
+            </a:r>
+          </a:p>
+        </p:txBody>
+      </p:sp>
+      <p:sp>
+        <p:nvSpPr>
+          <p:cNvPr id="177" name="Caja 177"/>
+          <p:cNvSpPr/>
+          <p:nvPr/>
+        </p:nvSpPr>
+        <p:spPr>
+          <a:xfrm>
+            <a:off x="2051000" y="2350000"/>
+            <a:ext cx="1240000" cy="1500000"/>
+          </a:xfrm>
+          <a:prstGeom prst="roundRect">
+            <a:avLst>
+              <a:gd name="adj" fmla="val 6000"/>
+            </a:avLst>
+          </a:prstGeom>
+          <a:solidFill>
+            <a:srgbClr val="0D7680"/>
+          </a:solidFill>
+          <a:ln>
+            <a:noFill/>
+          </a:ln>
+        </p:spPr>
+        <p:txBody>
+          <a:bodyPr wrap="square" anchor="ctr" lIns="45720" rIns="45720">
+            <a:noAutofit/>
+          </a:bodyPr>
+          <a:lstStyle/>
+          <a:p>
+            <a:pPr algn="ctr"/>
+            <a:r>
+              <a:rPr lang="es-ES" sz="2400" b="1" dirty="0">
+                <a:solidFill>
+                  <a:srgbClr val="FFFFFF"/>
+                </a:solidFill>
+              </a:rPr>
+              <a:t>F1</a:t>
+            </a:r>
+          </a:p>
+          <a:p>
+            <a:pPr algn="ctr"/>
+            <a:r>
+              <a:rPr lang="es-ES" sz="1050" dirty="0">
+                <a:solidFill>
+                  <a:srgbClr val="FFFFFF"/>
+                </a:solidFill>
+              </a:rPr>
+              <a:t>Descubrimiento de oportunidades</a:t>
+            </a:r>
+          </a:p>
+        </p:txBody>
+      </p:sp>
+      <p:sp>
+        <p:nvSpPr>
+          <p:cNvPr id="178" name="Texto 178"/>
+          <p:cNvSpPr txBox="1"/>
+          <p:nvPr/>
+        </p:nvSpPr>
+        <p:spPr>
+          <a:xfrm>
+            <a:off x="2961000" y="3900000"/>
+            <a:ext cx="800000" cy="300000"/>
+          </a:xfrm>
+          <a:prstGeom prst="rect">
+            <a:avLst/>
+          </a:prstGeom>
+          <a:noFill/>
+        </p:spPr>
+        <p:txBody>
+          <a:bodyPr wrap="square" anchor="t" lIns="45720" rIns="45720">
+            <a:noAutofit/>
+          </a:bodyPr>
+          <a:lstStyle/>
+          <a:p>
+            <a:pPr algn="ctr"/>
+            <a:r>
+              <a:rPr lang="es-ES" sz="1200" b="1" dirty="0">
+                <a:solidFill>
+                  <a:srgbClr val="990F3D"/>
+                </a:solidFill>
+              </a:rPr>
+              <a:t>G1</a:t>
+            </a:r>
+          </a:p>
+        </p:txBody>
+      </p:sp>
+      <p:sp>
+        <p:nvSpPr>
+          <p:cNvPr id="179" name="Caja 179"/>
+          <p:cNvSpPr/>
+          <p:nvPr/>
+        </p:nvSpPr>
+        <p:spPr>
+          <a:xfrm>
+            <a:off x="3421000" y="2350000"/>
+            <a:ext cx="1240000" cy="1500000"/>
+          </a:xfrm>
+          <a:prstGeom prst="roundRect">
+            <a:avLst>
+              <a:gd name="adj" fmla="val 6000"/>
+            </a:avLst>
+          </a:prstGeom>
+          <a:solidFill>
+            <a:srgbClr val="0D7680"/>
+          </a:solidFill>
+          <a:ln>
+            <a:noFill/>
+          </a:ln>
+        </p:spPr>
+        <p:txBody>
+          <a:bodyPr wrap="square" anchor="ctr" lIns="45720" rIns="45720">
+            <a:noAutofit/>
+          </a:bodyPr>
+          <a:lstStyle/>
+          <a:p>
+            <a:pPr algn="ctr"/>
+            <a:r>
+              <a:rPr lang="es-ES" sz="2400" b="1" dirty="0">
+                <a:solidFill>
+                  <a:srgbClr val="FFFFFF"/>
+                </a:solidFill>
+              </a:rPr>
+              <a:t>F2</a:t>
+            </a:r>
+          </a:p>
+          <a:p>
+            <a:pPr algn="ctr"/>
+            <a:r>
+              <a:rPr lang="es-ES" sz="1050" dirty="0">
+                <a:solidFill>
+                  <a:srgbClr val="FFFFFF"/>
+                </a:solidFill>
+              </a:rPr>
+              <a:t>Hipótesis de valor</a:t>
+            </a:r>
+          </a:p>
+        </p:txBody>
+      </p:sp>
+      <p:sp>
+        <p:nvSpPr>
+          <p:cNvPr id="180" name="Texto 180"/>
+          <p:cNvSpPr txBox="1"/>
+          <p:nvPr/>
+        </p:nvSpPr>
+        <p:spPr>
+          <a:xfrm>
+            <a:off x="4331000" y="3900000"/>
+            <a:ext cx="800000" cy="300000"/>
+          </a:xfrm>
+          <a:prstGeom prst="rect">
+            <a:avLst/>
+          </a:prstGeom>
+          <a:noFill/>
+        </p:spPr>
+        <p:txBody>
+          <a:bodyPr wrap="square" anchor="t" lIns="45720" rIns="45720">
+            <a:noAutofit/>
+          </a:bodyPr>
+          <a:lstStyle/>
+          <a:p>
+            <a:pPr algn="ctr"/>
+            <a:r>
+              <a:rPr lang="es-ES" sz="1200" b="1" dirty="0">
+                <a:solidFill>
+                  <a:srgbClr val="990F3D"/>
+                </a:solidFill>
+              </a:rPr>
+              <a:t>G2</a:t>
+            </a:r>
+          </a:p>
+        </p:txBody>
+      </p:sp>
+      <p:sp>
+        <p:nvSpPr>
+          <p:cNvPr id="181" name="Caja 181"/>
+          <p:cNvSpPr/>
+          <p:nvPr/>
+        </p:nvSpPr>
+        <p:spPr>
+          <a:xfrm>
+            <a:off x="4791000" y="2350000"/>
+            <a:ext cx="1240000" cy="1500000"/>
+          </a:xfrm>
+          <a:prstGeom prst="roundRect">
+            <a:avLst>
+              <a:gd name="adj" fmla="val 6000"/>
+            </a:avLst>
+          </a:prstGeom>
+          <a:solidFill>
+            <a:srgbClr val="0D7680"/>
+          </a:solidFill>
+          <a:ln>
+            <a:noFill/>
+          </a:ln>
+        </p:spPr>
+        <p:txBody>
+          <a:bodyPr wrap="square" anchor="ctr" lIns="45720" rIns="45720">
+            <a:noAutofit/>
+          </a:bodyPr>
+          <a:lstStyle/>
+          <a:p>
+            <a:pPr algn="ctr"/>
+            <a:r>
+              <a:rPr lang="es-ES" sz="2400" b="1" dirty="0">
+                <a:solidFill>
+                  <a:srgbClr val="FFFFFF"/>
+                </a:solidFill>
+              </a:rPr>
+              <a:t>F3</a:t>
+            </a:r>
+          </a:p>
+          <a:p>
+            <a:pPr algn="ctr"/>
+            <a:r>
+              <a:rPr lang="es-ES" sz="1050" dirty="0">
+                <a:solidFill>
+                  <a:srgbClr val="FFFFFF"/>
+                </a:solidFill>
+              </a:rPr>
+              <a:t>Viabilidad y riesgo</a:t>
+            </a:r>
+          </a:p>
+        </p:txBody>
+      </p:sp>
+      <p:sp>
+        <p:nvSpPr>
+          <p:cNvPr id="182" name="Texto 182"/>
+          <p:cNvSpPr txBox="1"/>
+          <p:nvPr/>
+        </p:nvSpPr>
+        <p:spPr>
+          <a:xfrm>
+            <a:off x="5701000" y="3900000"/>
+            <a:ext cx="800000" cy="300000"/>
+          </a:xfrm>
+          <a:prstGeom prst="rect">
+            <a:avLst/>
+          </a:prstGeom>
+          <a:noFill/>
+        </p:spPr>
+        <p:txBody>
+          <a:bodyPr wrap="square" anchor="t" lIns="45720" rIns="45720">
+            <a:noAutofit/>
+          </a:bodyPr>
+          <a:lstStyle/>
+          <a:p>
+            <a:pPr algn="ctr"/>
+            <a:r>
+              <a:rPr lang="es-ES" sz="1200" b="1" dirty="0">
+                <a:solidFill>
+                  <a:srgbClr val="990F3D"/>
+                </a:solidFill>
+              </a:rPr>
+              <a:t>G3</a:t>
+            </a:r>
+          </a:p>
+        </p:txBody>
+      </p:sp>
+      <p:sp>
+        <p:nvSpPr>
+          <p:cNvPr id="183" name="Caja 183"/>
+          <p:cNvSpPr/>
+          <p:nvPr/>
+        </p:nvSpPr>
+        <p:spPr>
+          <a:xfrm>
+            <a:off x="6161000" y="2350000"/>
+            <a:ext cx="1240000" cy="1500000"/>
+          </a:xfrm>
+          <a:prstGeom prst="roundRect">
+            <a:avLst>
+              <a:gd name="adj" fmla="val 6000"/>
+            </a:avLst>
+          </a:prstGeom>
+          <a:solidFill>
+            <a:srgbClr val="0D7680"/>
+          </a:solidFill>
+          <a:ln>
+            <a:noFill/>
+          </a:ln>
+        </p:spPr>
+        <p:txBody>
+          <a:bodyPr wrap="square" anchor="ctr" lIns="45720" rIns="45720">
+            <a:noAutofit/>
+          </a:bodyPr>
+          <a:lstStyle/>
+          <a:p>
+            <a:pPr algn="ctr"/>
+            <a:r>
+              <a:rPr lang="es-ES" sz="2400" b="1" dirty="0">
+                <a:solidFill>
+                  <a:srgbClr val="FFFFFF"/>
+                </a:solidFill>
+              </a:rPr>
+              <a:t>F4</a:t>
+            </a:r>
+          </a:p>
+          <a:p>
+            <a:pPr algn="ctr"/>
+            <a:r>
+              <a:rPr lang="es-ES" sz="1050" dirty="0">
+                <a:solidFill>
+                  <a:srgbClr val="FFFFFF"/>
+                </a:solidFill>
+              </a:rPr>
+              <a:t>Diseño de la solución</a:t>
+            </a:r>
+          </a:p>
+        </p:txBody>
+      </p:sp>
+      <p:sp>
+        <p:nvSpPr>
+          <p:cNvPr id="184" name="Texto 184"/>
+          <p:cNvSpPr txBox="1"/>
+          <p:nvPr/>
+        </p:nvSpPr>
+        <p:spPr>
+          <a:xfrm>
+            <a:off x="7071000" y="3900000"/>
+            <a:ext cx="800000" cy="300000"/>
+          </a:xfrm>
+          <a:prstGeom prst="rect">
+            <a:avLst/>
+          </a:prstGeom>
+          <a:noFill/>
+        </p:spPr>
+        <p:txBody>
+          <a:bodyPr wrap="square" anchor="t" lIns="45720" rIns="45720">
+            <a:noAutofit/>
+          </a:bodyPr>
+          <a:lstStyle/>
+          <a:p>
+            <a:pPr algn="ctr"/>
+            <a:r>
+              <a:rPr lang="es-ES" sz="1200" b="1" dirty="0">
+                <a:solidFill>
+                  <a:srgbClr val="990F3D"/>
+                </a:solidFill>
+              </a:rPr>
+              <a:t>G4</a:t>
+            </a:r>
+          </a:p>
+        </p:txBody>
+      </p:sp>
+      <p:sp>
+        <p:nvSpPr>
+          <p:cNvPr id="185" name="Caja 185"/>
+          <p:cNvSpPr/>
+          <p:nvPr/>
+        </p:nvSpPr>
+        <p:spPr>
+          <a:xfrm>
+            <a:off x="7531000" y="2350000"/>
+            <a:ext cx="1240000" cy="1500000"/>
+          </a:xfrm>
+          <a:prstGeom prst="roundRect">
+            <a:avLst>
+              <a:gd name="adj" fmla="val 6000"/>
+            </a:avLst>
+          </a:prstGeom>
+          <a:solidFill>
+            <a:srgbClr val="0D7680"/>
+          </a:solidFill>
+          <a:ln>
+            <a:noFill/>
+          </a:ln>
+        </p:spPr>
+        <p:txBody>
+          <a:bodyPr wrap="square" anchor="ctr" lIns="45720" rIns="45720">
+            <a:noAutofit/>
+          </a:bodyPr>
+          <a:lstStyle/>
+          <a:p>
+            <a:pPr algn="ctr"/>
+            <a:r>
+              <a:rPr lang="es-ES" sz="2400" b="1" dirty="0">
+                <a:solidFill>
+                  <a:srgbClr val="FFFFFF"/>
+                </a:solidFill>
+              </a:rPr>
+              <a:t>F5</a:t>
+            </a:r>
+          </a:p>
+          <a:p>
+            <a:pPr algn="ctr"/>
+            <a:r>
+              <a:rPr lang="es-ES" sz="1050" dirty="0">
+                <a:solidFill>
+                  <a:srgbClr val="FFFFFF"/>
+                </a:solidFill>
+              </a:rPr>
+              <a:t>Entrega y validación</a:t>
+            </a:r>
+          </a:p>
+        </p:txBody>
+      </p:sp>
+      <p:sp>
+        <p:nvSpPr>
+          <p:cNvPr id="186" name="Texto 186"/>
+          <p:cNvSpPr txBox="1"/>
+          <p:nvPr/>
+        </p:nvSpPr>
+        <p:spPr>
+          <a:xfrm>
+            <a:off x="8441000" y="3900000"/>
+            <a:ext cx="800000" cy="300000"/>
+          </a:xfrm>
+          <a:prstGeom prst="rect">
+            <a:avLst/>
+          </a:prstGeom>
+          <a:noFill/>
+        </p:spPr>
+        <p:txBody>
+          <a:bodyPr wrap="square" anchor="t" lIns="45720" rIns="45720">
+            <a:noAutofit/>
+          </a:bodyPr>
+          <a:lstStyle/>
+          <a:p>
+            <a:pPr algn="ctr"/>
+            <a:r>
+              <a:rPr lang="es-ES" sz="1200" b="1" dirty="0">
+                <a:solidFill>
+                  <a:srgbClr val="990F3D"/>
+                </a:solidFill>
+              </a:rPr>
+              <a:t>G5</a:t>
+            </a:r>
+          </a:p>
+        </p:txBody>
+      </p:sp>
+      <p:sp>
+        <p:nvSpPr>
+          <p:cNvPr id="187" name="Caja 187"/>
+          <p:cNvSpPr/>
+          <p:nvPr/>
+        </p:nvSpPr>
+        <p:spPr>
+          <a:xfrm>
+            <a:off x="8901000" y="2350000"/>
+            <a:ext cx="1240000" cy="1500000"/>
+          </a:xfrm>
+          <a:prstGeom prst="roundRect">
+            <a:avLst>
+              <a:gd name="adj" fmla="val 6000"/>
+            </a:avLst>
+          </a:prstGeom>
+          <a:solidFill>
+            <a:srgbClr val="0D7680"/>
+          </a:solidFill>
+          <a:ln>
+            <a:noFill/>
+          </a:ln>
+        </p:spPr>
+        <p:txBody>
+          <a:bodyPr wrap="square" anchor="ctr" lIns="45720" rIns="45720">
+            <a:noAutofit/>
+          </a:bodyPr>
+          <a:lstStyle/>
+          <a:p>
+            <a:pPr algn="ctr"/>
+            <a:r>
+              <a:rPr lang="es-ES" sz="2400" b="1" dirty="0">
+                <a:solidFill>
+                  <a:srgbClr val="FFFFFF"/>
+                </a:solidFill>
+              </a:rPr>
+              <a:t>F6</a:t>
+            </a:r>
+          </a:p>
+          <a:p>
+            <a:pPr algn="ctr"/>
+            <a:r>
+              <a:rPr lang="es-ES" sz="1050" dirty="0">
+                <a:solidFill>
+                  <a:srgbClr val="FFFFFF"/>
+                </a:solidFill>
+              </a:rPr>
+              <a:t>Operación y gobierno</a:t>
+            </a:r>
+          </a:p>
+        </p:txBody>
+      </p:sp>
+      <p:sp>
+        <p:nvSpPr>
+          <p:cNvPr id="188" name="Texto 188"/>
+          <p:cNvSpPr txBox="1"/>
+          <p:nvPr/>
+        </p:nvSpPr>
+        <p:spPr>
+          <a:xfrm>
+            <a:off x="9811000" y="3900000"/>
+            <a:ext cx="800000" cy="300000"/>
+          </a:xfrm>
+          <a:prstGeom prst="rect">
+            <a:avLst/>
+          </a:prstGeom>
+          <a:noFill/>
+        </p:spPr>
+        <p:txBody>
+          <a:bodyPr wrap="square" anchor="t" lIns="45720" rIns="45720">
+            <a:noAutofit/>
+          </a:bodyPr>
+          <a:lstStyle/>
+          <a:p>
+            <a:pPr algn="ctr"/>
+            <a:r>
+              <a:rPr lang="es-ES" sz="1200" b="1" dirty="0">
+                <a:solidFill>
+                  <a:srgbClr val="990F3D"/>
+                </a:solidFill>
+              </a:rPr>
+              <a:t>R6</a:t>
+            </a:r>
+          </a:p>
+        </p:txBody>
+      </p:sp>
+      <p:sp>
+        <p:nvSpPr>
+          <p:cNvPr id="189" name="Caja 189"/>
+          <p:cNvSpPr/>
+          <p:nvPr/>
+        </p:nvSpPr>
+        <p:spPr>
+          <a:xfrm>
+            <a:off x="10271000" y="2350000"/>
+            <a:ext cx="1240000" cy="1500000"/>
+          </a:xfrm>
+          <a:prstGeom prst="roundRect">
+            <a:avLst>
+              <a:gd name="adj" fmla="val 6000"/>
+            </a:avLst>
+          </a:prstGeom>
+          <a:solidFill>
+            <a:srgbClr val="C9A78D"/>
+          </a:solidFill>
+          <a:ln>
+            <a:noFill/>
+          </a:ln>
+        </p:spPr>
+        <p:txBody>
+          <a:bodyPr wrap="square" anchor="ctr" lIns="45720" rIns="45720">
+            <a:noAutofit/>
+          </a:bodyPr>
+          <a:lstStyle/>
+          <a:p>
+            <a:pPr algn="ctr"/>
+            <a:r>
+              <a:rPr lang="es-ES" sz="2400" b="1" dirty="0">
+                <a:solidFill>
+                  <a:srgbClr val="564D47"/>
+                </a:solidFill>
+              </a:rPr>
+              <a:t>F7</a:t>
+            </a:r>
+          </a:p>
+          <a:p>
+            <a:pPr algn="ctr"/>
+            <a:r>
+              <a:rPr lang="es-ES" sz="1050" dirty="0">
+                <a:solidFill>
+                  <a:srgbClr val="564D47"/>
+                </a:solidFill>
+              </a:rPr>
+              <a:t>Evolución o retirada</a:t>
+            </a:r>
+          </a:p>
+        </p:txBody>
+      </p:sp>
+      <p:sp>
+        <p:nvSpPr>
+          <p:cNvPr id="190" name="Texto 190"/>
+          <p:cNvSpPr txBox="1"/>
+          <p:nvPr/>
+        </p:nvSpPr>
+        <p:spPr>
+          <a:xfrm>
+            <a:off x="11181000" y="3900000"/>
+            <a:ext cx="800000" cy="300000"/>
+          </a:xfrm>
+          <a:prstGeom prst="rect">
+            <a:avLst/>
+          </a:prstGeom>
+          <a:noFill/>
+        </p:spPr>
+        <p:txBody>
+          <a:bodyPr wrap="square" anchor="t" lIns="45720" rIns="45720">
+            <a:noAutofit/>
+          </a:bodyPr>
+          <a:lstStyle/>
+          <a:p>
+            <a:pPr algn="ctr"/>
+            <a:r>
+              <a:rPr lang="es-ES" sz="1200" b="1" dirty="0">
+                <a:solidFill>
+                  <a:srgbClr val="990F3D"/>
+                </a:solidFill>
+              </a:rPr>
+              <a:t>G7</a:t>
+            </a:r>
+          </a:p>
+        </p:txBody>
+      </p:sp>
+      <p:sp>
+        <p:nvSpPr>
+          <p:cNvPr id="191" name="Texto 191"/>
+          <p:cNvSpPr txBox="1"/>
+          <p:nvPr/>
+        </p:nvSpPr>
+        <p:spPr>
+          <a:xfrm>
+            <a:off x="609600" y="4430000"/>
+            <a:ext cx="10972800" cy="600000"/>
+          </a:xfrm>
+          <a:prstGeom prst="rect">
+            <a:avLst/>
+          </a:prstGeom>
+          <a:noFill/>
+        </p:spPr>
+        <p:txBody>
+          <a:bodyPr wrap="square" anchor="t" lIns="45720" rIns="45720">
+            <a:noAutofit/>
+          </a:bodyPr>
+          <a:lstStyle/>
+          <a:p>
+            <a:pPr algn="ctr"/>
+            <a:r>
+              <a:rPr lang="es-ES" sz="2200" b="1" dirty="0">
+                <a:solidFill>
+                  <a:srgbClr val="0D7680"/>
+                </a:solidFill>
+              </a:rPr>
+              <a:t>EN USO · cada R6 confirma que sigue aportando valor bajo control</a:t>
             </a:r>
           </a:p>
         </p:txBody>
@@ -4198,7 +4276,7 @@
     <p:bg>
       <p:bgPr>
         <a:solidFill>
-          <a:srgbClr val="1A1817"/>
+          <a:srgbClr val="FBE2CD"/>
         </a:solidFill>
         <a:effectLst/>
       </p:bgPr>
@@ -4219,13 +4297,13 @@
       </p:grpSpPr>
       <p:sp>
         <p:nvSpPr>
-          <p:cNvPr id="193" name="Marca"/>
+          <p:cNvPr id="197" name="Marca"/>
           <p:cNvSpPr/>
           <p:nvPr/>
         </p:nvSpPr>
         <p:spPr>
           <a:xfrm>
-            <a:off x="609600" y="2400000"/>
+            <a:off x="609600" y="365760"/>
             <a:ext cx="182880" cy="182880"/>
           </a:xfrm>
           <a:prstGeom prst="rect">
@@ -4243,48 +4321,48 @@
       </p:sp>
       <p:sp>
         <p:nvSpPr>
-          <p:cNvPr id="194" name="Texto 194"/>
-          <p:cNvSpPr txBox="1"/>
-          <p:nvPr/>
-        </p:nvSpPr>
-        <p:spPr>
-          <a:xfrm>
-            <a:off x="838200" y="2320000"/>
-            <a:ext cx="9000000" cy="400000"/>
-          </a:xfrm>
-          <a:prstGeom prst="rect">
-            <a:avLst/>
-          </a:prstGeom>
-          <a:noFill/>
-        </p:spPr>
-        <p:txBody>
-          <a:bodyPr wrap="square" anchor="t" lIns="45720" rIns="45720">
+          <p:cNvPr id="198" name="Texto 198"/>
+          <p:cNvSpPr txBox="1"/>
+          <p:nvPr/>
+        </p:nvSpPr>
+        <p:spPr>
+          <a:xfrm>
+            <a:off x="838200" y="300000"/>
+            <a:ext cx="10500000" cy="320000"/>
+          </a:xfrm>
+          <a:prstGeom prst="rect">
+            <a:avLst/>
+          </a:prstGeom>
+          <a:noFill/>
+        </p:spPr>
+        <p:txBody>
+          <a:bodyPr wrap="square" anchor="ctr" lIns="45720" rIns="45720">
             <a:noAutofit/>
           </a:bodyPr>
           <a:lstStyle/>
           <a:p>
             <a:pPr algn="l"/>
             <a:r>
-              <a:rPr lang="es-ES" sz="1600" b="1" dirty="0">
-                <a:solidFill>
-                  <a:srgbClr val="F3CFB2"/>
-                </a:solidFill>
-              </a:rPr>
-              <a:t>PARA EL CONSULTOR</a:t>
-            </a:r>
-          </a:p>
-        </p:txBody>
-      </p:sp>
-      <p:sp>
-        <p:nvSpPr>
-          <p:cNvPr id="195" name="Texto 195"/>
-          <p:cNvSpPr txBox="1"/>
-          <p:nvPr/>
-        </p:nvSpPr>
-        <p:spPr>
-          <a:xfrm>
-            <a:off x="609600" y="2850000"/>
-            <a:ext cx="10972800" cy="1400000"/>
+              <a:rPr lang="es-ES" sz="1400" b="1" dirty="0">
+                <a:solidFill>
+                  <a:srgbClr val="1A1817"/>
+                </a:solidFill>
+              </a:rPr>
+              <a:t>SEVEN-G · CURSO · CONSULTOR · ACOMPAÑAR A CLIENTES</a:t>
+            </a:r>
+          </a:p>
+        </p:txBody>
+      </p:sp>
+      <p:sp>
+        <p:nvSpPr>
+          <p:cNvPr id="199" name="Texto 199"/>
+          <p:cNvSpPr txBox="1"/>
+          <p:nvPr/>
+        </p:nvSpPr>
+        <p:spPr>
+          <a:xfrm>
+            <a:off x="609600" y="700000"/>
+            <a:ext cx="10972800" cy="650000"/>
           </a:xfrm>
           <a:prstGeom prst="rect">
             <a:avLst/>
@@ -4299,12 +4377,12 @@
           <a:p>
             <a:pPr algn="l"/>
             <a:r>
-              <a:rPr lang="es-ES" sz="4000" b="1" dirty="0">
-                <a:solidFill>
-                  <a:srgbClr val="FBE2CD"/>
-                </a:solidFill>
-              </a:rPr>
-              <a:t>Aplicar SEVEN-G en los clientes, con su propia firma</a:t>
+              <a:rPr lang="es-ES" sz="2700" b="1" dirty="0">
+                <a:solidFill>
+                  <a:srgbClr val="990F3D"/>
+                </a:solidFill>
+              </a:rPr>
+              <a:t>Cómo se mide el valor</a:t>
             </a:r>
           </a:p>
         </p:txBody>
@@ -4317,28 +4395,117 @@
         </p:nvSpPr>
         <p:spPr>
           <a:xfrm>
-            <a:off x="609600" y="4400000"/>
-            <a:ext cx="10500000" cy="900000"/>
-          </a:xfrm>
-          <a:prstGeom prst="rect">
-            <a:avLst/>
-          </a:prstGeom>
-          <a:noFill/>
-        </p:spPr>
-        <p:txBody>
-          <a:bodyPr wrap="square" anchor="t" lIns="45720" rIns="45720">
-            <a:noAutofit/>
-          </a:bodyPr>
-          <a:lstStyle/>
-          <a:p>
-            <a:pPr algn="l"/>
-            <a:r>
-              <a:rPr lang="es-ES" sz="1700" dirty="0">
-                <a:solidFill>
-                  <a:srgbClr val="F3CFB2"/>
-                </a:solidFill>
-              </a:rPr>
-              <a:t>La licencia lo permite, también en servicios de pago y sin contratar al autor. A cambio pide fidelidad, independencia y honestidad.</a:t>
+            <a:off x="609600" y="1750000"/>
+            <a:ext cx="10972800" cy="4400000"/>
+          </a:xfrm>
+          <a:prstGeom prst="rect">
+            <a:avLst/>
+          </a:prstGeom>
+          <a:noFill/>
+        </p:spPr>
+        <p:txBody>
+          <a:bodyPr wrap="square" anchor="t" lIns="45720" rIns="45720">
+            <a:noAutofit/>
+          </a:bodyPr>
+          <a:lstStyle/>
+          <a:p>
+            <a:pPr marL="285750" indent="-285750">
+              <a:spcAft>
+                <a:spcPts val="400"/>
+              </a:spcAft>
+              <a:buClr>
+                <a:srgbClr val="990F3D"/>
+              </a:buClr>
+              <a:buFont typeface="Arial"/>
+              <a:buChar char="•"/>
+            </a:pPr>
+            <a:r>
+              <a:rPr lang="es-ES" sz="1800" dirty="0">
+                <a:solidFill>
+                  <a:srgbClr val="2F2B28"/>
+                </a:solidFill>
+              </a:rPr>
+              <a:t>Todo importe lleva fórmula y estado: validado (control de gestión), declarado (el equipo) o estimado.</a:t>
+            </a:r>
+          </a:p>
+          <a:p>
+            <a:pPr marL="285750" indent="-285750">
+              <a:spcAft>
+                <a:spcPts val="400"/>
+              </a:spcAft>
+              <a:buClr>
+                <a:srgbClr val="990F3D"/>
+              </a:buClr>
+              <a:buFont typeface="Arial"/>
+              <a:buChar char="•"/>
+            </a:pPr>
+            <a:r>
+              <a:rPr lang="es-ES" sz="1800" dirty="0">
+                <a:solidFill>
+                  <a:srgbClr val="2F2B28"/>
+                </a:solidFill>
+              </a:rPr>
+              <a:t>Las horas liberadas no son ahorro hasta que se materializan: baja un coste o se reasignan a una actividad con valor.</a:t>
+            </a:r>
+          </a:p>
+          <a:p>
+            <a:pPr marL="285750" indent="-285750">
+              <a:spcAft>
+                <a:spcPts val="400"/>
+              </a:spcAft>
+              <a:buClr>
+                <a:srgbClr val="990F3D"/>
+              </a:buClr>
+              <a:buFont typeface="Arial"/>
+              <a:buChar char="•"/>
+            </a:pPr>
+            <a:r>
+              <a:rPr lang="es-ES" sz="1800" dirty="0">
+                <a:solidFill>
+                  <a:srgbClr val="2F2B28"/>
+                </a:solidFill>
+              </a:rPr>
+              <a:t>El coste es completo: construcción, consumo, operación, supervisión humana y retirada.</a:t>
+            </a:r>
+          </a:p>
+          <a:p>
+            <a:pPr marL="285750" indent="-285750">
+              <a:spcAft>
+                <a:spcPts val="400"/>
+              </a:spcAft>
+              <a:buClr>
+                <a:srgbClr val="990F3D"/>
+              </a:buClr>
+              <a:buFont typeface="Arial"/>
+              <a:buChar char="•"/>
+            </a:pPr>
+            <a:r>
+              <a:rPr lang="es-ES" sz="1800" dirty="0">
+                <a:solidFill>
+                  <a:srgbClr val="2F2B28"/>
+                </a:solidFill>
+              </a:rPr>
+              <a:t>El índice de transformación usa ocho señales de evidencia para separar transformar de solo eficientar.</a:t>
+            </a:r>
+          </a:p>
+          <a:p>
+            <a:pPr marL="285750" indent="-285750">
+              <a:spcAft>
+                <a:spcPts val="400"/>
+              </a:spcAft>
+              <a:buClr>
+                <a:srgbClr val="990F3D"/>
+              </a:buClr>
+              <a:buFont typeface="Arial"/>
+              <a:buChar char="•"/>
+            </a:pPr>
+            <a:r>
+              <a:rPr lang="es-ES" sz="1800" dirty="0">
+                <a:solidFill>
+                  <a:srgbClr val="2F2B28"/>
+                </a:solidFill>
+              </a:rPr>
+              <a:t>Diez reglas de medición (documento 40). Ninguna cifra entra en el neto de la cartera sin su estado.</a:t>
             </a:r>
           </a:p>
         </p:txBody>
@@ -4639,7 +4806,7 @@
     <p:bg>
       <p:bgPr>
         <a:solidFill>
-          <a:srgbClr val="FBE2CD"/>
+          <a:srgbClr val="1A1817"/>
         </a:solidFill>
         <a:effectLst/>
       </p:bgPr>
@@ -4660,13 +4827,13 @@
       </p:grpSpPr>
       <p:sp>
         <p:nvSpPr>
-          <p:cNvPr id="199" name="Marca"/>
+          <p:cNvPr id="200" name="Marca"/>
           <p:cNvSpPr/>
           <p:nvPr/>
         </p:nvSpPr>
         <p:spPr>
           <a:xfrm>
-            <a:off x="609600" y="365760"/>
+            <a:off x="609600" y="2400000"/>
             <a:ext cx="182880" cy="182880"/>
           </a:xfrm>
           <a:prstGeom prst="rect">
@@ -4684,48 +4851,48 @@
       </p:sp>
       <p:sp>
         <p:nvSpPr>
-          <p:cNvPr id="200" name="Texto 200"/>
-          <p:cNvSpPr txBox="1"/>
-          <p:nvPr/>
-        </p:nvSpPr>
-        <p:spPr>
-          <a:xfrm>
-            <a:off x="838200" y="300000"/>
-            <a:ext cx="10500000" cy="320000"/>
-          </a:xfrm>
-          <a:prstGeom prst="rect">
-            <a:avLst/>
-          </a:prstGeom>
-          <a:noFill/>
-        </p:spPr>
-        <p:txBody>
-          <a:bodyPr wrap="square" anchor="ctr" lIns="45720" rIns="45720">
+          <p:cNvPr id="201" name="Texto 201"/>
+          <p:cNvSpPr txBox="1"/>
+          <p:nvPr/>
+        </p:nvSpPr>
+        <p:spPr>
+          <a:xfrm>
+            <a:off x="838200" y="2320000"/>
+            <a:ext cx="9000000" cy="400000"/>
+          </a:xfrm>
+          <a:prstGeom prst="rect">
+            <a:avLst/>
+          </a:prstGeom>
+          <a:noFill/>
+        </p:spPr>
+        <p:txBody>
+          <a:bodyPr wrap="square" anchor="t" lIns="45720" rIns="45720">
             <a:noAutofit/>
           </a:bodyPr>
           <a:lstStyle/>
           <a:p>
             <a:pPr algn="l"/>
             <a:r>
-              <a:rPr lang="es-ES" sz="1400" b="1" dirty="0">
-                <a:solidFill>
-                  <a:srgbClr val="1A1817"/>
-                </a:solidFill>
-              </a:rPr>
-              <a:t>SEVEN-G · CURSO · CONSULTOR · ACOMPAÑAR A CLIENTES</a:t>
-            </a:r>
-          </a:p>
-        </p:txBody>
-      </p:sp>
-      <p:sp>
-        <p:nvSpPr>
-          <p:cNvPr id="201" name="Texto 201"/>
-          <p:cNvSpPr txBox="1"/>
-          <p:nvPr/>
-        </p:nvSpPr>
-        <p:spPr>
-          <a:xfrm>
-            <a:off x="609600" y="700000"/>
-            <a:ext cx="10972800" cy="650000"/>
+              <a:rPr lang="es-ES" sz="1600" b="1" dirty="0">
+                <a:solidFill>
+                  <a:srgbClr val="F3CFB2"/>
+                </a:solidFill>
+              </a:rPr>
+              <a:t>PARA EL CONSULTOR</a:t>
+            </a:r>
+          </a:p>
+        </p:txBody>
+      </p:sp>
+      <p:sp>
+        <p:nvSpPr>
+          <p:cNvPr id="202" name="Texto 202"/>
+          <p:cNvSpPr txBox="1"/>
+          <p:nvPr/>
+        </p:nvSpPr>
+        <p:spPr>
+          <a:xfrm>
+            <a:off x="609600" y="2850000"/>
+            <a:ext cx="10972800" cy="1400000"/>
           </a:xfrm>
           <a:prstGeom prst="rect">
             <a:avLst/>
@@ -4740,149 +4907,26 @@
           <a:p>
             <a:pPr algn="l"/>
             <a:r>
-              <a:rPr lang="es-ES" sz="2700" b="1" dirty="0">
-                <a:solidFill>
-                  <a:srgbClr val="990F3D"/>
-                </a:solidFill>
-              </a:rPr>
-              <a:t>Qué le permite la licencia y qué asume usted</a:t>
-            </a:r>
-          </a:p>
-        </p:txBody>
-      </p:sp>
-      <p:sp>
-        <p:nvSpPr>
-          <p:cNvPr id="197" name="Texto 197"/>
-          <p:cNvSpPr txBox="1"/>
-          <p:nvPr/>
-        </p:nvSpPr>
-        <p:spPr>
-          <a:xfrm>
-            <a:off x="609600" y="1750000"/>
-            <a:ext cx="10972800" cy="4400000"/>
-          </a:xfrm>
-          <a:prstGeom prst="rect">
-            <a:avLst/>
-          </a:prstGeom>
-          <a:noFill/>
-        </p:spPr>
-        <p:txBody>
-          <a:bodyPr wrap="square" anchor="t" lIns="45720" rIns="45720">
-            <a:noAutofit/>
-          </a:bodyPr>
-          <a:lstStyle/>
-          <a:p>
-            <a:pPr marL="285750" indent="-285750">
-              <a:spcAft>
-                <a:spcPts val="400"/>
-              </a:spcAft>
-              <a:buClr>
-                <a:srgbClr val="990F3D"/>
-              </a:buClr>
-              <a:buFont typeface="Arial"/>
-              <a:buChar char="•"/>
-            </a:pPr>
-            <a:r>
-              <a:rPr lang="es-ES" sz="1800" dirty="0">
-                <a:solidFill>
-                  <a:srgbClr val="2F2B28"/>
-                </a:solidFill>
-              </a:rPr>
-              <a:t>Puede usar, adaptar y aplicar el marco en servicios remunerados sin pedir permiso: basta reconocer la autoría, indicar los cambios y no sugerir respaldo del autor.</a:t>
-            </a:r>
-          </a:p>
-          <a:p>
-            <a:pPr marL="285750" indent="-285750">
-              <a:spcAft>
-                <a:spcPts val="400"/>
-              </a:spcAft>
-              <a:buClr>
-                <a:srgbClr val="990F3D"/>
-              </a:buClr>
-              <a:buFont typeface="Arial"/>
-              <a:buChar char="•"/>
-            </a:pPr>
-            <a:r>
-              <a:rPr lang="es-ES" sz="1800" dirty="0">
-                <a:solidFill>
-                  <a:srgbClr val="2F2B28"/>
-                </a:solidFill>
-              </a:rPr>
-              <a:t>Responde de su servicio ante su cliente: SEVEN-G es un marco de referencia, no una garantía de resultado.</a:t>
-            </a:r>
-          </a:p>
-          <a:p>
-            <a:pPr marL="285750" indent="-285750">
-              <a:spcAft>
-                <a:spcPts val="400"/>
-              </a:spcAft>
-              <a:buClr>
-                <a:srgbClr val="990F3D"/>
-              </a:buClr>
-              <a:buFont typeface="Arial"/>
-              <a:buChar char="•"/>
-            </a:pPr>
-            <a:r>
-              <a:rPr lang="es-ES" sz="1800" dirty="0">
-                <a:solidFill>
-                  <a:srgbClr val="2F2B28"/>
-                </a:solidFill>
-              </a:rPr>
-              <a:t>Declara qué versión aplica y qué ha adaptado, en cada entregable.</a:t>
-            </a:r>
-          </a:p>
-          <a:p>
-            <a:pPr marL="285750" indent="-285750">
-              <a:spcAft>
-                <a:spcPts val="400"/>
-              </a:spcAft>
-              <a:buClr>
-                <a:srgbClr val="990F3D"/>
-              </a:buClr>
-              <a:buFont typeface="Arial"/>
-              <a:buChar char="•"/>
-            </a:pPr>
-            <a:r>
-              <a:rPr lang="es-ES" sz="1800" dirty="0">
-                <a:solidFill>
-                  <a:srgbClr val="2F2B28"/>
-                </a:solidFill>
-              </a:rPr>
-              <a:t>La información del cliente no se usa en otros clientes ni en ejemplos, ni siquiera anonimizada, sin autorización escrita.</a:t>
-            </a:r>
-          </a:p>
-          <a:p>
-            <a:pPr marL="285750" indent="-285750">
-              <a:spcAft>
-                <a:spcPts val="400"/>
-              </a:spcAft>
-              <a:buClr>
-                <a:srgbClr val="990F3D"/>
-              </a:buClr>
-              <a:buFont typeface="Arial"/>
-              <a:buChar char="•"/>
-            </a:pPr>
-            <a:r>
-              <a:rPr lang="es-ES" sz="1800" dirty="0">
-                <a:solidFill>
-                  <a:srgbClr val="2F2B28"/>
-                </a:solidFill>
-              </a:rPr>
-              <a:t>La clasificación regulatoria y las cuestiones jurídicas requieren criterio jurídico cualificado; traslade el aviso legal a sus entregables.</a:t>
-            </a:r>
-          </a:p>
-        </p:txBody>
-      </p:sp>
-      <p:sp>
-        <p:nvSpPr>
-          <p:cNvPr id="198" name="Texto 198"/>
-          <p:cNvSpPr txBox="1"/>
-          <p:nvPr/>
-        </p:nvSpPr>
-        <p:spPr>
-          <a:xfrm>
-            <a:off x="609600" y="6250000"/>
-            <a:ext cx="10972800" cy="450000"/>
+              <a:rPr lang="es-ES" sz="4000" b="1" dirty="0">
+                <a:solidFill>
+                  <a:srgbClr val="FBE2CD"/>
+                </a:solidFill>
+              </a:rPr>
+              <a:t>Aplicar SEVEN-G en los clientes, con su propia firma</a:t>
+            </a:r>
+          </a:p>
+        </p:txBody>
+      </p:sp>
+      <p:sp>
+        <p:nvSpPr>
+          <p:cNvPr id="203" name="Texto 203"/>
+          <p:cNvSpPr txBox="1"/>
+          <p:nvPr/>
+        </p:nvSpPr>
+        <p:spPr>
+          <a:xfrm>
+            <a:off x="609600" y="4400000"/>
+            <a:ext cx="10500000" cy="900000"/>
           </a:xfrm>
           <a:prstGeom prst="rect">
             <a:avLst/>
@@ -4897,12 +4941,12 @@
           <a:p>
             <a:pPr algn="l"/>
             <a:r>
-              <a:rPr lang="es-ES" sz="1400" b="1" dirty="0">
-                <a:solidFill>
-                  <a:srgbClr val="0F5499"/>
-                </a:solidFill>
-              </a:rPr>
-              <a:t>Documento 91, sección 2, y documento 93.</a:t>
+              <a:rPr lang="es-ES" sz="1700" dirty="0">
+                <a:solidFill>
+                  <a:srgbClr val="F3CFB2"/>
+                </a:solidFill>
+              </a:rPr>
+              <a:t>La licencia lo permite, también en servicios de pago y sin contratar al autor. A cambio pide fidelidad, independencia y honestidad.</a:t>
             </a:r>
           </a:p>
         </p:txBody>
@@ -4942,7 +4986,7 @@
       </p:grpSpPr>
       <p:sp>
         <p:nvSpPr>
-          <p:cNvPr id="204" name="Marca"/>
+          <p:cNvPr id="206" name="Marca"/>
           <p:cNvSpPr/>
           <p:nvPr/>
         </p:nvSpPr>
@@ -4966,7 +5010,7 @@
       </p:sp>
       <p:sp>
         <p:nvSpPr>
-          <p:cNvPr id="205" name="Texto 205"/>
+          <p:cNvPr id="207" name="Texto 207"/>
           <p:cNvSpPr txBox="1"/>
           <p:nvPr/>
         </p:nvSpPr>
@@ -5000,7 +5044,7 @@
       </p:sp>
       <p:sp>
         <p:nvSpPr>
-          <p:cNvPr id="206" name="Texto 206"/>
+          <p:cNvPr id="208" name="Texto 208"/>
           <p:cNvSpPr txBox="1"/>
           <p:nvPr/>
         </p:nvSpPr>
@@ -5027,14 +5071,14 @@
                   <a:srgbClr val="990F3D"/>
                 </a:solidFill>
               </a:rPr>
-              <a:t>Seis reglas que no puede omitir sin declararlo</a:t>
-            </a:r>
-          </a:p>
-        </p:txBody>
-      </p:sp>
-      <p:sp>
-        <p:nvSpPr>
-          <p:cNvPr id="202" name="Texto 202"/>
+              <a:t>Qué le permite la licencia y qué asume usted</a:t>
+            </a:r>
+          </a:p>
+        </p:txBody>
+      </p:sp>
+      <p:sp>
+        <p:nvSpPr>
+          <p:cNvPr id="204" name="Texto 204"/>
           <p:cNvSpPr txBox="1"/>
           <p:nvPr/>
         </p:nvSpPr>
@@ -5065,12 +5109,12 @@
               <a:buChar char="•"/>
             </a:pPr>
             <a:r>
-              <a:rPr lang="es-ES" sz="1700" dirty="0">
-                <a:solidFill>
-                  <a:srgbClr val="2F2B28"/>
-                </a:solidFill>
-              </a:rPr>
-              <a:t>Separación de funciones: quien construye no controla y nadie se aprueba a sí mismo.</a:t>
+              <a:rPr lang="es-ES" sz="1800" dirty="0">
+                <a:solidFill>
+                  <a:srgbClr val="2F2B28"/>
+                </a:solidFill>
+              </a:rPr>
+              <a:t>Puede usar, adaptar y aplicar el marco en servicios remunerados sin pedir permiso: basta reconocer la autoría, indicar los cambios y no sugerir respaldo del autor.</a:t>
             </a:r>
           </a:p>
           <a:p>
@@ -5085,12 +5129,12 @@
               <a:buChar char="•"/>
             </a:pPr>
             <a:r>
-              <a:rPr lang="es-ES" sz="1700" dirty="0">
-                <a:solidFill>
-                  <a:srgbClr val="2F2B28"/>
-                </a:solidFill>
-              </a:rPr>
-              <a:t>Validación dual en las puertas y posibilidad real de parar.</a:t>
+              <a:rPr lang="es-ES" sz="1800" dirty="0">
+                <a:solidFill>
+                  <a:srgbClr val="2F2B28"/>
+                </a:solidFill>
+              </a:rPr>
+              <a:t>Responde de su servicio ante su cliente: SEVEN-G es un marco de referencia, no una garantía de resultado.</a:t>
             </a:r>
           </a:p>
           <a:p>
@@ -5105,12 +5149,12 @@
               <a:buChar char="•"/>
             </a:pPr>
             <a:r>
-              <a:rPr lang="es-ES" sz="1700" dirty="0">
-                <a:solidFill>
-                  <a:srgbClr val="2F2B28"/>
-                </a:solidFill>
-              </a:rPr>
-              <a:t>Las diez reglas de medición: estado de cada importe, y la capacidad liberada no suma hasta materializarse.</a:t>
+              <a:rPr lang="es-ES" sz="1800" dirty="0">
+                <a:solidFill>
+                  <a:srgbClr val="2F2B28"/>
+                </a:solidFill>
+              </a:rPr>
+              <a:t>Declara qué versión aplica y qué ha adaptado, en cada entregable.</a:t>
             </a:r>
           </a:p>
           <a:p>
@@ -5125,12 +5169,12 @@
               <a:buChar char="•"/>
             </a:pPr>
             <a:r>
-              <a:rPr lang="es-ES" sz="1700" dirty="0">
-                <a:solidFill>
-                  <a:srgbClr val="2F2B28"/>
-                </a:solidFill>
-              </a:rPr>
-              <a:t>Clasificación de la ambición con las cinco preguntas.</a:t>
+              <a:rPr lang="es-ES" sz="1800" dirty="0">
+                <a:solidFill>
+                  <a:srgbClr val="2F2B28"/>
+                </a:solidFill>
+              </a:rPr>
+              <a:t>La información del cliente no se usa en otros clientes ni en ejemplos, ni siquiera anonimizada, sin autorización escrita.</a:t>
             </a:r>
           </a:p>
           <a:p>
@@ -5145,39 +5189,19 @@
               <a:buChar char="•"/>
             </a:pPr>
             <a:r>
-              <a:rPr lang="es-ES" sz="1700" dirty="0">
-                <a:solidFill>
-                  <a:srgbClr val="2F2B28"/>
-                </a:solidFill>
-              </a:rPr>
-              <a:t>Madurez basada en evidencia observable, no en autoevaluación.</a:t>
-            </a:r>
-          </a:p>
-          <a:p>
-            <a:pPr marL="285750" indent="-285750">
-              <a:spcAft>
-                <a:spcPts val="400"/>
-              </a:spcAft>
-              <a:buClr>
-                <a:srgbClr val="990F3D"/>
-              </a:buClr>
-              <a:buFont typeface="Arial"/>
-              <a:buChar char="•"/>
-            </a:pPr>
-            <a:r>
-              <a:rPr lang="es-ES" sz="1700" dirty="0">
-                <a:solidFill>
-                  <a:srgbClr val="2F2B28"/>
-                </a:solidFill>
-              </a:rPr>
-              <a:t>Registro de recomendaciones con identificadores persistentes y valoración independiente.</a:t>
-            </a:r>
-          </a:p>
-        </p:txBody>
-      </p:sp>
-      <p:sp>
-        <p:nvSpPr>
-          <p:cNvPr id="203" name="Texto 203"/>
+              <a:rPr lang="es-ES" sz="1800" dirty="0">
+                <a:solidFill>
+                  <a:srgbClr val="2F2B28"/>
+                </a:solidFill>
+              </a:rPr>
+              <a:t>La clasificación regulatoria y las cuestiones jurídicas requieren criterio jurídico cualificado; traslade el aviso legal a sus entregables.</a:t>
+            </a:r>
+          </a:p>
+        </p:txBody>
+      </p:sp>
+      <p:sp>
+        <p:nvSpPr>
+          <p:cNvPr id="205" name="Texto 205"/>
           <p:cNvSpPr txBox="1"/>
           <p:nvPr/>
         </p:nvSpPr>
@@ -5204,7 +5228,7 @@
                   <a:srgbClr val="0F5499"/>
                 </a:solidFill>
               </a:rPr>
-              <a:t>Si omite alguna, su servicio puede inspirarse en SEVEN-G, pero no presentarse como aplicación de SEVEN-G.</a:t>
+              <a:t>Documento 91, sección 2, y documento 93.</a:t>
             </a:r>
           </a:p>
         </p:txBody>
@@ -5244,7 +5268,7 @@
       </p:grpSpPr>
       <p:sp>
         <p:nvSpPr>
-          <p:cNvPr id="223" name="Marca"/>
+          <p:cNvPr id="211" name="Marca"/>
           <p:cNvSpPr/>
           <p:nvPr/>
         </p:nvSpPr>
@@ -5268,7 +5292,7 @@
       </p:sp>
       <p:sp>
         <p:nvSpPr>
-          <p:cNvPr id="224" name="Texto 224"/>
+          <p:cNvPr id="212" name="Texto 212"/>
           <p:cNvSpPr txBox="1"/>
           <p:nvPr/>
         </p:nvSpPr>
@@ -5302,7 +5326,7 @@
       </p:sp>
       <p:sp>
         <p:nvSpPr>
-          <p:cNvPr id="225" name="Texto 225"/>
+          <p:cNvPr id="213" name="Texto 213"/>
           <p:cNvSpPr txBox="1"/>
           <p:nvPr/>
         </p:nvSpPr>
@@ -5329,20 +5353,163 @@
                   <a:srgbClr val="990F3D"/>
                 </a:solidFill>
               </a:rPr>
-              <a:t>Cinco modelos de acompañamiento</a:t>
-            </a:r>
-          </a:p>
-        </p:txBody>
-      </p:sp>
-      <p:sp>
-        <p:nvSpPr>
-          <p:cNvPr id="226" name="Texto 226"/>
-          <p:cNvSpPr txBox="1"/>
-          <p:nvPr/>
-        </p:nvSpPr>
-        <p:spPr>
-          <a:xfrm>
-            <a:off x="609600" y="1330000"/>
+              <a:t>Seis reglas que no puede omitir sin declararlo</a:t>
+            </a:r>
+          </a:p>
+        </p:txBody>
+      </p:sp>
+      <p:sp>
+        <p:nvSpPr>
+          <p:cNvPr id="209" name="Texto 209"/>
+          <p:cNvSpPr txBox="1"/>
+          <p:nvPr/>
+        </p:nvSpPr>
+        <p:spPr>
+          <a:xfrm>
+            <a:off x="609600" y="1750000"/>
+            <a:ext cx="10972800" cy="4400000"/>
+          </a:xfrm>
+          <a:prstGeom prst="rect">
+            <a:avLst/>
+          </a:prstGeom>
+          <a:noFill/>
+        </p:spPr>
+        <p:txBody>
+          <a:bodyPr wrap="square" anchor="t" lIns="45720" rIns="45720">
+            <a:noAutofit/>
+          </a:bodyPr>
+          <a:lstStyle/>
+          <a:p>
+            <a:pPr marL="285750" indent="-285750">
+              <a:spcAft>
+                <a:spcPts val="400"/>
+              </a:spcAft>
+              <a:buClr>
+                <a:srgbClr val="990F3D"/>
+              </a:buClr>
+              <a:buFont typeface="Arial"/>
+              <a:buChar char="•"/>
+            </a:pPr>
+            <a:r>
+              <a:rPr lang="es-ES" sz="1700" dirty="0">
+                <a:solidFill>
+                  <a:srgbClr val="2F2B28"/>
+                </a:solidFill>
+              </a:rPr>
+              <a:t>Separación de funciones: quien construye no controla y nadie se aprueba a sí mismo.</a:t>
+            </a:r>
+          </a:p>
+          <a:p>
+            <a:pPr marL="285750" indent="-285750">
+              <a:spcAft>
+                <a:spcPts val="400"/>
+              </a:spcAft>
+              <a:buClr>
+                <a:srgbClr val="990F3D"/>
+              </a:buClr>
+              <a:buFont typeface="Arial"/>
+              <a:buChar char="•"/>
+            </a:pPr>
+            <a:r>
+              <a:rPr lang="es-ES" sz="1700" dirty="0">
+                <a:solidFill>
+                  <a:srgbClr val="2F2B28"/>
+                </a:solidFill>
+              </a:rPr>
+              <a:t>Validación dual en las puertas y posibilidad real de parar.</a:t>
+            </a:r>
+          </a:p>
+          <a:p>
+            <a:pPr marL="285750" indent="-285750">
+              <a:spcAft>
+                <a:spcPts val="400"/>
+              </a:spcAft>
+              <a:buClr>
+                <a:srgbClr val="990F3D"/>
+              </a:buClr>
+              <a:buFont typeface="Arial"/>
+              <a:buChar char="•"/>
+            </a:pPr>
+            <a:r>
+              <a:rPr lang="es-ES" sz="1700" dirty="0">
+                <a:solidFill>
+                  <a:srgbClr val="2F2B28"/>
+                </a:solidFill>
+              </a:rPr>
+              <a:t>Las diez reglas de medición: estado de cada importe, y la capacidad liberada no suma hasta materializarse.</a:t>
+            </a:r>
+          </a:p>
+          <a:p>
+            <a:pPr marL="285750" indent="-285750">
+              <a:spcAft>
+                <a:spcPts val="400"/>
+              </a:spcAft>
+              <a:buClr>
+                <a:srgbClr val="990F3D"/>
+              </a:buClr>
+              <a:buFont typeface="Arial"/>
+              <a:buChar char="•"/>
+            </a:pPr>
+            <a:r>
+              <a:rPr lang="es-ES" sz="1700" dirty="0">
+                <a:solidFill>
+                  <a:srgbClr val="2F2B28"/>
+                </a:solidFill>
+              </a:rPr>
+              <a:t>Clasificación de la ambición con las cinco preguntas.</a:t>
+            </a:r>
+          </a:p>
+          <a:p>
+            <a:pPr marL="285750" indent="-285750">
+              <a:spcAft>
+                <a:spcPts val="400"/>
+              </a:spcAft>
+              <a:buClr>
+                <a:srgbClr val="990F3D"/>
+              </a:buClr>
+              <a:buFont typeface="Arial"/>
+              <a:buChar char="•"/>
+            </a:pPr>
+            <a:r>
+              <a:rPr lang="es-ES" sz="1700" dirty="0">
+                <a:solidFill>
+                  <a:srgbClr val="2F2B28"/>
+                </a:solidFill>
+              </a:rPr>
+              <a:t>Madurez basada en evidencia observable, no en autoevaluación.</a:t>
+            </a:r>
+          </a:p>
+          <a:p>
+            <a:pPr marL="285750" indent="-285750">
+              <a:spcAft>
+                <a:spcPts val="400"/>
+              </a:spcAft>
+              <a:buClr>
+                <a:srgbClr val="990F3D"/>
+              </a:buClr>
+              <a:buFont typeface="Arial"/>
+              <a:buChar char="•"/>
+            </a:pPr>
+            <a:r>
+              <a:rPr lang="es-ES" sz="1700" dirty="0">
+                <a:solidFill>
+                  <a:srgbClr val="2F2B28"/>
+                </a:solidFill>
+              </a:rPr>
+              <a:t>Registro de recomendaciones con identificadores persistentes y valoración independiente.</a:t>
+            </a:r>
+          </a:p>
+        </p:txBody>
+      </p:sp>
+      <p:sp>
+        <p:nvSpPr>
+          <p:cNvPr id="210" name="Texto 210"/>
+          <p:cNvSpPr txBox="1"/>
+          <p:nvPr/>
+        </p:nvSpPr>
+        <p:spPr>
+          <a:xfrm>
+            <a:off x="609600" y="6250000"/>
             <a:ext cx="10972800" cy="450000"/>
           </a:xfrm>
           <a:prstGeom prst="rect">
@@ -5358,626 +5525,12 @@
           <a:p>
             <a:pPr algn="l"/>
             <a:r>
-              <a:rPr lang="es-ES" sz="1500" dirty="0">
-                <a:solidFill>
-                  <a:srgbClr val="564D47"/>
-                </a:solidFill>
-              </a:rPr>
-              <a:t>Qué se entrega en cada uno; las duraciones son orientativas</a:t>
-            </a:r>
-          </a:p>
-        </p:txBody>
-      </p:sp>
-      <p:sp>
-        <p:nvSpPr>
-          <p:cNvPr id="207" name="Caja 207"/>
-          <p:cNvSpPr/>
-          <p:nvPr/>
-        </p:nvSpPr>
-        <p:spPr>
-          <a:xfrm>
-            <a:off x="609600" y="2050000"/>
-            <a:ext cx="2098560" cy="800000"/>
-          </a:xfrm>
-          <a:prstGeom prst="roundRect">
-            <a:avLst>
-              <a:gd name="adj" fmla="val 6000"/>
-            </a:avLst>
-          </a:prstGeom>
-          <a:solidFill>
-            <a:srgbClr val="0F5499"/>
-          </a:solidFill>
-          <a:ln>
-            <a:noFill/>
-          </a:ln>
-        </p:spPr>
-        <p:txBody>
-          <a:bodyPr wrap="square" anchor="ctr" lIns="45720" rIns="45720">
-            <a:noAutofit/>
-          </a:bodyPr>
-          <a:lstStyle/>
-          <a:p>
-            <a:pPr algn="ctr"/>
-            <a:r>
-              <a:rPr lang="es-ES" sz="1700" b="1" dirty="0">
-                <a:solidFill>
-                  <a:srgbClr val="FFFFFF"/>
-                </a:solidFill>
-              </a:rPr>
-              <a:t>M1 · Diagnóstico</a:t>
-            </a:r>
-          </a:p>
-        </p:txBody>
-      </p:sp>
-      <p:sp>
-        <p:nvSpPr>
-          <p:cNvPr id="208" name="Caja 208"/>
-          <p:cNvSpPr/>
-          <p:nvPr/>
-        </p:nvSpPr>
-        <p:spPr>
-          <a:xfrm>
-            <a:off x="609600" y="2790000"/>
-            <a:ext cx="2098560" cy="2500000"/>
-          </a:xfrm>
-          <a:prstGeom prst="roundRect">
-            <a:avLst>
-              <a:gd name="adj" fmla="val 6000"/>
-            </a:avLst>
-          </a:prstGeom>
-          <a:solidFill>
-            <a:srgbClr val="F3CFB2"/>
-          </a:solidFill>
-          <a:ln>
-            <a:noFill/>
-          </a:ln>
-        </p:spPr>
-        <p:txBody>
-          <a:bodyPr wrap="square" anchor="ctr" lIns="45720" rIns="45720">
-            <a:noAutofit/>
-          </a:bodyPr>
-          <a:lstStyle/>
-          <a:p>
-            <a:pPr algn="ctr"/>
-            <a:r>
-              <a:rPr lang="es-ES" sz="1000" b="1" dirty="0">
-                <a:solidFill>
-                  <a:srgbClr val="2F2B28"/>
-                </a:solidFill>
-              </a:rPr>
-              <a:t/>
-            </a:r>
-          </a:p>
-        </p:txBody>
-      </p:sp>
-      <p:sp>
-        <p:nvSpPr>
-          <p:cNvPr id="209" name="Texto 209"/>
-          <p:cNvSpPr txBox="1"/>
-          <p:nvPr/>
-        </p:nvSpPr>
-        <p:spPr>
-          <a:xfrm>
-            <a:off x="649600" y="2890000"/>
-            <a:ext cx="2018560" cy="2340000"/>
-          </a:xfrm>
-          <a:prstGeom prst="rect">
-            <a:avLst/>
-          </a:prstGeom>
-          <a:noFill/>
-        </p:spPr>
-        <p:txBody>
-          <a:bodyPr wrap="square" anchor="t" lIns="45720" rIns="45720">
-            <a:noAutofit/>
-          </a:bodyPr>
-          <a:lstStyle/>
-          <a:p>
-            <a:pPr algn="l"/>
-            <a:r>
-              <a:rPr lang="es-ES" sz="1300" dirty="0">
-                <a:solidFill>
-                  <a:srgbClr val="2F2B28"/>
-                </a:solidFill>
-              </a:rPr>
-              <a:t>4 a 6 semanas. Inventario, madurez con evidencia (T15), índice de transformación (T14), valor y coste actuales. Informe C1 (P33).</a:t>
-            </a:r>
-          </a:p>
-        </p:txBody>
-      </p:sp>
-      <p:sp>
-        <p:nvSpPr>
-          <p:cNvPr id="210" name="Caja 210"/>
-          <p:cNvSpPr/>
-          <p:nvPr/>
-        </p:nvSpPr>
-        <p:spPr>
-          <a:xfrm>
-            <a:off x="2828160" y="2050000"/>
-            <a:ext cx="2098560" cy="800000"/>
-          </a:xfrm>
-          <a:prstGeom prst="roundRect">
-            <a:avLst>
-              <a:gd name="adj" fmla="val 6000"/>
-            </a:avLst>
-          </a:prstGeom>
-          <a:solidFill>
-            <a:srgbClr val="593380"/>
-          </a:solidFill>
-          <a:ln>
-            <a:noFill/>
-          </a:ln>
-        </p:spPr>
-        <p:txBody>
-          <a:bodyPr wrap="square" anchor="ctr" lIns="45720" rIns="45720">
-            <a:noAutofit/>
-          </a:bodyPr>
-          <a:lstStyle/>
-          <a:p>
-            <a:pPr algn="ctr"/>
-            <a:r>
-              <a:rPr lang="es-ES" sz="1700" b="1" dirty="0">
-                <a:solidFill>
-                  <a:srgbClr val="FFFFFF"/>
-                </a:solidFill>
-              </a:rPr>
-              <a:t>M2 · Implantación</a:t>
-            </a:r>
-          </a:p>
-        </p:txBody>
-      </p:sp>
-      <p:sp>
-        <p:nvSpPr>
-          <p:cNvPr id="211" name="Caja 211"/>
-          <p:cNvSpPr/>
-          <p:nvPr/>
-        </p:nvSpPr>
-        <p:spPr>
-          <a:xfrm>
-            <a:off x="2828160" y="2790000"/>
-            <a:ext cx="2098560" cy="2500000"/>
-          </a:xfrm>
-          <a:prstGeom prst="roundRect">
-            <a:avLst>
-              <a:gd name="adj" fmla="val 6000"/>
-            </a:avLst>
-          </a:prstGeom>
-          <a:solidFill>
-            <a:srgbClr val="F3CFB2"/>
-          </a:solidFill>
-          <a:ln>
-            <a:noFill/>
-          </a:ln>
-        </p:spPr>
-        <p:txBody>
-          <a:bodyPr wrap="square" anchor="ctr" lIns="45720" rIns="45720">
-            <a:noAutofit/>
-          </a:bodyPr>
-          <a:lstStyle/>
-          <a:p>
-            <a:pPr algn="ctr"/>
-            <a:r>
-              <a:rPr lang="es-ES" sz="1000" b="1" dirty="0">
-                <a:solidFill>
-                  <a:srgbClr val="2F2B28"/>
-                </a:solidFill>
-              </a:rPr>
-              <a:t/>
-            </a:r>
-          </a:p>
-        </p:txBody>
-      </p:sp>
-      <p:sp>
-        <p:nvSpPr>
-          <p:cNvPr id="212" name="Texto 212"/>
-          <p:cNvSpPr txBox="1"/>
-          <p:nvPr/>
-        </p:nvSpPr>
-        <p:spPr>
-          <a:xfrm>
-            <a:off x="2868160" y="2890000"/>
-            <a:ext cx="2018560" cy="2340000"/>
-          </a:xfrm>
-          <a:prstGeom prst="rect">
-            <a:avLst/>
-          </a:prstGeom>
-          <a:noFill/>
-        </p:spPr>
-        <p:txBody>
-          <a:bodyPr wrap="square" anchor="t" lIns="45720" rIns="45720">
-            <a:noAutofit/>
-          </a:bodyPr>
-          <a:lstStyle/>
-          <a:p>
-            <a:pPr algn="l"/>
-            <a:r>
-              <a:rPr lang="es-ES" sz="1300" dirty="0">
-                <a:solidFill>
-                  <a:srgbClr val="2F2B28"/>
-                </a:solidFill>
-              </a:rPr>
-              <a:t>90 días. Tesis y apetito de riesgo, gobierno, cartera, registro T01 y panel con datos reales, y el primer paquete para el consejo.</a:t>
-            </a:r>
-          </a:p>
-        </p:txBody>
-      </p:sp>
-      <p:sp>
-        <p:nvSpPr>
-          <p:cNvPr id="213" name="Caja 213"/>
-          <p:cNvSpPr/>
-          <p:nvPr/>
-        </p:nvSpPr>
-        <p:spPr>
-          <a:xfrm>
-            <a:off x="5046720" y="2050000"/>
-            <a:ext cx="2098560" cy="800000"/>
-          </a:xfrm>
-          <a:prstGeom prst="roundRect">
-            <a:avLst>
-              <a:gd name="adj" fmla="val 6000"/>
-            </a:avLst>
-          </a:prstGeom>
-          <a:solidFill>
-            <a:srgbClr val="990F3D"/>
-          </a:solidFill>
-          <a:ln>
-            <a:noFill/>
-          </a:ln>
-        </p:spPr>
-        <p:txBody>
-          <a:bodyPr wrap="square" anchor="ctr" lIns="45720" rIns="45720">
-            <a:noAutofit/>
-          </a:bodyPr>
-          <a:lstStyle/>
-          <a:p>
-            <a:pPr algn="ctr"/>
-            <a:r>
-              <a:rPr lang="es-ES" sz="1700" b="1" dirty="0">
-                <a:solidFill>
-                  <a:srgbClr val="FFFFFF"/>
-                </a:solidFill>
-              </a:rPr>
-              <a:t>M3 · Auditoría</a:t>
-            </a:r>
-          </a:p>
-        </p:txBody>
-      </p:sp>
-      <p:sp>
-        <p:nvSpPr>
-          <p:cNvPr id="214" name="Caja 214"/>
-          <p:cNvSpPr/>
-          <p:nvPr/>
-        </p:nvSpPr>
-        <p:spPr>
-          <a:xfrm>
-            <a:off x="5046720" y="2790000"/>
-            <a:ext cx="2098560" cy="2500000"/>
-          </a:xfrm>
-          <a:prstGeom prst="roundRect">
-            <a:avLst>
-              <a:gd name="adj" fmla="val 6000"/>
-            </a:avLst>
-          </a:prstGeom>
-          <a:solidFill>
-            <a:srgbClr val="F3CFB2"/>
-          </a:solidFill>
-          <a:ln>
-            <a:noFill/>
-          </a:ln>
-        </p:spPr>
-        <p:txBody>
-          <a:bodyPr wrap="square" anchor="ctr" lIns="45720" rIns="45720">
-            <a:noAutofit/>
-          </a:bodyPr>
-          <a:lstStyle/>
-          <a:p>
-            <a:pPr algn="ctr"/>
-            <a:r>
-              <a:rPr lang="es-ES" sz="1000" b="1" dirty="0">
-                <a:solidFill>
-                  <a:srgbClr val="2F2B28"/>
-                </a:solidFill>
-              </a:rPr>
-              <a:t/>
-            </a:r>
-          </a:p>
-        </p:txBody>
-      </p:sp>
-      <p:sp>
-        <p:nvSpPr>
-          <p:cNvPr id="215" name="Texto 215"/>
-          <p:cNvSpPr txBox="1"/>
-          <p:nvPr/>
-        </p:nvSpPr>
-        <p:spPr>
-          <a:xfrm>
-            <a:off x="5086720" y="2890000"/>
-            <a:ext cx="2018560" cy="2340000"/>
-          </a:xfrm>
-          <a:prstGeom prst="rect">
-            <a:avLst/>
-          </a:prstGeom>
-          <a:noFill/>
-        </p:spPr>
-        <p:txBody>
-          <a:bodyPr wrap="square" anchor="t" lIns="45720" rIns="45720">
-            <a:noAutofit/>
-          </a:bodyPr>
-          <a:lstStyle/>
-          <a:p>
-            <a:pPr algn="l"/>
-            <a:r>
-              <a:rPr lang="es-ES" sz="1300" dirty="0">
-                <a:solidFill>
-                  <a:srgbClr val="2F2B28"/>
-                </a:solidFill>
-              </a:rPr>
-              <a:t>Opinión independiente: Conforme, Conforme con observaciones o No conforme. Plan, papeles e informe (P58, P59, P60).</a:t>
-            </a:r>
-          </a:p>
-        </p:txBody>
-      </p:sp>
-      <p:sp>
-        <p:nvSpPr>
-          <p:cNvPr id="216" name="Caja 216"/>
-          <p:cNvSpPr/>
-          <p:nvPr/>
-        </p:nvSpPr>
-        <p:spPr>
-          <a:xfrm>
-            <a:off x="7265280" y="2050000"/>
-            <a:ext cx="2098560" cy="800000"/>
-          </a:xfrm>
-          <a:prstGeom prst="roundRect">
-            <a:avLst>
-              <a:gd name="adj" fmla="val 6000"/>
-            </a:avLst>
-          </a:prstGeom>
-          <a:solidFill>
-            <a:srgbClr val="A5822A"/>
-          </a:solidFill>
-          <a:ln>
-            <a:noFill/>
-          </a:ln>
-        </p:spPr>
-        <p:txBody>
-          <a:bodyPr wrap="square" anchor="ctr" lIns="45720" rIns="45720">
-            <a:noAutofit/>
-          </a:bodyPr>
-          <a:lstStyle/>
-          <a:p>
-            <a:pPr algn="ctr"/>
-            <a:r>
-              <a:rPr lang="es-ES" sz="1700" b="1" dirty="0">
-                <a:solidFill>
-                  <a:srgbClr val="FFFFFF"/>
-                </a:solidFill>
-              </a:rPr>
-              <a:t>M4 · Consejo</a:t>
-            </a:r>
-          </a:p>
-        </p:txBody>
-      </p:sp>
-      <p:sp>
-        <p:nvSpPr>
-          <p:cNvPr id="217" name="Caja 217"/>
-          <p:cNvSpPr/>
-          <p:nvPr/>
-        </p:nvSpPr>
-        <p:spPr>
-          <a:xfrm>
-            <a:off x="7265280" y="2790000"/>
-            <a:ext cx="2098560" cy="2500000"/>
-          </a:xfrm>
-          <a:prstGeom prst="roundRect">
-            <a:avLst>
-              <a:gd name="adj" fmla="val 6000"/>
-            </a:avLst>
-          </a:prstGeom>
-          <a:solidFill>
-            <a:srgbClr val="F3CFB2"/>
-          </a:solidFill>
-          <a:ln>
-            <a:noFill/>
-          </a:ln>
-        </p:spPr>
-        <p:txBody>
-          <a:bodyPr wrap="square" anchor="ctr" lIns="45720" rIns="45720">
-            <a:noAutofit/>
-          </a:bodyPr>
-          <a:lstStyle/>
-          <a:p>
-            <a:pPr algn="ctr"/>
-            <a:r>
-              <a:rPr lang="es-ES" sz="1000" b="1" dirty="0">
-                <a:solidFill>
-                  <a:srgbClr val="2F2B28"/>
-                </a:solidFill>
-              </a:rPr>
-              <a:t/>
-            </a:r>
-          </a:p>
-        </p:txBody>
-      </p:sp>
-      <p:sp>
-        <p:nvSpPr>
-          <p:cNvPr id="218" name="Texto 218"/>
-          <p:cNvSpPr txBox="1"/>
-          <p:nvPr/>
-        </p:nvSpPr>
-        <p:spPr>
-          <a:xfrm>
-            <a:off x="7305280" y="2890000"/>
-            <a:ext cx="2018560" cy="2340000"/>
-          </a:xfrm>
-          <a:prstGeom prst="rect">
-            <a:avLst/>
-          </a:prstGeom>
-          <a:noFill/>
-        </p:spPr>
-        <p:txBody>
-          <a:bodyPr wrap="square" anchor="t" lIns="45720" rIns="45720">
-            <a:noAutofit/>
-          </a:bodyPr>
-          <a:lstStyle/>
-          <a:p>
-            <a:pPr algn="l"/>
-            <a:r>
-              <a:rPr lang="es-ES" sz="1300" dirty="0">
-                <a:solidFill>
-                  <a:srgbClr val="2F2B28"/>
-                </a:solidFill>
-              </a:rPr>
-              <a:t>Mandato anual. Preparar sesiones, revisar el paquete trimestral, recomendaciones registradas y valoraciones independientes.</a:t>
-            </a:r>
-          </a:p>
-        </p:txBody>
-      </p:sp>
-      <p:sp>
-        <p:nvSpPr>
-          <p:cNvPr id="219" name="Caja 219"/>
-          <p:cNvSpPr/>
-          <p:nvPr/>
-        </p:nvSpPr>
-        <p:spPr>
-          <a:xfrm>
-            <a:off x="9483840" y="2050000"/>
-            <a:ext cx="2098560" cy="800000"/>
-          </a:xfrm>
-          <a:prstGeom prst="roundRect">
-            <a:avLst>
-              <a:gd name="adj" fmla="val 6000"/>
-            </a:avLst>
-          </a:prstGeom>
-          <a:solidFill>
-            <a:srgbClr val="0D7680"/>
-          </a:solidFill>
-          <a:ln>
-            <a:noFill/>
-          </a:ln>
-        </p:spPr>
-        <p:txBody>
-          <a:bodyPr wrap="square" anchor="ctr" lIns="45720" rIns="45720">
-            <a:noAutofit/>
-          </a:bodyPr>
-          <a:lstStyle/>
-          <a:p>
-            <a:pPr algn="ctr"/>
-            <a:r>
-              <a:rPr lang="es-ES" sz="1700" b="1" dirty="0">
-                <a:solidFill>
-                  <a:srgbClr val="FFFFFF"/>
-                </a:solidFill>
-              </a:rPr>
-              <a:t>M5 · Continuo</a:t>
-            </a:r>
-          </a:p>
-        </p:txBody>
-      </p:sp>
-      <p:sp>
-        <p:nvSpPr>
-          <p:cNvPr id="220" name="Caja 220"/>
-          <p:cNvSpPr/>
-          <p:nvPr/>
-        </p:nvSpPr>
-        <p:spPr>
-          <a:xfrm>
-            <a:off x="9483840" y="2790000"/>
-            <a:ext cx="2098560" cy="2500000"/>
-          </a:xfrm>
-          <a:prstGeom prst="roundRect">
-            <a:avLst>
-              <a:gd name="adj" fmla="val 6000"/>
-            </a:avLst>
-          </a:prstGeom>
-          <a:solidFill>
-            <a:srgbClr val="F3CFB2"/>
-          </a:solidFill>
-          <a:ln>
-            <a:noFill/>
-          </a:ln>
-        </p:spPr>
-        <p:txBody>
-          <a:bodyPr wrap="square" anchor="ctr" lIns="45720" rIns="45720">
-            <a:noAutofit/>
-          </a:bodyPr>
-          <a:lstStyle/>
-          <a:p>
-            <a:pPr algn="ctr"/>
-            <a:r>
-              <a:rPr lang="es-ES" sz="1000" b="1" dirty="0">
-                <a:solidFill>
-                  <a:srgbClr val="2F2B28"/>
-                </a:solidFill>
-              </a:rPr>
-              <a:t/>
-            </a:r>
-          </a:p>
-        </p:txBody>
-      </p:sp>
-      <p:sp>
-        <p:nvSpPr>
-          <p:cNvPr id="221" name="Texto 221"/>
-          <p:cNvSpPr txBox="1"/>
-          <p:nvPr/>
-        </p:nvSpPr>
-        <p:spPr>
-          <a:xfrm>
-            <a:off x="9523840" y="2890000"/>
-            <a:ext cx="2018560" cy="2340000"/>
-          </a:xfrm>
-          <a:prstGeom prst="rect">
-            <a:avLst/>
-          </a:prstGeom>
-          <a:noFill/>
-        </p:spPr>
-        <p:txBody>
-          <a:bodyPr wrap="square" anchor="t" lIns="45720" rIns="45720">
-            <a:noAutofit/>
-          </a:bodyPr>
-          <a:lstStyle/>
-          <a:p>
-            <a:pPr algn="l"/>
-            <a:r>
-              <a:rPr lang="es-ES" sz="1300" dirty="0">
-                <a:solidFill>
-                  <a:srgbClr val="2F2B28"/>
-                </a:solidFill>
-              </a:rPr>
-              <a:t>Apoyo a la oficina de IA: registro, métricas del embudo y paquetes, siempre con plan de transferencia y fecha de salida (P71).</a:t>
-            </a:r>
-          </a:p>
-        </p:txBody>
-      </p:sp>
-      <p:sp>
-        <p:nvSpPr>
-          <p:cNvPr id="222" name="Texto 222"/>
-          <p:cNvSpPr txBox="1"/>
-          <p:nvPr/>
-        </p:nvSpPr>
-        <p:spPr>
-          <a:xfrm>
-            <a:off x="609600" y="6150000"/>
-            <a:ext cx="10972800" cy="500000"/>
-          </a:xfrm>
-          <a:prstGeom prst="rect">
-            <a:avLst/>
-          </a:prstGeom>
-          <a:noFill/>
-        </p:spPr>
-        <p:txBody>
-          <a:bodyPr wrap="square" anchor="t" lIns="45720" rIns="45720">
-            <a:noAutofit/>
-          </a:bodyPr>
-          <a:lstStyle/>
-          <a:p>
-            <a:pPr algn="l"/>
-            <a:r>
               <a:rPr lang="es-ES" sz="1400" b="1" dirty="0">
                 <a:solidFill>
                   <a:srgbClr val="0F5499"/>
                 </a:solidFill>
               </a:rPr>
-              <a:t>En todos, la compañía decide; usted prepara, propone, verifica o asesora.</a:t>
+              <a:t>Si omite alguna, su servicio puede inspirarse en SEVEN-G, pero no presentarse como aplicación de SEVEN-G.</a:t>
             </a:r>
           </a:p>
         </p:txBody>
@@ -6017,7 +5570,7 @@
       </p:grpSpPr>
       <p:sp>
         <p:nvSpPr>
-          <p:cNvPr id="229" name="Marca"/>
+          <p:cNvPr id="230" name="Marca"/>
           <p:cNvSpPr/>
           <p:nvPr/>
         </p:nvSpPr>
@@ -6041,7 +5594,7 @@
       </p:sp>
       <p:sp>
         <p:nvSpPr>
-          <p:cNvPr id="230" name="Texto 230"/>
+          <p:cNvPr id="231" name="Texto 231"/>
           <p:cNvSpPr txBox="1"/>
           <p:nvPr/>
         </p:nvSpPr>
@@ -6075,7 +5628,7 @@
       </p:sp>
       <p:sp>
         <p:nvSpPr>
-          <p:cNvPr id="231" name="Texto 231"/>
+          <p:cNvPr id="232" name="Texto 232"/>
           <p:cNvSpPr txBox="1"/>
           <p:nvPr/>
         </p:nvSpPr>
@@ -6102,130 +5655,587 @@
                   <a:srgbClr val="990F3D"/>
                 </a:solidFill>
               </a:rPr>
-              <a:t>Independencia: quien implanta no audita</a:t>
-            </a:r>
-          </a:p>
-        </p:txBody>
-      </p:sp>
-      <p:sp>
-        <p:nvSpPr>
-          <p:cNvPr id="227" name="Texto 227"/>
-          <p:cNvSpPr txBox="1"/>
-          <p:nvPr/>
-        </p:nvSpPr>
-        <p:spPr>
-          <a:xfrm>
-            <a:off x="609600" y="1750000"/>
-            <a:ext cx="10972800" cy="4400000"/>
-          </a:xfrm>
-          <a:prstGeom prst="rect">
-            <a:avLst/>
-          </a:prstGeom>
-          <a:noFill/>
-        </p:spPr>
-        <p:txBody>
-          <a:bodyPr wrap="square" anchor="t" lIns="45720" rIns="45720">
-            <a:noAutofit/>
-          </a:bodyPr>
-          <a:lstStyle/>
-          <a:p>
-            <a:pPr marL="285750" indent="-285750">
-              <a:spcAft>
-                <a:spcPts val="400"/>
-              </a:spcAft>
-              <a:buClr>
-                <a:srgbClr val="990F3D"/>
-              </a:buClr>
-              <a:buFont typeface="Arial"/>
-              <a:buChar char="•"/>
-            </a:pPr>
-            <a:r>
-              <a:rPr lang="es-ES" sz="1800" dirty="0">
-                <a:solidFill>
-                  <a:srgbClr val="2F2B28"/>
-                </a:solidFill>
-              </a:rPr>
-              <a:t>No puede verificar, auditar ni valorar de forma independiente lo que usted, su firma o una entidad vinculada ha diseñado, implantado u operado.</a:t>
-            </a:r>
-          </a:p>
-          <a:p>
-            <a:pPr marL="285750" indent="-285750">
-              <a:spcAft>
-                <a:spcPts val="400"/>
-              </a:spcAft>
-              <a:buClr>
-                <a:srgbClr val="990F3D"/>
-              </a:buClr>
-              <a:buFont typeface="Arial"/>
-              <a:buChar char="•"/>
-            </a:pPr>
-            <a:r>
-              <a:rPr lang="es-ES" sz="1800" dirty="0">
-                <a:solidFill>
-                  <a:srgbClr val="2F2B28"/>
-                </a:solidFill>
-              </a:rPr>
-              <a:t>Implantación (M2) y auditoría (M3) son incompatibles en el mismo ámbito; tampoco asesorar al consejo (M4) sobre lo que usted opera (M5).</a:t>
-            </a:r>
-          </a:p>
-          <a:p>
-            <a:pPr marL="285750" indent="-285750">
-              <a:spcAft>
-                <a:spcPts val="400"/>
-              </a:spcAft>
-              <a:buClr>
-                <a:srgbClr val="990F3D"/>
-              </a:buClr>
-              <a:buFont typeface="Arial"/>
-              <a:buChar char="•"/>
-            </a:pPr>
-            <a:r>
-              <a:rPr lang="es-ES" sz="1800" dirty="0">
-                <a:solidFill>
-                  <a:srgbClr val="2F2B28"/>
-                </a:solidFill>
-              </a:rPr>
-              <a:t>Tras un servicio incompatible, deje pasar al menos un ciclo anual completo antes de auditar ese ámbito.</a:t>
-            </a:r>
-          </a:p>
-          <a:p>
-            <a:pPr marL="285750" indent="-285750">
-              <a:spcAft>
-                <a:spcPts val="400"/>
-              </a:spcAft>
-              <a:buClr>
-                <a:srgbClr val="990F3D"/>
-              </a:buClr>
-              <a:buFont typeface="Arial"/>
-              <a:buChar char="•"/>
-            </a:pPr>
-            <a:r>
-              <a:rPr lang="es-ES" sz="1800" dirty="0">
-                <a:solidFill>
-                  <a:srgbClr val="2F2B28"/>
-                </a:solidFill>
-              </a:rPr>
-              <a:t>Declare por escrito sus relaciones con proveedores de tecnología, herramientas propias y esquema de honorarios (P41).</a:t>
-            </a:r>
-          </a:p>
-          <a:p>
-            <a:pPr marL="285750" indent="-285750">
-              <a:spcAft>
-                <a:spcPts val="400"/>
-              </a:spcAft>
-              <a:buClr>
-                <a:srgbClr val="990F3D"/>
-              </a:buClr>
-              <a:buFont typeface="Arial"/>
-              <a:buChar char="•"/>
-            </a:pPr>
-            <a:r>
-              <a:rPr lang="es-ES" sz="1800" dirty="0">
-                <a:solidFill>
-                  <a:srgbClr val="2F2B28"/>
-                </a:solidFill>
-              </a:rPr>
-              <a:t>Honorarios ligados al valor: solo sobre valor validado por control de gestión o por una auditoría ajena a usted.</a:t>
+              <a:t>Cinco modelos de acompañamiento</a:t>
+            </a:r>
+          </a:p>
+        </p:txBody>
+      </p:sp>
+      <p:sp>
+        <p:nvSpPr>
+          <p:cNvPr id="233" name="Texto 233"/>
+          <p:cNvSpPr txBox="1"/>
+          <p:nvPr/>
+        </p:nvSpPr>
+        <p:spPr>
+          <a:xfrm>
+            <a:off x="609600" y="1330000"/>
+            <a:ext cx="10972800" cy="450000"/>
+          </a:xfrm>
+          <a:prstGeom prst="rect">
+            <a:avLst/>
+          </a:prstGeom>
+          <a:noFill/>
+        </p:spPr>
+        <p:txBody>
+          <a:bodyPr wrap="square" anchor="t" lIns="45720" rIns="45720">
+            <a:noAutofit/>
+          </a:bodyPr>
+          <a:lstStyle/>
+          <a:p>
+            <a:pPr algn="l"/>
+            <a:r>
+              <a:rPr lang="es-ES" sz="1500" dirty="0">
+                <a:solidFill>
+                  <a:srgbClr val="564D47"/>
+                </a:solidFill>
+              </a:rPr>
+              <a:t>Qué se entrega en cada uno; las duraciones son orientativas</a:t>
+            </a:r>
+          </a:p>
+        </p:txBody>
+      </p:sp>
+      <p:sp>
+        <p:nvSpPr>
+          <p:cNvPr id="214" name="Caja 214"/>
+          <p:cNvSpPr/>
+          <p:nvPr/>
+        </p:nvSpPr>
+        <p:spPr>
+          <a:xfrm>
+            <a:off x="609600" y="2050000"/>
+            <a:ext cx="2098560" cy="800000"/>
+          </a:xfrm>
+          <a:prstGeom prst="roundRect">
+            <a:avLst>
+              <a:gd name="adj" fmla="val 6000"/>
+            </a:avLst>
+          </a:prstGeom>
+          <a:solidFill>
+            <a:srgbClr val="0F5499"/>
+          </a:solidFill>
+          <a:ln>
+            <a:noFill/>
+          </a:ln>
+        </p:spPr>
+        <p:txBody>
+          <a:bodyPr wrap="square" anchor="ctr" lIns="45720" rIns="45720">
+            <a:noAutofit/>
+          </a:bodyPr>
+          <a:lstStyle/>
+          <a:p>
+            <a:pPr algn="ctr"/>
+            <a:r>
+              <a:rPr lang="es-ES" sz="1700" b="1" dirty="0">
+                <a:solidFill>
+                  <a:srgbClr val="FFFFFF"/>
+                </a:solidFill>
+              </a:rPr>
+              <a:t>M1 · Diagnóstico</a:t>
+            </a:r>
+          </a:p>
+        </p:txBody>
+      </p:sp>
+      <p:sp>
+        <p:nvSpPr>
+          <p:cNvPr id="215" name="Caja 215"/>
+          <p:cNvSpPr/>
+          <p:nvPr/>
+        </p:nvSpPr>
+        <p:spPr>
+          <a:xfrm>
+            <a:off x="609600" y="2790000"/>
+            <a:ext cx="2098560" cy="2500000"/>
+          </a:xfrm>
+          <a:prstGeom prst="roundRect">
+            <a:avLst>
+              <a:gd name="adj" fmla="val 6000"/>
+            </a:avLst>
+          </a:prstGeom>
+          <a:solidFill>
+            <a:srgbClr val="F3CFB2"/>
+          </a:solidFill>
+          <a:ln>
+            <a:noFill/>
+          </a:ln>
+        </p:spPr>
+        <p:txBody>
+          <a:bodyPr wrap="square" anchor="ctr" lIns="45720" rIns="45720">
+            <a:noAutofit/>
+          </a:bodyPr>
+          <a:lstStyle/>
+          <a:p>
+            <a:pPr algn="ctr"/>
+            <a:r>
+              <a:rPr lang="es-ES" sz="1000" b="1" dirty="0">
+                <a:solidFill>
+                  <a:srgbClr val="2F2B28"/>
+                </a:solidFill>
+              </a:rPr>
+              <a:t/>
+            </a:r>
+          </a:p>
+        </p:txBody>
+      </p:sp>
+      <p:sp>
+        <p:nvSpPr>
+          <p:cNvPr id="216" name="Texto 216"/>
+          <p:cNvSpPr txBox="1"/>
+          <p:nvPr/>
+        </p:nvSpPr>
+        <p:spPr>
+          <a:xfrm>
+            <a:off x="649600" y="2890000"/>
+            <a:ext cx="2018560" cy="2340000"/>
+          </a:xfrm>
+          <a:prstGeom prst="rect">
+            <a:avLst/>
+          </a:prstGeom>
+          <a:noFill/>
+        </p:spPr>
+        <p:txBody>
+          <a:bodyPr wrap="square" anchor="t" lIns="45720" rIns="45720">
+            <a:noAutofit/>
+          </a:bodyPr>
+          <a:lstStyle/>
+          <a:p>
+            <a:pPr algn="l"/>
+            <a:r>
+              <a:rPr lang="es-ES" sz="1300" dirty="0">
+                <a:solidFill>
+                  <a:srgbClr val="2F2B28"/>
+                </a:solidFill>
+              </a:rPr>
+              <a:t>4 a 6 semanas. Inventario, madurez con evidencia (T15), índice de transformación (T14), valor y coste actuales. Informe C1 (P33).</a:t>
+            </a:r>
+          </a:p>
+        </p:txBody>
+      </p:sp>
+      <p:sp>
+        <p:nvSpPr>
+          <p:cNvPr id="217" name="Caja 217"/>
+          <p:cNvSpPr/>
+          <p:nvPr/>
+        </p:nvSpPr>
+        <p:spPr>
+          <a:xfrm>
+            <a:off x="2828160" y="2050000"/>
+            <a:ext cx="2098560" cy="800000"/>
+          </a:xfrm>
+          <a:prstGeom prst="roundRect">
+            <a:avLst>
+              <a:gd name="adj" fmla="val 6000"/>
+            </a:avLst>
+          </a:prstGeom>
+          <a:solidFill>
+            <a:srgbClr val="593380"/>
+          </a:solidFill>
+          <a:ln>
+            <a:noFill/>
+          </a:ln>
+        </p:spPr>
+        <p:txBody>
+          <a:bodyPr wrap="square" anchor="ctr" lIns="45720" rIns="45720">
+            <a:noAutofit/>
+          </a:bodyPr>
+          <a:lstStyle/>
+          <a:p>
+            <a:pPr algn="ctr"/>
+            <a:r>
+              <a:rPr lang="es-ES" sz="1700" b="1" dirty="0">
+                <a:solidFill>
+                  <a:srgbClr val="FFFFFF"/>
+                </a:solidFill>
+              </a:rPr>
+              <a:t>M2 · Implantación</a:t>
+            </a:r>
+          </a:p>
+        </p:txBody>
+      </p:sp>
+      <p:sp>
+        <p:nvSpPr>
+          <p:cNvPr id="218" name="Caja 218"/>
+          <p:cNvSpPr/>
+          <p:nvPr/>
+        </p:nvSpPr>
+        <p:spPr>
+          <a:xfrm>
+            <a:off x="2828160" y="2790000"/>
+            <a:ext cx="2098560" cy="2500000"/>
+          </a:xfrm>
+          <a:prstGeom prst="roundRect">
+            <a:avLst>
+              <a:gd name="adj" fmla="val 6000"/>
+            </a:avLst>
+          </a:prstGeom>
+          <a:solidFill>
+            <a:srgbClr val="F3CFB2"/>
+          </a:solidFill>
+          <a:ln>
+            <a:noFill/>
+          </a:ln>
+        </p:spPr>
+        <p:txBody>
+          <a:bodyPr wrap="square" anchor="ctr" lIns="45720" rIns="45720">
+            <a:noAutofit/>
+          </a:bodyPr>
+          <a:lstStyle/>
+          <a:p>
+            <a:pPr algn="ctr"/>
+            <a:r>
+              <a:rPr lang="es-ES" sz="1000" b="1" dirty="0">
+                <a:solidFill>
+                  <a:srgbClr val="2F2B28"/>
+                </a:solidFill>
+              </a:rPr>
+              <a:t/>
+            </a:r>
+          </a:p>
+        </p:txBody>
+      </p:sp>
+      <p:sp>
+        <p:nvSpPr>
+          <p:cNvPr id="219" name="Texto 219"/>
+          <p:cNvSpPr txBox="1"/>
+          <p:nvPr/>
+        </p:nvSpPr>
+        <p:spPr>
+          <a:xfrm>
+            <a:off x="2868160" y="2890000"/>
+            <a:ext cx="2018560" cy="2340000"/>
+          </a:xfrm>
+          <a:prstGeom prst="rect">
+            <a:avLst/>
+          </a:prstGeom>
+          <a:noFill/>
+        </p:spPr>
+        <p:txBody>
+          <a:bodyPr wrap="square" anchor="t" lIns="45720" rIns="45720">
+            <a:noAutofit/>
+          </a:bodyPr>
+          <a:lstStyle/>
+          <a:p>
+            <a:pPr algn="l"/>
+            <a:r>
+              <a:rPr lang="es-ES" sz="1300" dirty="0">
+                <a:solidFill>
+                  <a:srgbClr val="2F2B28"/>
+                </a:solidFill>
+              </a:rPr>
+              <a:t>90 días. Tesis y apetito de riesgo, gobierno, cartera, registro T01 y panel con datos reales, y el primer paquete para el consejo.</a:t>
+            </a:r>
+          </a:p>
+        </p:txBody>
+      </p:sp>
+      <p:sp>
+        <p:nvSpPr>
+          <p:cNvPr id="220" name="Caja 220"/>
+          <p:cNvSpPr/>
+          <p:nvPr/>
+        </p:nvSpPr>
+        <p:spPr>
+          <a:xfrm>
+            <a:off x="5046720" y="2050000"/>
+            <a:ext cx="2098560" cy="800000"/>
+          </a:xfrm>
+          <a:prstGeom prst="roundRect">
+            <a:avLst>
+              <a:gd name="adj" fmla="val 6000"/>
+            </a:avLst>
+          </a:prstGeom>
+          <a:solidFill>
+            <a:srgbClr val="990F3D"/>
+          </a:solidFill>
+          <a:ln>
+            <a:noFill/>
+          </a:ln>
+        </p:spPr>
+        <p:txBody>
+          <a:bodyPr wrap="square" anchor="ctr" lIns="45720" rIns="45720">
+            <a:noAutofit/>
+          </a:bodyPr>
+          <a:lstStyle/>
+          <a:p>
+            <a:pPr algn="ctr"/>
+            <a:r>
+              <a:rPr lang="es-ES" sz="1700" b="1" dirty="0">
+                <a:solidFill>
+                  <a:srgbClr val="FFFFFF"/>
+                </a:solidFill>
+              </a:rPr>
+              <a:t>M3 · Auditoría</a:t>
+            </a:r>
+          </a:p>
+        </p:txBody>
+      </p:sp>
+      <p:sp>
+        <p:nvSpPr>
+          <p:cNvPr id="221" name="Caja 221"/>
+          <p:cNvSpPr/>
+          <p:nvPr/>
+        </p:nvSpPr>
+        <p:spPr>
+          <a:xfrm>
+            <a:off x="5046720" y="2790000"/>
+            <a:ext cx="2098560" cy="2500000"/>
+          </a:xfrm>
+          <a:prstGeom prst="roundRect">
+            <a:avLst>
+              <a:gd name="adj" fmla="val 6000"/>
+            </a:avLst>
+          </a:prstGeom>
+          <a:solidFill>
+            <a:srgbClr val="F3CFB2"/>
+          </a:solidFill>
+          <a:ln>
+            <a:noFill/>
+          </a:ln>
+        </p:spPr>
+        <p:txBody>
+          <a:bodyPr wrap="square" anchor="ctr" lIns="45720" rIns="45720">
+            <a:noAutofit/>
+          </a:bodyPr>
+          <a:lstStyle/>
+          <a:p>
+            <a:pPr algn="ctr"/>
+            <a:r>
+              <a:rPr lang="es-ES" sz="1000" b="1" dirty="0">
+                <a:solidFill>
+                  <a:srgbClr val="2F2B28"/>
+                </a:solidFill>
+              </a:rPr>
+              <a:t/>
+            </a:r>
+          </a:p>
+        </p:txBody>
+      </p:sp>
+      <p:sp>
+        <p:nvSpPr>
+          <p:cNvPr id="222" name="Texto 222"/>
+          <p:cNvSpPr txBox="1"/>
+          <p:nvPr/>
+        </p:nvSpPr>
+        <p:spPr>
+          <a:xfrm>
+            <a:off x="5086720" y="2890000"/>
+            <a:ext cx="2018560" cy="2340000"/>
+          </a:xfrm>
+          <a:prstGeom prst="rect">
+            <a:avLst/>
+          </a:prstGeom>
+          <a:noFill/>
+        </p:spPr>
+        <p:txBody>
+          <a:bodyPr wrap="square" anchor="t" lIns="45720" rIns="45720">
+            <a:noAutofit/>
+          </a:bodyPr>
+          <a:lstStyle/>
+          <a:p>
+            <a:pPr algn="l"/>
+            <a:r>
+              <a:rPr lang="es-ES" sz="1300" dirty="0">
+                <a:solidFill>
+                  <a:srgbClr val="2F2B28"/>
+                </a:solidFill>
+              </a:rPr>
+              <a:t>Opinión independiente: Conforme, Conforme con observaciones o No conforme. Plan, papeles e informe (P58, P59, P60).</a:t>
+            </a:r>
+          </a:p>
+        </p:txBody>
+      </p:sp>
+      <p:sp>
+        <p:nvSpPr>
+          <p:cNvPr id="223" name="Caja 223"/>
+          <p:cNvSpPr/>
+          <p:nvPr/>
+        </p:nvSpPr>
+        <p:spPr>
+          <a:xfrm>
+            <a:off x="7265280" y="2050000"/>
+            <a:ext cx="2098560" cy="800000"/>
+          </a:xfrm>
+          <a:prstGeom prst="roundRect">
+            <a:avLst>
+              <a:gd name="adj" fmla="val 6000"/>
+            </a:avLst>
+          </a:prstGeom>
+          <a:solidFill>
+            <a:srgbClr val="A5822A"/>
+          </a:solidFill>
+          <a:ln>
+            <a:noFill/>
+          </a:ln>
+        </p:spPr>
+        <p:txBody>
+          <a:bodyPr wrap="square" anchor="ctr" lIns="45720" rIns="45720">
+            <a:noAutofit/>
+          </a:bodyPr>
+          <a:lstStyle/>
+          <a:p>
+            <a:pPr algn="ctr"/>
+            <a:r>
+              <a:rPr lang="es-ES" sz="1700" b="1" dirty="0">
+                <a:solidFill>
+                  <a:srgbClr val="FFFFFF"/>
+                </a:solidFill>
+              </a:rPr>
+              <a:t>M4 · Consejo</a:t>
+            </a:r>
+          </a:p>
+        </p:txBody>
+      </p:sp>
+      <p:sp>
+        <p:nvSpPr>
+          <p:cNvPr id="224" name="Caja 224"/>
+          <p:cNvSpPr/>
+          <p:nvPr/>
+        </p:nvSpPr>
+        <p:spPr>
+          <a:xfrm>
+            <a:off x="7265280" y="2790000"/>
+            <a:ext cx="2098560" cy="2500000"/>
+          </a:xfrm>
+          <a:prstGeom prst="roundRect">
+            <a:avLst>
+              <a:gd name="adj" fmla="val 6000"/>
+            </a:avLst>
+          </a:prstGeom>
+          <a:solidFill>
+            <a:srgbClr val="F3CFB2"/>
+          </a:solidFill>
+          <a:ln>
+            <a:noFill/>
+          </a:ln>
+        </p:spPr>
+        <p:txBody>
+          <a:bodyPr wrap="square" anchor="ctr" lIns="45720" rIns="45720">
+            <a:noAutofit/>
+          </a:bodyPr>
+          <a:lstStyle/>
+          <a:p>
+            <a:pPr algn="ctr"/>
+            <a:r>
+              <a:rPr lang="es-ES" sz="1000" b="1" dirty="0">
+                <a:solidFill>
+                  <a:srgbClr val="2F2B28"/>
+                </a:solidFill>
+              </a:rPr>
+              <a:t/>
+            </a:r>
+          </a:p>
+        </p:txBody>
+      </p:sp>
+      <p:sp>
+        <p:nvSpPr>
+          <p:cNvPr id="225" name="Texto 225"/>
+          <p:cNvSpPr txBox="1"/>
+          <p:nvPr/>
+        </p:nvSpPr>
+        <p:spPr>
+          <a:xfrm>
+            <a:off x="7305280" y="2890000"/>
+            <a:ext cx="2018560" cy="2340000"/>
+          </a:xfrm>
+          <a:prstGeom prst="rect">
+            <a:avLst/>
+          </a:prstGeom>
+          <a:noFill/>
+        </p:spPr>
+        <p:txBody>
+          <a:bodyPr wrap="square" anchor="t" lIns="45720" rIns="45720">
+            <a:noAutofit/>
+          </a:bodyPr>
+          <a:lstStyle/>
+          <a:p>
+            <a:pPr algn="l"/>
+            <a:r>
+              <a:rPr lang="es-ES" sz="1300" dirty="0">
+                <a:solidFill>
+                  <a:srgbClr val="2F2B28"/>
+                </a:solidFill>
+              </a:rPr>
+              <a:t>Mandato anual. Preparar sesiones, revisar el paquete trimestral, recomendaciones registradas y valoraciones independientes.</a:t>
+            </a:r>
+          </a:p>
+        </p:txBody>
+      </p:sp>
+      <p:sp>
+        <p:nvSpPr>
+          <p:cNvPr id="226" name="Caja 226"/>
+          <p:cNvSpPr/>
+          <p:nvPr/>
+        </p:nvSpPr>
+        <p:spPr>
+          <a:xfrm>
+            <a:off x="9483840" y="2050000"/>
+            <a:ext cx="2098560" cy="800000"/>
+          </a:xfrm>
+          <a:prstGeom prst="roundRect">
+            <a:avLst>
+              <a:gd name="adj" fmla="val 6000"/>
+            </a:avLst>
+          </a:prstGeom>
+          <a:solidFill>
+            <a:srgbClr val="0D7680"/>
+          </a:solidFill>
+          <a:ln>
+            <a:noFill/>
+          </a:ln>
+        </p:spPr>
+        <p:txBody>
+          <a:bodyPr wrap="square" anchor="ctr" lIns="45720" rIns="45720">
+            <a:noAutofit/>
+          </a:bodyPr>
+          <a:lstStyle/>
+          <a:p>
+            <a:pPr algn="ctr"/>
+            <a:r>
+              <a:rPr lang="es-ES" sz="1700" b="1" dirty="0">
+                <a:solidFill>
+                  <a:srgbClr val="FFFFFF"/>
+                </a:solidFill>
+              </a:rPr>
+              <a:t>M5 · Continuo</a:t>
+            </a:r>
+          </a:p>
+        </p:txBody>
+      </p:sp>
+      <p:sp>
+        <p:nvSpPr>
+          <p:cNvPr id="227" name="Caja 227"/>
+          <p:cNvSpPr/>
+          <p:nvPr/>
+        </p:nvSpPr>
+        <p:spPr>
+          <a:xfrm>
+            <a:off x="9483840" y="2790000"/>
+            <a:ext cx="2098560" cy="2500000"/>
+          </a:xfrm>
+          <a:prstGeom prst="roundRect">
+            <a:avLst>
+              <a:gd name="adj" fmla="val 6000"/>
+            </a:avLst>
+          </a:prstGeom>
+          <a:solidFill>
+            <a:srgbClr val="F3CFB2"/>
+          </a:solidFill>
+          <a:ln>
+            <a:noFill/>
+          </a:ln>
+        </p:spPr>
+        <p:txBody>
+          <a:bodyPr wrap="square" anchor="ctr" lIns="45720" rIns="45720">
+            <a:noAutofit/>
+          </a:bodyPr>
+          <a:lstStyle/>
+          <a:p>
+            <a:pPr algn="ctr"/>
+            <a:r>
+              <a:rPr lang="es-ES" sz="1000" b="1" dirty="0">
+                <a:solidFill>
+                  <a:srgbClr val="2F2B28"/>
+                </a:solidFill>
+              </a:rPr>
+              <a:t/>
             </a:r>
           </a:p>
         </p:txBody>
@@ -6238,8 +6248,8 @@
         </p:nvSpPr>
         <p:spPr>
           <a:xfrm>
-            <a:off x="609600" y="6250000"/>
-            <a:ext cx="10972800" cy="450000"/>
+            <a:off x="9523840" y="2890000"/>
+            <a:ext cx="2018560" cy="2340000"/>
           </a:xfrm>
           <a:prstGeom prst="rect">
             <a:avLst/>
@@ -6254,12 +6264,46 @@
           <a:p>
             <a:pPr algn="l"/>
             <a:r>
+              <a:rPr lang="es-ES" sz="1300" dirty="0">
+                <a:solidFill>
+                  <a:srgbClr val="2F2B28"/>
+                </a:solidFill>
+              </a:rPr>
+              <a:t>Apoyo a la oficina de IA: registro, métricas del embudo y paquetes, siempre con plan de transferencia y fecha de salida (P71).</a:t>
+            </a:r>
+          </a:p>
+        </p:txBody>
+      </p:sp>
+      <p:sp>
+        <p:nvSpPr>
+          <p:cNvPr id="229" name="Texto 229"/>
+          <p:cNvSpPr txBox="1"/>
+          <p:nvPr/>
+        </p:nvSpPr>
+        <p:spPr>
+          <a:xfrm>
+            <a:off x="609600" y="6150000"/>
+            <a:ext cx="10972800" cy="500000"/>
+          </a:xfrm>
+          <a:prstGeom prst="rect">
+            <a:avLst/>
+          </a:prstGeom>
+          <a:noFill/>
+        </p:spPr>
+        <p:txBody>
+          <a:bodyPr wrap="square" anchor="t" lIns="45720" rIns="45720">
+            <a:noAutofit/>
+          </a:bodyPr>
+          <a:lstStyle/>
+          <a:p>
+            <a:pPr algn="l"/>
+            <a:r>
               <a:rPr lang="es-ES" sz="1400" b="1" dirty="0">
                 <a:solidFill>
                   <a:srgbClr val="0F5499"/>
                 </a:solidFill>
               </a:rPr>
-              <a:t>Documento 91, sección 5.</a:t>
+              <a:t>En todos, la compañía decide; usted prepara, propone, verifica o asesora.</a:t>
             </a:r>
           </a:p>
         </p:txBody>
@@ -6299,7 +6343,7 @@
       </p:grpSpPr>
       <p:sp>
         <p:nvSpPr>
-          <p:cNvPr id="242" name="Marca"/>
+          <p:cNvPr id="236" name="Marca"/>
           <p:cNvSpPr/>
           <p:nvPr/>
         </p:nvSpPr>
@@ -6323,7 +6367,7 @@
       </p:sp>
       <p:sp>
         <p:nvSpPr>
-          <p:cNvPr id="243" name="Texto 243"/>
+          <p:cNvPr id="237" name="Texto 237"/>
           <p:cNvSpPr txBox="1"/>
           <p:nvPr/>
         </p:nvSpPr>
@@ -6357,7 +6401,7 @@
       </p:sp>
       <p:sp>
         <p:nvSpPr>
-          <p:cNvPr id="244" name="Texto 244"/>
+          <p:cNvPr id="238" name="Texto 238"/>
           <p:cNvSpPr txBox="1"/>
           <p:nvPr/>
         </p:nvSpPr>
@@ -6384,20 +6428,143 @@
                   <a:srgbClr val="990F3D"/>
                 </a:solidFill>
               </a:rPr>
-              <a:t>Qué puede decir y qué no</a:t>
-            </a:r>
-          </a:p>
-        </p:txBody>
-      </p:sp>
-      <p:sp>
-        <p:nvSpPr>
-          <p:cNvPr id="245" name="Texto 245"/>
-          <p:cNvSpPr txBox="1"/>
-          <p:nvPr/>
-        </p:nvSpPr>
-        <p:spPr>
-          <a:xfrm>
-            <a:off x="609600" y="1330000"/>
+              <a:t>Independencia: quien implanta no audita</a:t>
+            </a:r>
+          </a:p>
+        </p:txBody>
+      </p:sp>
+      <p:sp>
+        <p:nvSpPr>
+          <p:cNvPr id="234" name="Texto 234"/>
+          <p:cNvSpPr txBox="1"/>
+          <p:nvPr/>
+        </p:nvSpPr>
+        <p:spPr>
+          <a:xfrm>
+            <a:off x="609600" y="1750000"/>
+            <a:ext cx="10972800" cy="4400000"/>
+          </a:xfrm>
+          <a:prstGeom prst="rect">
+            <a:avLst/>
+          </a:prstGeom>
+          <a:noFill/>
+        </p:spPr>
+        <p:txBody>
+          <a:bodyPr wrap="square" anchor="t" lIns="45720" rIns="45720">
+            <a:noAutofit/>
+          </a:bodyPr>
+          <a:lstStyle/>
+          <a:p>
+            <a:pPr marL="285750" indent="-285750">
+              <a:spcAft>
+                <a:spcPts val="400"/>
+              </a:spcAft>
+              <a:buClr>
+                <a:srgbClr val="990F3D"/>
+              </a:buClr>
+              <a:buFont typeface="Arial"/>
+              <a:buChar char="•"/>
+            </a:pPr>
+            <a:r>
+              <a:rPr lang="es-ES" sz="1800" dirty="0">
+                <a:solidFill>
+                  <a:srgbClr val="2F2B28"/>
+                </a:solidFill>
+              </a:rPr>
+              <a:t>No puede verificar, auditar ni valorar de forma independiente lo que usted, su firma o una entidad vinculada ha diseñado, implantado u operado.</a:t>
+            </a:r>
+          </a:p>
+          <a:p>
+            <a:pPr marL="285750" indent="-285750">
+              <a:spcAft>
+                <a:spcPts val="400"/>
+              </a:spcAft>
+              <a:buClr>
+                <a:srgbClr val="990F3D"/>
+              </a:buClr>
+              <a:buFont typeface="Arial"/>
+              <a:buChar char="•"/>
+            </a:pPr>
+            <a:r>
+              <a:rPr lang="es-ES" sz="1800" dirty="0">
+                <a:solidFill>
+                  <a:srgbClr val="2F2B28"/>
+                </a:solidFill>
+              </a:rPr>
+              <a:t>Implantación (M2) y auditoría (M3) son incompatibles en el mismo ámbito; tampoco asesorar al consejo (M4) sobre lo que usted opera (M5).</a:t>
+            </a:r>
+          </a:p>
+          <a:p>
+            <a:pPr marL="285750" indent="-285750">
+              <a:spcAft>
+                <a:spcPts val="400"/>
+              </a:spcAft>
+              <a:buClr>
+                <a:srgbClr val="990F3D"/>
+              </a:buClr>
+              <a:buFont typeface="Arial"/>
+              <a:buChar char="•"/>
+            </a:pPr>
+            <a:r>
+              <a:rPr lang="es-ES" sz="1800" dirty="0">
+                <a:solidFill>
+                  <a:srgbClr val="2F2B28"/>
+                </a:solidFill>
+              </a:rPr>
+              <a:t>Tras un servicio incompatible, deje pasar al menos un ciclo anual completo antes de auditar ese ámbito.</a:t>
+            </a:r>
+          </a:p>
+          <a:p>
+            <a:pPr marL="285750" indent="-285750">
+              <a:spcAft>
+                <a:spcPts val="400"/>
+              </a:spcAft>
+              <a:buClr>
+                <a:srgbClr val="990F3D"/>
+              </a:buClr>
+              <a:buFont typeface="Arial"/>
+              <a:buChar char="•"/>
+            </a:pPr>
+            <a:r>
+              <a:rPr lang="es-ES" sz="1800" dirty="0">
+                <a:solidFill>
+                  <a:srgbClr val="2F2B28"/>
+                </a:solidFill>
+              </a:rPr>
+              <a:t>Declare por escrito sus relaciones con proveedores de tecnología, herramientas propias y esquema de honorarios (P41).</a:t>
+            </a:r>
+          </a:p>
+          <a:p>
+            <a:pPr marL="285750" indent="-285750">
+              <a:spcAft>
+                <a:spcPts val="400"/>
+              </a:spcAft>
+              <a:buClr>
+                <a:srgbClr val="990F3D"/>
+              </a:buClr>
+              <a:buFont typeface="Arial"/>
+              <a:buChar char="•"/>
+            </a:pPr>
+            <a:r>
+              <a:rPr lang="es-ES" sz="1800" dirty="0">
+                <a:solidFill>
+                  <a:srgbClr val="2F2B28"/>
+                </a:solidFill>
+              </a:rPr>
+              <a:t>Honorarios ligados al valor: solo sobre valor validado por control de gestión o por una auditoría ajena a usted.</a:t>
+            </a:r>
+          </a:p>
+        </p:txBody>
+      </p:sp>
+      <p:sp>
+        <p:nvSpPr>
+          <p:cNvPr id="235" name="Texto 235"/>
+          <p:cNvSpPr txBox="1"/>
+          <p:nvPr/>
+        </p:nvSpPr>
+        <p:spPr>
+          <a:xfrm>
+            <a:off x="609600" y="6250000"/>
             <a:ext cx="10972800" cy="450000"/>
           </a:xfrm>
           <a:prstGeom prst="rect">
@@ -6413,394 +6580,12 @@
           <a:p>
             <a:pPr algn="l"/>
             <a:r>
-              <a:rPr lang="es-ES" sz="1500" dirty="0">
-                <a:solidFill>
-                  <a:srgbClr val="564D47"/>
-                </a:solidFill>
-              </a:rPr>
-              <a:t>SEVEN-G es una marca registrada de Fernando García Varela; la licencia de contenidos no cede la marca</a:t>
-            </a:r>
-          </a:p>
-        </p:txBody>
-      </p:sp>
-      <p:sp>
-        <p:nvSpPr>
-          <p:cNvPr id="232" name="Caja 232"/>
-          <p:cNvSpPr/>
-          <p:nvPr/>
-        </p:nvSpPr>
-        <p:spPr>
-          <a:xfrm>
-            <a:off x="609600" y="2050000"/>
-            <a:ext cx="3577600" cy="800000"/>
-          </a:xfrm>
-          <a:prstGeom prst="roundRect">
-            <a:avLst>
-              <a:gd name="adj" fmla="val 6000"/>
-            </a:avLst>
-          </a:prstGeom>
-          <a:solidFill>
-            <a:srgbClr val="0D7680"/>
-          </a:solidFill>
-          <a:ln>
-            <a:noFill/>
-          </a:ln>
-        </p:spPr>
-        <p:txBody>
-          <a:bodyPr wrap="square" anchor="ctr" lIns="45720" rIns="45720">
-            <a:noAutofit/>
-          </a:bodyPr>
-          <a:lstStyle/>
-          <a:p>
-            <a:pPr algn="ctr"/>
-            <a:r>
-              <a:rPr lang="es-ES" sz="1700" b="1" dirty="0">
-                <a:solidFill>
-                  <a:srgbClr val="FFFFFF"/>
-                </a:solidFill>
-              </a:rPr>
-              <a:t>Sí</a:t>
-            </a:r>
-          </a:p>
-        </p:txBody>
-      </p:sp>
-      <p:sp>
-        <p:nvSpPr>
-          <p:cNvPr id="233" name="Caja 233"/>
-          <p:cNvSpPr/>
-          <p:nvPr/>
-        </p:nvSpPr>
-        <p:spPr>
-          <a:xfrm>
-            <a:off x="609600" y="2790000"/>
-            <a:ext cx="3577600" cy="2500000"/>
-          </a:xfrm>
-          <a:prstGeom prst="roundRect">
-            <a:avLst>
-              <a:gd name="adj" fmla="val 6000"/>
-            </a:avLst>
-          </a:prstGeom>
-          <a:solidFill>
-            <a:srgbClr val="F3CFB2"/>
-          </a:solidFill>
-          <a:ln>
-            <a:noFill/>
-          </a:ln>
-        </p:spPr>
-        <p:txBody>
-          <a:bodyPr wrap="square" anchor="ctr" lIns="45720" rIns="45720">
-            <a:noAutofit/>
-          </a:bodyPr>
-          <a:lstStyle/>
-          <a:p>
-            <a:pPr algn="ctr"/>
-            <a:r>
-              <a:rPr lang="es-ES" sz="1000" b="1" dirty="0">
-                <a:solidFill>
-                  <a:srgbClr val="2F2B28"/>
-                </a:solidFill>
-              </a:rPr>
-              <a:t/>
-            </a:r>
-          </a:p>
-        </p:txBody>
-      </p:sp>
-      <p:sp>
-        <p:nvSpPr>
-          <p:cNvPr id="234" name="Texto 234"/>
-          <p:cNvSpPr txBox="1"/>
-          <p:nvPr/>
-        </p:nvSpPr>
-        <p:spPr>
-          <a:xfrm>
-            <a:off x="649600" y="2890000"/>
-            <a:ext cx="3497600" cy="2340000"/>
-          </a:xfrm>
-          <a:prstGeom prst="rect">
-            <a:avLst/>
-          </a:prstGeom>
-          <a:noFill/>
-        </p:spPr>
-        <p:txBody>
-          <a:bodyPr wrap="square" anchor="t" lIns="45720" rIns="45720">
-            <a:noAutofit/>
-          </a:bodyPr>
-          <a:lstStyle/>
-          <a:p>
-            <a:pPr algn="l"/>
-            <a:r>
-              <a:rPr lang="es-ES" sz="1300" dirty="0">
-                <a:solidFill>
-                  <a:srgbClr val="2F2B28"/>
-                </a:solidFill>
-              </a:rPr>
-              <a:t>«Servicio basado en SEVEN-G (versión …), marco de Fernando García Varela, CC BY 4.0.»   «Metodología adaptada de SEVEN-G; cambios: …»   «Utiliza el mapa de esferas y las reglas de medición de SEVEN-G.»</a:t>
-            </a:r>
-          </a:p>
-        </p:txBody>
-      </p:sp>
-      <p:sp>
-        <p:nvSpPr>
-          <p:cNvPr id="235" name="Caja 235"/>
-          <p:cNvSpPr/>
-          <p:nvPr/>
-        </p:nvSpPr>
-        <p:spPr>
-          <a:xfrm>
-            <a:off x="4307200" y="2050000"/>
-            <a:ext cx="3577600" cy="800000"/>
-          </a:xfrm>
-          <a:prstGeom prst="roundRect">
-            <a:avLst>
-              <a:gd name="adj" fmla="val 6000"/>
-            </a:avLst>
-          </a:prstGeom>
-          <a:solidFill>
-            <a:srgbClr val="990F3D"/>
-          </a:solidFill>
-          <a:ln>
-            <a:noFill/>
-          </a:ln>
-        </p:spPr>
-        <p:txBody>
-          <a:bodyPr wrap="square" anchor="ctr" lIns="45720" rIns="45720">
-            <a:noAutofit/>
-          </a:bodyPr>
-          <a:lstStyle/>
-          <a:p>
-            <a:pPr algn="ctr"/>
-            <a:r>
-              <a:rPr lang="es-ES" sz="1700" b="1" dirty="0">
-                <a:solidFill>
-                  <a:srgbClr val="FFFFFF"/>
-                </a:solidFill>
-              </a:rPr>
-              <a:t>No</a:t>
-            </a:r>
-          </a:p>
-        </p:txBody>
-      </p:sp>
-      <p:sp>
-        <p:nvSpPr>
-          <p:cNvPr id="236" name="Caja 236"/>
-          <p:cNvSpPr/>
-          <p:nvPr/>
-        </p:nvSpPr>
-        <p:spPr>
-          <a:xfrm>
-            <a:off x="4307200" y="2790000"/>
-            <a:ext cx="3577600" cy="2500000"/>
-          </a:xfrm>
-          <a:prstGeom prst="roundRect">
-            <a:avLst>
-              <a:gd name="adj" fmla="val 6000"/>
-            </a:avLst>
-          </a:prstGeom>
-          <a:solidFill>
-            <a:srgbClr val="F3CFB2"/>
-          </a:solidFill>
-          <a:ln>
-            <a:noFill/>
-          </a:ln>
-        </p:spPr>
-        <p:txBody>
-          <a:bodyPr wrap="square" anchor="ctr" lIns="45720" rIns="45720">
-            <a:noAutofit/>
-          </a:bodyPr>
-          <a:lstStyle/>
-          <a:p>
-            <a:pPr algn="ctr"/>
-            <a:r>
-              <a:rPr lang="es-ES" sz="1000" b="1" dirty="0">
-                <a:solidFill>
-                  <a:srgbClr val="2F2B28"/>
-                </a:solidFill>
-              </a:rPr>
-              <a:t/>
-            </a:r>
-          </a:p>
-        </p:txBody>
-      </p:sp>
-      <p:sp>
-        <p:nvSpPr>
-          <p:cNvPr id="237" name="Texto 237"/>
-          <p:cNvSpPr txBox="1"/>
-          <p:nvPr/>
-        </p:nvSpPr>
-        <p:spPr>
-          <a:xfrm>
-            <a:off x="4347200" y="2890000"/>
-            <a:ext cx="3497600" cy="2340000"/>
-          </a:xfrm>
-          <a:prstGeom prst="rect">
-            <a:avLst/>
-          </a:prstGeom>
-          <a:noFill/>
-        </p:spPr>
-        <p:txBody>
-          <a:bodyPr wrap="square" anchor="t" lIns="45720" rIns="45720">
-            <a:noAutofit/>
-          </a:bodyPr>
-          <a:lstStyle/>
-          <a:p>
-            <a:pPr algn="l"/>
-            <a:r>
-              <a:rPr lang="es-ES" sz="1300" dirty="0">
-                <a:solidFill>
-                  <a:srgbClr val="2F2B28"/>
-                </a:solidFill>
-              </a:rPr>
-              <a:t>«Certificado SEVEN-G», «consultora acreditada», «partner oficial», «avalado por el autor»: no existe certificación ni programa de socios. Tampoco «cumplimiento garantizado por SEVEN-G».</a:t>
-            </a:r>
-          </a:p>
-        </p:txBody>
-      </p:sp>
-      <p:sp>
-        <p:nvSpPr>
-          <p:cNvPr id="238" name="Caja 238"/>
-          <p:cNvSpPr/>
-          <p:nvPr/>
-        </p:nvSpPr>
-        <p:spPr>
-          <a:xfrm>
-            <a:off x="8004800" y="2050000"/>
-            <a:ext cx="3577600" cy="800000"/>
-          </a:xfrm>
-          <a:prstGeom prst="roundRect">
-            <a:avLst>
-              <a:gd name="adj" fmla="val 6000"/>
-            </a:avLst>
-          </a:prstGeom>
-          <a:solidFill>
-            <a:srgbClr val="A5822A"/>
-          </a:solidFill>
-          <a:ln>
-            <a:noFill/>
-          </a:ln>
-        </p:spPr>
-        <p:txBody>
-          <a:bodyPr wrap="square" anchor="ctr" lIns="45720" rIns="45720">
-            <a:noAutofit/>
-          </a:bodyPr>
-          <a:lstStyle/>
-          <a:p>
-            <a:pPr algn="ctr"/>
-            <a:r>
-              <a:rPr lang="es-ES" sz="1700" b="1" dirty="0">
-                <a:solidFill>
-                  <a:srgbClr val="FFFFFF"/>
-                </a:solidFill>
-              </a:rPr>
-              <a:t>No prometa</a:t>
-            </a:r>
-          </a:p>
-        </p:txBody>
-      </p:sp>
-      <p:sp>
-        <p:nvSpPr>
-          <p:cNvPr id="239" name="Caja 239"/>
-          <p:cNvSpPr/>
-          <p:nvPr/>
-        </p:nvSpPr>
-        <p:spPr>
-          <a:xfrm>
-            <a:off x="8004800" y="2790000"/>
-            <a:ext cx="3577600" cy="2500000"/>
-          </a:xfrm>
-          <a:prstGeom prst="roundRect">
-            <a:avLst>
-              <a:gd name="adj" fmla="val 6000"/>
-            </a:avLst>
-          </a:prstGeom>
-          <a:solidFill>
-            <a:srgbClr val="F3CFB2"/>
-          </a:solidFill>
-          <a:ln>
-            <a:noFill/>
-          </a:ln>
-        </p:spPr>
-        <p:txBody>
-          <a:bodyPr wrap="square" anchor="ctr" lIns="45720" rIns="45720">
-            <a:noAutofit/>
-          </a:bodyPr>
-          <a:lstStyle/>
-          <a:p>
-            <a:pPr algn="ctr"/>
-            <a:r>
-              <a:rPr lang="es-ES" sz="1000" b="1" dirty="0">
-                <a:solidFill>
-                  <a:srgbClr val="2F2B28"/>
-                </a:solidFill>
-              </a:rPr>
-              <a:t/>
-            </a:r>
-          </a:p>
-        </p:txBody>
-      </p:sp>
-      <p:sp>
-        <p:nvSpPr>
-          <p:cNvPr id="240" name="Texto 240"/>
-          <p:cNvSpPr txBox="1"/>
-          <p:nvPr/>
-        </p:nvSpPr>
-        <p:spPr>
-          <a:xfrm>
-            <a:off x="8044800" y="2890000"/>
-            <a:ext cx="3497600" cy="2340000"/>
-          </a:xfrm>
-          <a:prstGeom prst="rect">
-            <a:avLst/>
-          </a:prstGeom>
-          <a:noFill/>
-        </p:spPr>
-        <p:txBody>
-          <a:bodyPr wrap="square" anchor="t" lIns="45720" rIns="45720">
-            <a:noAutofit/>
-          </a:bodyPr>
-          <a:lstStyle/>
-          <a:p>
-            <a:pPr algn="l"/>
-            <a:r>
-              <a:rPr lang="es-ES" sz="1300" dirty="0">
-                <a:solidFill>
-                  <a:srgbClr val="2F2B28"/>
-                </a:solidFill>
-              </a:rPr>
-              <a:t>Un X % de ahorro antes del diagnóstico, un nivel de madurez en un plazo, «su compañía se transformará», «sin riesgo» o plazos de implantación sin haber diagnosticado.</a:t>
-            </a:r>
-          </a:p>
-        </p:txBody>
-      </p:sp>
-      <p:sp>
-        <p:nvSpPr>
-          <p:cNvPr id="241" name="Texto 241"/>
-          <p:cNvSpPr txBox="1"/>
-          <p:nvPr/>
-        </p:nvSpPr>
-        <p:spPr>
-          <a:xfrm>
-            <a:off x="609600" y="6150000"/>
-            <a:ext cx="10972800" cy="500000"/>
-          </a:xfrm>
-          <a:prstGeom prst="rect">
-            <a:avLst/>
-          </a:prstGeom>
-          <a:noFill/>
-        </p:spPr>
-        <p:txBody>
-          <a:bodyPr wrap="square" anchor="t" lIns="45720" rIns="45720">
-            <a:noAutofit/>
-          </a:bodyPr>
-          <a:lstStyle/>
-          <a:p>
-            <a:pPr algn="l"/>
-            <a:r>
               <a:rPr lang="es-ES" sz="1400" b="1" dirty="0">
                 <a:solidFill>
                   <a:srgbClr val="0F5499"/>
                 </a:solidFill>
               </a:rPr>
-              <a:t>Documento 91, secciones 6 y 8.</a:t>
+              <a:t>Documento 91, sección 5.</a:t>
             </a:r>
           </a:p>
         </p:txBody>
@@ -6840,7 +6625,7 @@
       </p:grpSpPr>
       <p:sp>
         <p:nvSpPr>
-          <p:cNvPr id="247" name="Marca"/>
+          <p:cNvPr id="249" name="Marca"/>
           <p:cNvSpPr/>
           <p:nvPr/>
         </p:nvSpPr>
@@ -6864,7 +6649,7 @@
       </p:sp>
       <p:sp>
         <p:nvSpPr>
-          <p:cNvPr id="248" name="Texto 248"/>
+          <p:cNvPr id="250" name="Texto 250"/>
           <p:cNvSpPr txBox="1"/>
           <p:nvPr/>
         </p:nvSpPr>
@@ -6898,7 +6683,7 @@
       </p:sp>
       <p:sp>
         <p:nvSpPr>
-          <p:cNvPr id="249" name="Texto 249"/>
+          <p:cNvPr id="251" name="Texto 251"/>
           <p:cNvSpPr txBox="1"/>
           <p:nvPr/>
         </p:nvSpPr>
@@ -6925,130 +6710,423 @@
                   <a:srgbClr val="990F3D"/>
                 </a:solidFill>
               </a:rPr>
-              <a:t>Sus plantillas y la salida del servicio</a:t>
-            </a:r>
-          </a:p>
-        </p:txBody>
-      </p:sp>
-      <p:sp>
-        <p:nvSpPr>
-          <p:cNvPr id="246" name="Texto 246"/>
-          <p:cNvSpPr txBox="1"/>
-          <p:nvPr/>
-        </p:nvSpPr>
-        <p:spPr>
-          <a:xfrm>
-            <a:off x="609600" y="1750000"/>
-            <a:ext cx="10972800" cy="4400000"/>
-          </a:xfrm>
-          <a:prstGeom prst="rect">
-            <a:avLst/>
-          </a:prstGeom>
-          <a:noFill/>
-        </p:spPr>
-        <p:txBody>
-          <a:bodyPr wrap="square" anchor="t" lIns="45720" rIns="45720">
-            <a:noAutofit/>
-          </a:bodyPr>
-          <a:lstStyle/>
-          <a:p>
-            <a:pPr marL="285750" indent="-285750">
-              <a:spcAft>
-                <a:spcPts val="400"/>
-              </a:spcAft>
-              <a:buClr>
-                <a:srgbClr val="990F3D"/>
-              </a:buClr>
-              <a:buFont typeface="Arial"/>
-              <a:buChar char="•"/>
-            </a:pPr>
-            <a:r>
-              <a:rPr lang="es-ES" sz="1800" dirty="0">
-                <a:solidFill>
-                  <a:srgbClr val="2F2B28"/>
-                </a:solidFill>
-              </a:rPr>
-              <a:t>P70 Propuesta y carta de encargo: alcance, modelo (M1–M5), fuera de alcance, roles de ambas partes e independencia.</a:t>
-            </a:r>
-          </a:p>
-          <a:p>
-            <a:pPr marL="285750" indent="-285750">
-              <a:spcAft>
-                <a:spcPts val="400"/>
-              </a:spcAft>
-              <a:buClr>
-                <a:srgbClr val="990F3D"/>
-              </a:buClr>
-              <a:buFont typeface="Arial"/>
-              <a:buChar char="•"/>
-            </a:pPr>
-            <a:r>
-              <a:rPr lang="es-ES" sz="1800" dirty="0">
-                <a:solidFill>
-                  <a:srgbClr val="2F2B28"/>
-                </a:solidFill>
-              </a:rPr>
-              <a:t>P41 Declaración de independencia y conflictos de interés, al inicio de todo servicio M3 o M4.</a:t>
-            </a:r>
-          </a:p>
-          <a:p>
-            <a:pPr marL="285750" indent="-285750">
-              <a:spcAft>
-                <a:spcPts val="400"/>
-              </a:spcAft>
-              <a:buClr>
-                <a:srgbClr val="990F3D"/>
-              </a:buClr>
-              <a:buFont typeface="Arial"/>
-              <a:buChar char="•"/>
-            </a:pPr>
-            <a:r>
-              <a:rPr lang="es-ES" sz="1800" dirty="0">
-                <a:solidFill>
-                  <a:srgbClr val="2F2B28"/>
-                </a:solidFill>
-              </a:rPr>
-              <a:t>Calidad: cada entregable indica versión y adaptaciones, enlaza su evidencia y lo revisa un segundo profesional.</a:t>
-            </a:r>
-          </a:p>
-          <a:p>
-            <a:pPr marL="285750" indent="-285750">
-              <a:spcAft>
-                <a:spcPts val="400"/>
-              </a:spcAft>
-              <a:buClr>
-                <a:srgbClr val="990F3D"/>
-              </a:buClr>
-              <a:buFont typeface="Arial"/>
-              <a:buChar char="•"/>
-            </a:pPr>
-            <a:r>
-              <a:rPr lang="es-ES" sz="1800" dirty="0">
-                <a:solidFill>
-                  <a:srgbClr val="2F2B28"/>
-                </a:solidFill>
-              </a:rPr>
-              <a:t>P71 Plan de transferencia y nota de salida: registros en formato abierto, evidencias localizadas, pendientes con responsable y riesgos abiertos.</a:t>
-            </a:r>
-          </a:p>
-          <a:p>
-            <a:pPr marL="285750" indent="-285750">
-              <a:spcAft>
-                <a:spcPts val="400"/>
-              </a:spcAft>
-              <a:buClr>
-                <a:srgbClr val="990F3D"/>
-              </a:buClr>
-              <a:buFont typeface="Arial"/>
-              <a:buChar char="•"/>
-            </a:pPr>
-            <a:r>
-              <a:rPr lang="es-ES" sz="1800" dirty="0">
-                <a:solidFill>
-                  <a:srgbClr val="2F2B28"/>
-                </a:solidFill>
-              </a:rPr>
-              <a:t>La prueba de un buen trabajo: la compañía no le necesita para leer ni para mantener nada de lo entregado.</a:t>
+              <a:t>Qué puede decir y qué no</a:t>
+            </a:r>
+          </a:p>
+        </p:txBody>
+      </p:sp>
+      <p:sp>
+        <p:nvSpPr>
+          <p:cNvPr id="252" name="Texto 252"/>
+          <p:cNvSpPr txBox="1"/>
+          <p:nvPr/>
+        </p:nvSpPr>
+        <p:spPr>
+          <a:xfrm>
+            <a:off x="609600" y="1330000"/>
+            <a:ext cx="10972800" cy="450000"/>
+          </a:xfrm>
+          <a:prstGeom prst="rect">
+            <a:avLst/>
+          </a:prstGeom>
+          <a:noFill/>
+        </p:spPr>
+        <p:txBody>
+          <a:bodyPr wrap="square" anchor="t" lIns="45720" rIns="45720">
+            <a:noAutofit/>
+          </a:bodyPr>
+          <a:lstStyle/>
+          <a:p>
+            <a:pPr algn="l"/>
+            <a:r>
+              <a:rPr lang="es-ES" sz="1500" dirty="0">
+                <a:solidFill>
+                  <a:srgbClr val="564D47"/>
+                </a:solidFill>
+              </a:rPr>
+              <a:t>SEVEN-G es una marca registrada de Fernando García Varela; la licencia de contenidos no cede la marca</a:t>
+            </a:r>
+          </a:p>
+        </p:txBody>
+      </p:sp>
+      <p:sp>
+        <p:nvSpPr>
+          <p:cNvPr id="239" name="Caja 239"/>
+          <p:cNvSpPr/>
+          <p:nvPr/>
+        </p:nvSpPr>
+        <p:spPr>
+          <a:xfrm>
+            <a:off x="609600" y="2050000"/>
+            <a:ext cx="3577600" cy="800000"/>
+          </a:xfrm>
+          <a:prstGeom prst="roundRect">
+            <a:avLst>
+              <a:gd name="adj" fmla="val 6000"/>
+            </a:avLst>
+          </a:prstGeom>
+          <a:solidFill>
+            <a:srgbClr val="0D7680"/>
+          </a:solidFill>
+          <a:ln>
+            <a:noFill/>
+          </a:ln>
+        </p:spPr>
+        <p:txBody>
+          <a:bodyPr wrap="square" anchor="ctr" lIns="45720" rIns="45720">
+            <a:noAutofit/>
+          </a:bodyPr>
+          <a:lstStyle/>
+          <a:p>
+            <a:pPr algn="ctr"/>
+            <a:r>
+              <a:rPr lang="es-ES" sz="1700" b="1" dirty="0">
+                <a:solidFill>
+                  <a:srgbClr val="FFFFFF"/>
+                </a:solidFill>
+              </a:rPr>
+              <a:t>Sí</a:t>
+            </a:r>
+          </a:p>
+        </p:txBody>
+      </p:sp>
+      <p:sp>
+        <p:nvSpPr>
+          <p:cNvPr id="240" name="Caja 240"/>
+          <p:cNvSpPr/>
+          <p:nvPr/>
+        </p:nvSpPr>
+        <p:spPr>
+          <a:xfrm>
+            <a:off x="609600" y="2790000"/>
+            <a:ext cx="3577600" cy="2500000"/>
+          </a:xfrm>
+          <a:prstGeom prst="roundRect">
+            <a:avLst>
+              <a:gd name="adj" fmla="val 6000"/>
+            </a:avLst>
+          </a:prstGeom>
+          <a:solidFill>
+            <a:srgbClr val="F3CFB2"/>
+          </a:solidFill>
+          <a:ln>
+            <a:noFill/>
+          </a:ln>
+        </p:spPr>
+        <p:txBody>
+          <a:bodyPr wrap="square" anchor="ctr" lIns="45720" rIns="45720">
+            <a:noAutofit/>
+          </a:bodyPr>
+          <a:lstStyle/>
+          <a:p>
+            <a:pPr algn="ctr"/>
+            <a:r>
+              <a:rPr lang="es-ES" sz="1000" b="1" dirty="0">
+                <a:solidFill>
+                  <a:srgbClr val="2F2B28"/>
+                </a:solidFill>
+              </a:rPr>
+              <a:t/>
+            </a:r>
+          </a:p>
+        </p:txBody>
+      </p:sp>
+      <p:sp>
+        <p:nvSpPr>
+          <p:cNvPr id="241" name="Texto 241"/>
+          <p:cNvSpPr txBox="1"/>
+          <p:nvPr/>
+        </p:nvSpPr>
+        <p:spPr>
+          <a:xfrm>
+            <a:off x="649600" y="2890000"/>
+            <a:ext cx="3497600" cy="2340000"/>
+          </a:xfrm>
+          <a:prstGeom prst="rect">
+            <a:avLst/>
+          </a:prstGeom>
+          <a:noFill/>
+        </p:spPr>
+        <p:txBody>
+          <a:bodyPr wrap="square" anchor="t" lIns="45720" rIns="45720">
+            <a:noAutofit/>
+          </a:bodyPr>
+          <a:lstStyle/>
+          <a:p>
+            <a:pPr algn="l"/>
+            <a:r>
+              <a:rPr lang="es-ES" sz="1300" dirty="0">
+                <a:solidFill>
+                  <a:srgbClr val="2F2B28"/>
+                </a:solidFill>
+              </a:rPr>
+              <a:t>«Servicio basado en SEVEN-G (versión …), marco de Fernando García Varela, CC BY 4.0.»   «Metodología adaptada de SEVEN-G; cambios: …»   «Utiliza el mapa de esferas y las reglas de medición de SEVEN-G.»</a:t>
+            </a:r>
+          </a:p>
+        </p:txBody>
+      </p:sp>
+      <p:sp>
+        <p:nvSpPr>
+          <p:cNvPr id="242" name="Caja 242"/>
+          <p:cNvSpPr/>
+          <p:nvPr/>
+        </p:nvSpPr>
+        <p:spPr>
+          <a:xfrm>
+            <a:off x="4307200" y="2050000"/>
+            <a:ext cx="3577600" cy="800000"/>
+          </a:xfrm>
+          <a:prstGeom prst="roundRect">
+            <a:avLst>
+              <a:gd name="adj" fmla="val 6000"/>
+            </a:avLst>
+          </a:prstGeom>
+          <a:solidFill>
+            <a:srgbClr val="990F3D"/>
+          </a:solidFill>
+          <a:ln>
+            <a:noFill/>
+          </a:ln>
+        </p:spPr>
+        <p:txBody>
+          <a:bodyPr wrap="square" anchor="ctr" lIns="45720" rIns="45720">
+            <a:noAutofit/>
+          </a:bodyPr>
+          <a:lstStyle/>
+          <a:p>
+            <a:pPr algn="ctr"/>
+            <a:r>
+              <a:rPr lang="es-ES" sz="1700" b="1" dirty="0">
+                <a:solidFill>
+                  <a:srgbClr val="FFFFFF"/>
+                </a:solidFill>
+              </a:rPr>
+              <a:t>No</a:t>
+            </a:r>
+          </a:p>
+        </p:txBody>
+      </p:sp>
+      <p:sp>
+        <p:nvSpPr>
+          <p:cNvPr id="243" name="Caja 243"/>
+          <p:cNvSpPr/>
+          <p:nvPr/>
+        </p:nvSpPr>
+        <p:spPr>
+          <a:xfrm>
+            <a:off x="4307200" y="2790000"/>
+            <a:ext cx="3577600" cy="2500000"/>
+          </a:xfrm>
+          <a:prstGeom prst="roundRect">
+            <a:avLst>
+              <a:gd name="adj" fmla="val 6000"/>
+            </a:avLst>
+          </a:prstGeom>
+          <a:solidFill>
+            <a:srgbClr val="F3CFB2"/>
+          </a:solidFill>
+          <a:ln>
+            <a:noFill/>
+          </a:ln>
+        </p:spPr>
+        <p:txBody>
+          <a:bodyPr wrap="square" anchor="ctr" lIns="45720" rIns="45720">
+            <a:noAutofit/>
+          </a:bodyPr>
+          <a:lstStyle/>
+          <a:p>
+            <a:pPr algn="ctr"/>
+            <a:r>
+              <a:rPr lang="es-ES" sz="1000" b="1" dirty="0">
+                <a:solidFill>
+                  <a:srgbClr val="2F2B28"/>
+                </a:solidFill>
+              </a:rPr>
+              <a:t/>
+            </a:r>
+          </a:p>
+        </p:txBody>
+      </p:sp>
+      <p:sp>
+        <p:nvSpPr>
+          <p:cNvPr id="244" name="Texto 244"/>
+          <p:cNvSpPr txBox="1"/>
+          <p:nvPr/>
+        </p:nvSpPr>
+        <p:spPr>
+          <a:xfrm>
+            <a:off x="4347200" y="2890000"/>
+            <a:ext cx="3497600" cy="2340000"/>
+          </a:xfrm>
+          <a:prstGeom prst="rect">
+            <a:avLst/>
+          </a:prstGeom>
+          <a:noFill/>
+        </p:spPr>
+        <p:txBody>
+          <a:bodyPr wrap="square" anchor="t" lIns="45720" rIns="45720">
+            <a:noAutofit/>
+          </a:bodyPr>
+          <a:lstStyle/>
+          <a:p>
+            <a:pPr algn="l"/>
+            <a:r>
+              <a:rPr lang="es-ES" sz="1300" dirty="0">
+                <a:solidFill>
+                  <a:srgbClr val="2F2B28"/>
+                </a:solidFill>
+              </a:rPr>
+              <a:t>«Certificado SEVEN-G», «consultora acreditada», «partner oficial», «avalado por el autor»: no existe certificación ni programa de socios. Tampoco «cumplimiento garantizado por SEVEN-G».</a:t>
+            </a:r>
+          </a:p>
+        </p:txBody>
+      </p:sp>
+      <p:sp>
+        <p:nvSpPr>
+          <p:cNvPr id="245" name="Caja 245"/>
+          <p:cNvSpPr/>
+          <p:nvPr/>
+        </p:nvSpPr>
+        <p:spPr>
+          <a:xfrm>
+            <a:off x="8004800" y="2050000"/>
+            <a:ext cx="3577600" cy="800000"/>
+          </a:xfrm>
+          <a:prstGeom prst="roundRect">
+            <a:avLst>
+              <a:gd name="adj" fmla="val 6000"/>
+            </a:avLst>
+          </a:prstGeom>
+          <a:solidFill>
+            <a:srgbClr val="A5822A"/>
+          </a:solidFill>
+          <a:ln>
+            <a:noFill/>
+          </a:ln>
+        </p:spPr>
+        <p:txBody>
+          <a:bodyPr wrap="square" anchor="ctr" lIns="45720" rIns="45720">
+            <a:noAutofit/>
+          </a:bodyPr>
+          <a:lstStyle/>
+          <a:p>
+            <a:pPr algn="ctr"/>
+            <a:r>
+              <a:rPr lang="es-ES" sz="1700" b="1" dirty="0">
+                <a:solidFill>
+                  <a:srgbClr val="FFFFFF"/>
+                </a:solidFill>
+              </a:rPr>
+              <a:t>No prometa</a:t>
+            </a:r>
+          </a:p>
+        </p:txBody>
+      </p:sp>
+      <p:sp>
+        <p:nvSpPr>
+          <p:cNvPr id="246" name="Caja 246"/>
+          <p:cNvSpPr/>
+          <p:nvPr/>
+        </p:nvSpPr>
+        <p:spPr>
+          <a:xfrm>
+            <a:off x="8004800" y="2790000"/>
+            <a:ext cx="3577600" cy="2500000"/>
+          </a:xfrm>
+          <a:prstGeom prst="roundRect">
+            <a:avLst>
+              <a:gd name="adj" fmla="val 6000"/>
+            </a:avLst>
+          </a:prstGeom>
+          <a:solidFill>
+            <a:srgbClr val="F3CFB2"/>
+          </a:solidFill>
+          <a:ln>
+            <a:noFill/>
+          </a:ln>
+        </p:spPr>
+        <p:txBody>
+          <a:bodyPr wrap="square" anchor="ctr" lIns="45720" rIns="45720">
+            <a:noAutofit/>
+          </a:bodyPr>
+          <a:lstStyle/>
+          <a:p>
+            <a:pPr algn="ctr"/>
+            <a:r>
+              <a:rPr lang="es-ES" sz="1000" b="1" dirty="0">
+                <a:solidFill>
+                  <a:srgbClr val="2F2B28"/>
+                </a:solidFill>
+              </a:rPr>
+              <a:t/>
+            </a:r>
+          </a:p>
+        </p:txBody>
+      </p:sp>
+      <p:sp>
+        <p:nvSpPr>
+          <p:cNvPr id="247" name="Texto 247"/>
+          <p:cNvSpPr txBox="1"/>
+          <p:nvPr/>
+        </p:nvSpPr>
+        <p:spPr>
+          <a:xfrm>
+            <a:off x="8044800" y="2890000"/>
+            <a:ext cx="3497600" cy="2340000"/>
+          </a:xfrm>
+          <a:prstGeom prst="rect">
+            <a:avLst/>
+          </a:prstGeom>
+          <a:noFill/>
+        </p:spPr>
+        <p:txBody>
+          <a:bodyPr wrap="square" anchor="t" lIns="45720" rIns="45720">
+            <a:noAutofit/>
+          </a:bodyPr>
+          <a:lstStyle/>
+          <a:p>
+            <a:pPr algn="l"/>
+            <a:r>
+              <a:rPr lang="es-ES" sz="1300" dirty="0">
+                <a:solidFill>
+                  <a:srgbClr val="2F2B28"/>
+                </a:solidFill>
+              </a:rPr>
+              <a:t>Un X % de ahorro antes del diagnóstico, un nivel de madurez en un plazo, «su compañía se transformará», «sin riesgo» o plazos de implantación sin haber diagnosticado.</a:t>
+            </a:r>
+          </a:p>
+        </p:txBody>
+      </p:sp>
+      <p:sp>
+        <p:nvSpPr>
+          <p:cNvPr id="248" name="Texto 248"/>
+          <p:cNvSpPr txBox="1"/>
+          <p:nvPr/>
+        </p:nvSpPr>
+        <p:spPr>
+          <a:xfrm>
+            <a:off x="609600" y="6150000"/>
+            <a:ext cx="10972800" cy="500000"/>
+          </a:xfrm>
+          <a:prstGeom prst="rect">
+            <a:avLst/>
+          </a:prstGeom>
+          <a:noFill/>
+        </p:spPr>
+        <p:txBody>
+          <a:bodyPr wrap="square" anchor="t" lIns="45720" rIns="45720">
+            <a:noAutofit/>
+          </a:bodyPr>
+          <a:lstStyle/>
+          <a:p>
+            <a:pPr algn="l"/>
+            <a:r>
+              <a:rPr lang="es-ES" sz="1400" b="1" dirty="0">
+                <a:solidFill>
+                  <a:srgbClr val="0F5499"/>
+                </a:solidFill>
+              </a:rPr>
+              <a:t>Documento 91, secciones 6 y 8.</a:t>
             </a:r>
           </a:p>
         </p:txBody>
@@ -7088,7 +7166,255 @@
       </p:grpSpPr>
       <p:sp>
         <p:nvSpPr>
-          <p:cNvPr id="250" name="Texto 250"/>
+          <p:cNvPr id="254" name="Marca"/>
+          <p:cNvSpPr/>
+          <p:nvPr/>
+        </p:nvSpPr>
+        <p:spPr>
+          <a:xfrm>
+            <a:off x="609600" y="365760"/>
+            <a:ext cx="182880" cy="182880"/>
+          </a:xfrm>
+          <a:prstGeom prst="rect">
+            <a:avLst/>
+          </a:prstGeom>
+          <a:solidFill>
+            <a:srgbClr val="990F3D"/>
+          </a:solidFill>
+        </p:spPr>
+        <p:txBody>
+          <a:bodyPr/>
+          <a:lstStyle/>
+          <a:p/>
+        </p:txBody>
+      </p:sp>
+      <p:sp>
+        <p:nvSpPr>
+          <p:cNvPr id="255" name="Texto 255"/>
+          <p:cNvSpPr txBox="1"/>
+          <p:nvPr/>
+        </p:nvSpPr>
+        <p:spPr>
+          <a:xfrm>
+            <a:off x="838200" y="300000"/>
+            <a:ext cx="10500000" cy="320000"/>
+          </a:xfrm>
+          <a:prstGeom prst="rect">
+            <a:avLst/>
+          </a:prstGeom>
+          <a:noFill/>
+        </p:spPr>
+        <p:txBody>
+          <a:bodyPr wrap="square" anchor="ctr" lIns="45720" rIns="45720">
+            <a:noAutofit/>
+          </a:bodyPr>
+          <a:lstStyle/>
+          <a:p>
+            <a:pPr algn="l"/>
+            <a:r>
+              <a:rPr lang="es-ES" sz="1400" b="1" dirty="0">
+                <a:solidFill>
+                  <a:srgbClr val="1A1817"/>
+                </a:solidFill>
+              </a:rPr>
+              <a:t>SEVEN-G · CURSO · CONSULTOR · ACOMPAÑAR A CLIENTES</a:t>
+            </a:r>
+          </a:p>
+        </p:txBody>
+      </p:sp>
+      <p:sp>
+        <p:nvSpPr>
+          <p:cNvPr id="256" name="Texto 256"/>
+          <p:cNvSpPr txBox="1"/>
+          <p:nvPr/>
+        </p:nvSpPr>
+        <p:spPr>
+          <a:xfrm>
+            <a:off x="609600" y="700000"/>
+            <a:ext cx="10972800" cy="650000"/>
+          </a:xfrm>
+          <a:prstGeom prst="rect">
+            <a:avLst/>
+          </a:prstGeom>
+          <a:noFill/>
+        </p:spPr>
+        <p:txBody>
+          <a:bodyPr wrap="square" anchor="t" lIns="45720" rIns="45720">
+            <a:noAutofit/>
+          </a:bodyPr>
+          <a:lstStyle/>
+          <a:p>
+            <a:pPr algn="l"/>
+            <a:r>
+              <a:rPr lang="es-ES" sz="2700" b="1" dirty="0">
+                <a:solidFill>
+                  <a:srgbClr val="990F3D"/>
+                </a:solidFill>
+              </a:rPr>
+              <a:t>Sus plantillas y la salida del servicio</a:t>
+            </a:r>
+          </a:p>
+        </p:txBody>
+      </p:sp>
+      <p:sp>
+        <p:nvSpPr>
+          <p:cNvPr id="253" name="Texto 253"/>
+          <p:cNvSpPr txBox="1"/>
+          <p:nvPr/>
+        </p:nvSpPr>
+        <p:spPr>
+          <a:xfrm>
+            <a:off x="609600" y="1750000"/>
+            <a:ext cx="10972800" cy="4400000"/>
+          </a:xfrm>
+          <a:prstGeom prst="rect">
+            <a:avLst/>
+          </a:prstGeom>
+          <a:noFill/>
+        </p:spPr>
+        <p:txBody>
+          <a:bodyPr wrap="square" anchor="t" lIns="45720" rIns="45720">
+            <a:noAutofit/>
+          </a:bodyPr>
+          <a:lstStyle/>
+          <a:p>
+            <a:pPr marL="285750" indent="-285750">
+              <a:spcAft>
+                <a:spcPts val="400"/>
+              </a:spcAft>
+              <a:buClr>
+                <a:srgbClr val="990F3D"/>
+              </a:buClr>
+              <a:buFont typeface="Arial"/>
+              <a:buChar char="•"/>
+            </a:pPr>
+            <a:r>
+              <a:rPr lang="es-ES" sz="1800" dirty="0">
+                <a:solidFill>
+                  <a:srgbClr val="2F2B28"/>
+                </a:solidFill>
+              </a:rPr>
+              <a:t>P70 Propuesta y carta de encargo: alcance, modelo (M1–M5), fuera de alcance, roles de ambas partes e independencia.</a:t>
+            </a:r>
+          </a:p>
+          <a:p>
+            <a:pPr marL="285750" indent="-285750">
+              <a:spcAft>
+                <a:spcPts val="400"/>
+              </a:spcAft>
+              <a:buClr>
+                <a:srgbClr val="990F3D"/>
+              </a:buClr>
+              <a:buFont typeface="Arial"/>
+              <a:buChar char="•"/>
+            </a:pPr>
+            <a:r>
+              <a:rPr lang="es-ES" sz="1800" dirty="0">
+                <a:solidFill>
+                  <a:srgbClr val="2F2B28"/>
+                </a:solidFill>
+              </a:rPr>
+              <a:t>P41 Declaración de independencia y conflictos de interés, al inicio de todo servicio M3 o M4.</a:t>
+            </a:r>
+          </a:p>
+          <a:p>
+            <a:pPr marL="285750" indent="-285750">
+              <a:spcAft>
+                <a:spcPts val="400"/>
+              </a:spcAft>
+              <a:buClr>
+                <a:srgbClr val="990F3D"/>
+              </a:buClr>
+              <a:buFont typeface="Arial"/>
+              <a:buChar char="•"/>
+            </a:pPr>
+            <a:r>
+              <a:rPr lang="es-ES" sz="1800" dirty="0">
+                <a:solidFill>
+                  <a:srgbClr val="2F2B28"/>
+                </a:solidFill>
+              </a:rPr>
+              <a:t>Calidad: cada entregable indica versión y adaptaciones, enlaza su evidencia y lo revisa un segundo profesional.</a:t>
+            </a:r>
+          </a:p>
+          <a:p>
+            <a:pPr marL="285750" indent="-285750">
+              <a:spcAft>
+                <a:spcPts val="400"/>
+              </a:spcAft>
+              <a:buClr>
+                <a:srgbClr val="990F3D"/>
+              </a:buClr>
+              <a:buFont typeface="Arial"/>
+              <a:buChar char="•"/>
+            </a:pPr>
+            <a:r>
+              <a:rPr lang="es-ES" sz="1800" dirty="0">
+                <a:solidFill>
+                  <a:srgbClr val="2F2B28"/>
+                </a:solidFill>
+              </a:rPr>
+              <a:t>P71 Plan de transferencia y nota de salida: registros en formato abierto, evidencias localizadas, pendientes con responsable y riesgos abiertos.</a:t>
+            </a:r>
+          </a:p>
+          <a:p>
+            <a:pPr marL="285750" indent="-285750">
+              <a:spcAft>
+                <a:spcPts val="400"/>
+              </a:spcAft>
+              <a:buClr>
+                <a:srgbClr val="990F3D"/>
+              </a:buClr>
+              <a:buFont typeface="Arial"/>
+              <a:buChar char="•"/>
+            </a:pPr>
+            <a:r>
+              <a:rPr lang="es-ES" sz="1800" dirty="0">
+                <a:solidFill>
+                  <a:srgbClr val="2F2B28"/>
+                </a:solidFill>
+              </a:rPr>
+              <a:t>La prueba de un buen trabajo: la compañía no le necesita para leer ni para mantener nada de lo entregado.</a:t>
+            </a:r>
+          </a:p>
+        </p:txBody>
+      </p:sp>
+    </p:spTree>
+  </p:cSld>
+  <p:clrMapOvr>
+    <a:overrideClrMapping bg1="lt1" tx1="dk1" bg2="lt2" tx2="dk2" accent1="accent1" accent2="accent2" accent3="accent3" accent4="accent4" accent5="accent5" accent6="accent6" hlink="hlink" folHlink="folHlink"/>
+  </p:clrMapOvr>
+</p:sld>
+</file>
+
+<file path=ppt/slides/slide27.xml><?xml version="1.0" encoding="utf-8"?>
+<p:sld xmlns:a="http://schemas.openxmlformats.org/drawingml/2006/main" xmlns:r="http://schemas.openxmlformats.org/officeDocument/2006/relationships" xmlns:p="http://schemas.openxmlformats.org/presentationml/2006/main">
+  <p:cSld>
+    <p:bg>
+      <p:bgPr>
+        <a:solidFill>
+          <a:srgbClr val="FBE2CD"/>
+        </a:solidFill>
+        <a:effectLst/>
+      </p:bgPr>
+    </p:bg>
+    <p:spTree>
+      <p:nvGrpSpPr>
+        <p:cNvPr id="1" name=""/>
+        <p:cNvGrpSpPr/>
+        <p:nvPr/>
+      </p:nvGrpSpPr>
+      <p:grpSpPr>
+        <a:xfrm>
+          <a:off x="0" y="0"/>
+          <a:ext cx="0" cy="0"/>
+          <a:chOff x="0" y="0"/>
+          <a:chExt cx="0" cy="0"/>
+        </a:xfrm>
+      </p:grpSpPr>
+      <p:sp>
+        <p:nvSpPr>
+          <p:cNvPr id="257" name="Texto 257"/>
           <p:cNvSpPr txBox="1"/>
           <p:nvPr/>
         </p:nvSpPr>
@@ -7122,7 +7448,7 @@
       </p:sp>
       <p:sp>
         <p:nvSpPr>
-          <p:cNvPr id="251" name="Texto 251"/>
+          <p:cNvPr id="258" name="Texto 258"/>
           <p:cNvSpPr txBox="1"/>
           <p:nvPr/>
         </p:nvSpPr>
@@ -7156,7 +7482,7 @@
       </p:sp>
       <p:sp>
         <p:nvSpPr>
-          <p:cNvPr id="252" name="Texto 252"/>
+          <p:cNvPr id="259" name="Texto 259"/>
           <p:cNvSpPr txBox="1"/>
           <p:nvPr/>
         </p:nvSpPr>
@@ -7190,7 +7516,7 @@
       </p:sp>
       <p:sp>
         <p:nvSpPr>
-          <p:cNvPr id="253" name="Texto 253"/>
+          <p:cNvPr id="260" name="Texto 260"/>
           <p:cNvSpPr txBox="1"/>
           <p:nvPr/>
         </p:nvSpPr>
@@ -7224,7 +7550,7 @@
       </p:sp>
       <p:sp>
         <p:nvSpPr>
-          <p:cNvPr id="254" name="Texto 254"/>
+          <p:cNvPr id="261" name="Texto 261"/>
           <p:cNvSpPr txBox="1"/>
           <p:nvPr/>
         </p:nvSpPr>
